--- a/docs/PowerPoint/YallaMarket_Final_Presentation.pptx
+++ b/docs/PowerPoint/YallaMarket_Final_Presentation.pptx
@@ -5,7 +5,7 @@
     <p:sldMasterId id="2147483648" r:id="rId1"/>
   </p:sldMasterIdLst>
   <p:notesMasterIdLst>
-    <p:notesMasterId r:id="rId18"/>
+    <p:notesMasterId r:id="rId20"/>
   </p:notesMasterIdLst>
   <p:sldIdLst>
     <p:sldId id="256" r:id="rId2"/>
@@ -14,16 +14,18 @@
     <p:sldId id="259" r:id="rId5"/>
     <p:sldId id="260" r:id="rId6"/>
     <p:sldId id="261" r:id="rId7"/>
-    <p:sldId id="262" r:id="rId8"/>
+    <p:sldId id="275" r:id="rId8"/>
     <p:sldId id="263" r:id="rId9"/>
     <p:sldId id="264" r:id="rId10"/>
     <p:sldId id="265" r:id="rId11"/>
-    <p:sldId id="266" r:id="rId12"/>
-    <p:sldId id="267" r:id="rId13"/>
-    <p:sldId id="268" r:id="rId14"/>
-    <p:sldId id="269" r:id="rId15"/>
-    <p:sldId id="270" r:id="rId16"/>
-    <p:sldId id="271" r:id="rId17"/>
+    <p:sldId id="272" r:id="rId12"/>
+    <p:sldId id="273" r:id="rId13"/>
+    <p:sldId id="266" r:id="rId14"/>
+    <p:sldId id="267" r:id="rId15"/>
+    <p:sldId id="274" r:id="rId16"/>
+    <p:sldId id="268" r:id="rId17"/>
+    <p:sldId id="269" r:id="rId18"/>
+    <p:sldId id="271" r:id="rId19"/>
   </p:sldIdLst>
   <p:sldSz cx="12192000" cy="6858000"/>
   <p:notesSz cx="6858000" cy="12192000"/>
@@ -425,7 +427,13 @@
   <p:cSld>
     <p:spTree>
       <p:nvGrpSpPr>
-        <p:cNvPr id="1" name=""/>
+        <p:cNvPr id="1" name="">
+          <a:extLst>
+            <a:ext uri="{FF2B5EF4-FFF2-40B4-BE49-F238E27FC236}">
+              <a16:creationId xmlns:a16="http://schemas.microsoft.com/office/drawing/2014/main" id="{E0E7596B-F790-864B-10B6-EA0302B32F7A}"/>
+            </a:ext>
+          </a:extLst>
+        </p:cNvPr>
         <p:cNvGrpSpPr/>
         <p:nvPr/>
       </p:nvGrpSpPr>
@@ -439,7 +447,13 @@
       </p:grpSpPr>
       <p:sp>
         <p:nvSpPr>
-          <p:cNvPr id="2" name="Slide Image Placeholder 1"/>
+          <p:cNvPr id="2" name="Slide Image Placeholder 1">
+            <a:extLst>
+              <a:ext uri="{FF2B5EF4-FFF2-40B4-BE49-F238E27FC236}">
+                <a16:creationId xmlns:a16="http://schemas.microsoft.com/office/drawing/2014/main" id="{6DF48D78-66D2-02E4-A212-4A59C33EA620}"/>
+              </a:ext>
+            </a:extLst>
+          </p:cNvPr>
           <p:cNvSpPr>
             <a:spLocks noGrp="1" noRot="1" noChangeAspect="1"/>
           </p:cNvSpPr>
@@ -451,7 +465,13 @@
       </p:sp>
       <p:sp>
         <p:nvSpPr>
-          <p:cNvPr id="3" name="Notes Placeholder 2"/>
+          <p:cNvPr id="3" name="Notes Placeholder 2">
+            <a:extLst>
+              <a:ext uri="{FF2B5EF4-FFF2-40B4-BE49-F238E27FC236}">
+                <a16:creationId xmlns:a16="http://schemas.microsoft.com/office/drawing/2014/main" id="{84E9EBB5-C05A-28B2-3271-A920FC3355F4}"/>
+              </a:ext>
+            </a:extLst>
+          </p:cNvPr>
           <p:cNvSpPr>
             <a:spLocks noGrp="1"/>
           </p:cNvSpPr>
@@ -470,7 +490,13 @@
       </p:sp>
       <p:sp>
         <p:nvSpPr>
-          <p:cNvPr id="4" name="Slide Number Placeholder 3"/>
+          <p:cNvPr id="4" name="Slide Number Placeholder 3">
+            <a:extLst>
+              <a:ext uri="{FF2B5EF4-FFF2-40B4-BE49-F238E27FC236}">
+                <a16:creationId xmlns:a16="http://schemas.microsoft.com/office/drawing/2014/main" id="{51BCC0BD-CC9B-0EA8-BCCE-F77B44902D6B}"/>
+              </a:ext>
+            </a:extLst>
+          </p:cNvPr>
           <p:cNvSpPr>
             <a:spLocks noGrp="1"/>
           </p:cNvSpPr>
@@ -494,7 +520,7 @@
     </p:spTree>
     <p:extLst>
       <p:ext uri="{BB962C8B-B14F-4D97-AF65-F5344CB8AC3E}">
-        <p14:creationId xmlns:p14="http://schemas.microsoft.com/office/powerpoint/2010/main" val="1024086991"/>
+        <p14:creationId xmlns:p14="http://schemas.microsoft.com/office/powerpoint/2010/main" val="433587472"/>
       </p:ext>
     </p:extLst>
   </p:cSld>
@@ -509,7 +535,13 @@
   <p:cSld>
     <p:spTree>
       <p:nvGrpSpPr>
-        <p:cNvPr id="1" name=""/>
+        <p:cNvPr id="1" name="">
+          <a:extLst>
+            <a:ext uri="{FF2B5EF4-FFF2-40B4-BE49-F238E27FC236}">
+              <a16:creationId xmlns:a16="http://schemas.microsoft.com/office/drawing/2014/main" id="{672B3BA9-BF41-0086-D832-3D710A7C8281}"/>
+            </a:ext>
+          </a:extLst>
+        </p:cNvPr>
         <p:cNvGrpSpPr/>
         <p:nvPr/>
       </p:nvGrpSpPr>
@@ -523,7 +555,13 @@
       </p:grpSpPr>
       <p:sp>
         <p:nvSpPr>
-          <p:cNvPr id="2" name="Slide Image Placeholder 1"/>
+          <p:cNvPr id="2" name="Slide Image Placeholder 1">
+            <a:extLst>
+              <a:ext uri="{FF2B5EF4-FFF2-40B4-BE49-F238E27FC236}">
+                <a16:creationId xmlns:a16="http://schemas.microsoft.com/office/drawing/2014/main" id="{F89FF011-DC6D-9789-AF69-64A89A75CFDA}"/>
+              </a:ext>
+            </a:extLst>
+          </p:cNvPr>
           <p:cNvSpPr>
             <a:spLocks noGrp="1" noRot="1" noChangeAspect="1"/>
           </p:cNvSpPr>
@@ -535,7 +573,13 @@
       </p:sp>
       <p:sp>
         <p:nvSpPr>
-          <p:cNvPr id="3" name="Notes Placeholder 2"/>
+          <p:cNvPr id="3" name="Notes Placeholder 2">
+            <a:extLst>
+              <a:ext uri="{FF2B5EF4-FFF2-40B4-BE49-F238E27FC236}">
+                <a16:creationId xmlns:a16="http://schemas.microsoft.com/office/drawing/2014/main" id="{18A38016-71FB-4BF8-F413-A1CB951E492A}"/>
+              </a:ext>
+            </a:extLst>
+          </p:cNvPr>
           <p:cNvSpPr>
             <a:spLocks noGrp="1"/>
           </p:cNvSpPr>
@@ -554,7 +598,13 @@
       </p:sp>
       <p:sp>
         <p:nvSpPr>
-          <p:cNvPr id="4" name="Slide Number Placeholder 3"/>
+          <p:cNvPr id="4" name="Slide Number Placeholder 3">
+            <a:extLst>
+              <a:ext uri="{FF2B5EF4-FFF2-40B4-BE49-F238E27FC236}">
+                <a16:creationId xmlns:a16="http://schemas.microsoft.com/office/drawing/2014/main" id="{2C0A7678-E669-64AF-94FB-BA6B4610367F}"/>
+              </a:ext>
+            </a:extLst>
+          </p:cNvPr>
           <p:cNvSpPr>
             <a:spLocks noGrp="1"/>
           </p:cNvSpPr>
@@ -578,7 +628,7 @@
     </p:spTree>
     <p:extLst>
       <p:ext uri="{BB962C8B-B14F-4D97-AF65-F5344CB8AC3E}">
-        <p14:creationId xmlns:p14="http://schemas.microsoft.com/office/powerpoint/2010/main" val="1024086991"/>
+        <p14:creationId xmlns:p14="http://schemas.microsoft.com/office/powerpoint/2010/main" val="858356134"/>
       </p:ext>
     </p:extLst>
   </p:cSld>
@@ -821,7 +871,7 @@
           <a:p>
             <a:fld id="{F7021451-1387-4CA6-816F-3879F97B5CBC}" type="slidenum">
               <a:rPr lang="en-US"/>
-              <a:t>15</a:t>
+              <a:t>16</a:t>
             </a:fld>
             <a:endParaRPr lang="en-US"/>
           </a:p>
@@ -905,7 +955,91 @@
           <a:p>
             <a:fld id="{F7021451-1387-4CA6-816F-3879F97B5CBC}" type="slidenum">
               <a:rPr lang="en-US"/>
-              <a:t>16</a:t>
+              <a:t>17</a:t>
+            </a:fld>
+            <a:endParaRPr lang="en-US"/>
+          </a:p>
+        </p:txBody>
+      </p:sp>
+    </p:spTree>
+    <p:extLst>
+      <p:ext uri="{BB962C8B-B14F-4D97-AF65-F5344CB8AC3E}">
+        <p14:creationId xmlns:p14="http://schemas.microsoft.com/office/powerpoint/2010/main" val="1024086991"/>
+      </p:ext>
+    </p:extLst>
+  </p:cSld>
+  <p:clrMapOvr>
+    <a:masterClrMapping/>
+  </p:clrMapOvr>
+</p:notes>
+</file>
+
+<file path=ppt/notesSlides/notesSlide17.xml><?xml version="1.0" encoding="utf-8"?>
+<p:notes xmlns:a="http://schemas.openxmlformats.org/drawingml/2006/main" xmlns:r="http://schemas.openxmlformats.org/officeDocument/2006/relationships" xmlns:p="http://schemas.openxmlformats.org/presentationml/2006/main">
+  <p:cSld>
+    <p:spTree>
+      <p:nvGrpSpPr>
+        <p:cNvPr id="1" name=""/>
+        <p:cNvGrpSpPr/>
+        <p:nvPr/>
+      </p:nvGrpSpPr>
+      <p:grpSpPr>
+        <a:xfrm>
+          <a:off x="0" y="0"/>
+          <a:ext cx="0" cy="0"/>
+          <a:chOff x="0" y="0"/>
+          <a:chExt cx="0" cy="0"/>
+        </a:xfrm>
+      </p:grpSpPr>
+      <p:sp>
+        <p:nvSpPr>
+          <p:cNvPr id="2" name="Slide Image Placeholder 1"/>
+          <p:cNvSpPr>
+            <a:spLocks noGrp="1" noRot="1" noChangeAspect="1"/>
+          </p:cNvSpPr>
+          <p:nvPr>
+            <p:ph type="sldImg"/>
+          </p:nvPr>
+        </p:nvSpPr>
+        <p:spPr/>
+      </p:sp>
+      <p:sp>
+        <p:nvSpPr>
+          <p:cNvPr id="3" name="Notes Placeholder 2"/>
+          <p:cNvSpPr>
+            <a:spLocks noGrp="1"/>
+          </p:cNvSpPr>
+          <p:nvPr>
+            <p:ph type="body" idx="1"/>
+          </p:nvPr>
+        </p:nvSpPr>
+        <p:spPr/>
+        <p:txBody>
+          <a:bodyPr/>
+          <a:lstStyle/>
+          <a:p>
+            <a:endParaRPr lang="en-US" dirty="0"/>
+          </a:p>
+        </p:txBody>
+      </p:sp>
+      <p:sp>
+        <p:nvSpPr>
+          <p:cNvPr id="4" name="Slide Number Placeholder 3"/>
+          <p:cNvSpPr>
+            <a:spLocks noGrp="1"/>
+          </p:cNvSpPr>
+          <p:nvPr>
+            <p:ph type="sldNum" sz="quarter" idx="10"/>
+          </p:nvPr>
+        </p:nvSpPr>
+        <p:spPr/>
+        <p:txBody>
+          <a:bodyPr/>
+          <a:lstStyle/>
+          <a:p>
+            <a:fld id="{F7021451-1387-4CA6-816F-3879F97B5CBC}" type="slidenum">
+              <a:rPr lang="en-US"/>
+              <a:t>18</a:t>
             </a:fld>
             <a:endParaRPr lang="en-US"/>
           </a:p>
@@ -1349,7 +1483,13 @@
   <p:cSld>
     <p:spTree>
       <p:nvGrpSpPr>
-        <p:cNvPr id="1" name=""/>
+        <p:cNvPr id="1" name="">
+          <a:extLst>
+            <a:ext uri="{FF2B5EF4-FFF2-40B4-BE49-F238E27FC236}">
+              <a16:creationId xmlns:a16="http://schemas.microsoft.com/office/drawing/2014/main" id="{ABA62219-FA79-491D-3F35-4D94CB7E276B}"/>
+            </a:ext>
+          </a:extLst>
+        </p:cNvPr>
         <p:cNvGrpSpPr/>
         <p:nvPr/>
       </p:nvGrpSpPr>
@@ -1363,7 +1503,13 @@
       </p:grpSpPr>
       <p:sp>
         <p:nvSpPr>
-          <p:cNvPr id="2" name="Slide Image Placeholder 1"/>
+          <p:cNvPr id="2" name="Slide Image Placeholder 1">
+            <a:extLst>
+              <a:ext uri="{FF2B5EF4-FFF2-40B4-BE49-F238E27FC236}">
+                <a16:creationId xmlns:a16="http://schemas.microsoft.com/office/drawing/2014/main" id="{37D93FCE-A18D-6C43-631A-52E33B1E89C6}"/>
+              </a:ext>
+            </a:extLst>
+          </p:cNvPr>
           <p:cNvSpPr>
             <a:spLocks noGrp="1" noRot="1" noChangeAspect="1"/>
           </p:cNvSpPr>
@@ -1375,7 +1521,13 @@
       </p:sp>
       <p:sp>
         <p:nvSpPr>
-          <p:cNvPr id="3" name="Notes Placeholder 2"/>
+          <p:cNvPr id="3" name="Notes Placeholder 2">
+            <a:extLst>
+              <a:ext uri="{FF2B5EF4-FFF2-40B4-BE49-F238E27FC236}">
+                <a16:creationId xmlns:a16="http://schemas.microsoft.com/office/drawing/2014/main" id="{8E706FFF-3D17-EC70-5C36-A26450EC1D39}"/>
+              </a:ext>
+            </a:extLst>
+          </p:cNvPr>
           <p:cNvSpPr>
             <a:spLocks noGrp="1"/>
           </p:cNvSpPr>
@@ -1394,7 +1546,13 @@
       </p:sp>
       <p:sp>
         <p:nvSpPr>
-          <p:cNvPr id="4" name="Slide Number Placeholder 3"/>
+          <p:cNvPr id="4" name="Slide Number Placeholder 3">
+            <a:extLst>
+              <a:ext uri="{FF2B5EF4-FFF2-40B4-BE49-F238E27FC236}">
+                <a16:creationId xmlns:a16="http://schemas.microsoft.com/office/drawing/2014/main" id="{82873C39-4A04-EAE0-082A-D57D618643FA}"/>
+              </a:ext>
+            </a:extLst>
+          </p:cNvPr>
           <p:cNvSpPr>
             <a:spLocks noGrp="1"/>
           </p:cNvSpPr>
@@ -1418,7 +1576,7 @@
     </p:spTree>
     <p:extLst>
       <p:ext uri="{BB962C8B-B14F-4D97-AF65-F5344CB8AC3E}">
-        <p14:creationId xmlns:p14="http://schemas.microsoft.com/office/powerpoint/2010/main" val="1024086991"/>
+        <p14:creationId xmlns:p14="http://schemas.microsoft.com/office/powerpoint/2010/main" val="3202499638"/>
       </p:ext>
     </p:extLst>
   </p:cSld>
@@ -1935,83 +2093,6 @@
       </p:grpSpPr>
       <p:sp>
         <p:nvSpPr>
-          <p:cNvPr id="2" name="Shape 0"/>
-          <p:cNvSpPr/>
-          <p:nvPr/>
-        </p:nvSpPr>
-        <p:spPr>
-          <a:xfrm>
-            <a:off x="0" y="0"/>
-            <a:ext cx="12191695" cy="6858000"/>
-          </a:xfrm>
-          <a:prstGeom prst="rect">
-            <a:avLst/>
-          </a:prstGeom>
-          <a:solidFill>
-            <a:srgbClr val="FFF8EB"/>
-          </a:solidFill>
-          <a:ln w="12700">
-            <a:solidFill>
-              <a:srgbClr val="FFF8EB">
-                <a:alpha val="0"/>
-              </a:srgbClr>
-            </a:solidFill>
-            <a:prstDash val="solid"/>
-          </a:ln>
-        </p:spPr>
-      </p:sp>
-      <p:sp>
-        <p:nvSpPr>
-          <p:cNvPr id="3" name="Shape 1"/>
-          <p:cNvSpPr/>
-          <p:nvPr/>
-        </p:nvSpPr>
-        <p:spPr>
-          <a:xfrm>
-            <a:off x="7543800" y="-1463040"/>
-            <a:ext cx="6035040" cy="6035040"/>
-          </a:xfrm>
-          <a:prstGeom prst="arc">
-            <a:avLst/>
-          </a:prstGeom>
-          <a:noFill/>
-          <a:ln w="25400">
-            <a:solidFill>
-              <a:srgbClr val="FBC87A">
-                <a:alpha val="65000"/>
-              </a:srgbClr>
-            </a:solidFill>
-            <a:prstDash val="solid"/>
-          </a:ln>
-        </p:spPr>
-      </p:sp>
-      <p:sp>
-        <p:nvSpPr>
-          <p:cNvPr id="4" name="Shape 2"/>
-          <p:cNvSpPr/>
-          <p:nvPr/>
-        </p:nvSpPr>
-        <p:spPr>
-          <a:xfrm>
-            <a:off x="-1005840" y="4343400"/>
-            <a:ext cx="4023360" cy="4023360"/>
-          </a:xfrm>
-          <a:prstGeom prst="arc">
-            <a:avLst/>
-          </a:prstGeom>
-          <a:noFill/>
-          <a:ln w="22860">
-            <a:solidFill>
-              <a:srgbClr val="FED7AA">
-                <a:alpha val="55000"/>
-              </a:srgbClr>
-            </a:solidFill>
-            <a:prstDash val="solid"/>
-          </a:ln>
-        </p:spPr>
-      </p:sp>
-      <p:sp>
-        <p:nvSpPr>
           <p:cNvPr id="5" name="Text 3"/>
           <p:cNvSpPr/>
           <p:nvPr/>
@@ -2029,7 +2110,7 @@
         </p:spPr>
         <p:txBody>
           <a:bodyPr wrap="square" lIns="0" tIns="0" rIns="0" bIns="0" rtlCol="0" anchor="ctr">
-            <a:normAutofit/>
+            <a:normAutofit fontScale="92500" lnSpcReduction="20000"/>
           </a:bodyPr>
           <a:lstStyle/>
           <a:p>
@@ -2398,7 +2479,15 @@
                   <a:srgbClr val="475569"/>
                 </a:solidFill>
               </a:rPr>
-              <a:t>Team: Baraa Masri, Hamed Bizreh, Yahya Ziyoud</a:t>
+              <a:t>Team: Baraa Masri, Hamed Bizreh, Yahya </a:t>
+            </a:r>
+            <a:r>
+              <a:rPr lang="en-US" sz="950" dirty="0" err="1">
+                <a:solidFill>
+                  <a:srgbClr val="475569"/>
+                </a:solidFill>
+              </a:rPr>
+              <a:t>Zyoud</a:t>
             </a:r>
             <a:endParaRPr lang="en-US" sz="950" dirty="0"/>
           </a:p>
@@ -2587,8 +2676,8 @@
         </p:blipFill>
         <p:spPr>
           <a:xfrm>
-            <a:off x="7708392" y="841248"/>
-            <a:ext cx="2889504" cy="5157216"/>
+            <a:off x="7635240" y="731520"/>
+            <a:ext cx="3035808" cy="5266944"/>
           </a:xfrm>
           <a:prstGeom prst="rect">
             <a:avLst/>
@@ -2671,6 +2760,578 @@
           </a:p>
         </p:txBody>
       </p:sp>
+      <p:graphicFrame>
+        <p:nvGraphicFramePr>
+          <p:cNvPr id="25" name="Table 24">
+            <a:extLst>
+              <a:ext uri="{FF2B5EF4-FFF2-40B4-BE49-F238E27FC236}">
+                <a16:creationId xmlns:a16="http://schemas.microsoft.com/office/drawing/2014/main" id="{512737CB-28FF-88F3-EF49-5696958D0A9B}"/>
+              </a:ext>
+            </a:extLst>
+          </p:cNvPr>
+          <p:cNvGraphicFramePr>
+            <a:graphicFrameLocks noGrp="1"/>
+          </p:cNvGraphicFramePr>
+          <p:nvPr>
+            <p:extLst>
+              <p:ext uri="{D42A27DB-BD31-4B8C-83A1-F6EECF244321}">
+                <p14:modId xmlns:p14="http://schemas.microsoft.com/office/powerpoint/2010/main" val="2791787467"/>
+              </p:ext>
+            </p:extLst>
+          </p:nvPr>
+        </p:nvGraphicFramePr>
+        <p:xfrm>
+          <a:off x="713232" y="2999232"/>
+          <a:ext cx="4572000" cy="2088004"/>
+        </p:xfrm>
+        <a:graphic>
+          <a:graphicData uri="http://schemas.openxmlformats.org/drawingml/2006/table">
+            <a:tbl>
+              <a:tblPr firstRow="1" firstCol="1" bandRow="1">
+                <a:tableStyleId>{5C22544A-7EE6-4342-B048-85BDC9FD1C3A}</a:tableStyleId>
+              </a:tblPr>
+              <a:tblGrid>
+                <a:gridCol w="2286000">
+                  <a:extLst>
+                    <a:ext uri="{9D8B030D-6E8A-4147-A177-3AD203B41FA5}">
+                      <a16:colId xmlns:a16="http://schemas.microsoft.com/office/drawing/2014/main" val="1486775970"/>
+                    </a:ext>
+                  </a:extLst>
+                </a:gridCol>
+                <a:gridCol w="2286000">
+                  <a:extLst>
+                    <a:ext uri="{9D8B030D-6E8A-4147-A177-3AD203B41FA5}">
+                      <a16:colId xmlns:a16="http://schemas.microsoft.com/office/drawing/2014/main" val="2108987483"/>
+                    </a:ext>
+                  </a:extLst>
+                </a:gridCol>
+              </a:tblGrid>
+              <a:tr h="169596">
+                <a:tc>
+                  <a:txBody>
+                    <a:bodyPr/>
+                    <a:lstStyle/>
+                    <a:p>
+                      <a:pPr>
+                        <a:lnSpc>
+                          <a:spcPct val="115000"/>
+                        </a:lnSpc>
+                        <a:spcAft>
+                          <a:spcPts val="1000"/>
+                        </a:spcAft>
+                        <a:buNone/>
+                      </a:pPr>
+                      <a:r>
+                        <a:rPr lang="en-US" sz="800" dirty="0">
+                          <a:solidFill>
+                            <a:schemeClr val="tx1"/>
+                          </a:solidFill>
+                          <a:effectLst/>
+                        </a:rPr>
+                        <a:t>Stakeholder</a:t>
+                      </a:r>
+                      <a:endParaRPr lang="en-US" sz="1000" dirty="0">
+                        <a:solidFill>
+                          <a:schemeClr val="tx1"/>
+                        </a:solidFill>
+                        <a:effectLst/>
+                        <a:latin typeface="Aptos" panose="020B0004020202020204" pitchFamily="34" charset="0"/>
+                        <a:ea typeface="Aptos" panose="020B0004020202020204" pitchFamily="34" charset="0"/>
+                        <a:cs typeface="Arial" panose="020B0604020202020204" pitchFamily="34" charset="0"/>
+                      </a:endParaRPr>
+                    </a:p>
+                  </a:txBody>
+                  <a:tcPr marL="68580" marR="68580" marT="0" marB="0" anchor="ctr">
+                    <a:solidFill>
+                      <a:srgbClr val="FFC000"/>
+                    </a:solidFill>
+                  </a:tcPr>
+                </a:tc>
+                <a:tc>
+                  <a:txBody>
+                    <a:bodyPr/>
+                    <a:lstStyle/>
+                    <a:p>
+                      <a:pPr>
+                        <a:lnSpc>
+                          <a:spcPct val="115000"/>
+                        </a:lnSpc>
+                        <a:spcAft>
+                          <a:spcPts val="1000"/>
+                        </a:spcAft>
+                        <a:buNone/>
+                      </a:pPr>
+                      <a:r>
+                        <a:rPr lang="en-US" sz="800" dirty="0">
+                          <a:solidFill>
+                            <a:schemeClr val="tx1"/>
+                          </a:solidFill>
+                          <a:effectLst/>
+                        </a:rPr>
+                        <a:t>Description</a:t>
+                      </a:r>
+                      <a:endParaRPr lang="en-US" sz="1000" dirty="0">
+                        <a:solidFill>
+                          <a:schemeClr val="tx1"/>
+                        </a:solidFill>
+                        <a:effectLst/>
+                        <a:latin typeface="Aptos" panose="020B0004020202020204" pitchFamily="34" charset="0"/>
+                        <a:ea typeface="Aptos" panose="020B0004020202020204" pitchFamily="34" charset="0"/>
+                        <a:cs typeface="Arial" panose="020B0604020202020204" pitchFamily="34" charset="0"/>
+                      </a:endParaRPr>
+                    </a:p>
+                  </a:txBody>
+                  <a:tcPr marL="68580" marR="68580" marT="0" marB="0" anchor="ctr">
+                    <a:solidFill>
+                      <a:srgbClr val="FFC000"/>
+                    </a:solidFill>
+                  </a:tcPr>
+                </a:tc>
+                <a:extLst>
+                  <a:ext uri="{0D108BD9-81ED-4DB2-BD59-A6C34878D82A}">
+                    <a16:rowId xmlns:a16="http://schemas.microsoft.com/office/drawing/2014/main" val="2403972649"/>
+                  </a:ext>
+                </a:extLst>
+              </a:tr>
+              <a:tr h="348001">
+                <a:tc>
+                  <a:txBody>
+                    <a:bodyPr/>
+                    <a:lstStyle/>
+                    <a:p>
+                      <a:pPr>
+                        <a:lnSpc>
+                          <a:spcPct val="115000"/>
+                        </a:lnSpc>
+                        <a:spcAft>
+                          <a:spcPts val="1000"/>
+                        </a:spcAft>
+                        <a:buNone/>
+                      </a:pPr>
+                      <a:r>
+                        <a:rPr lang="en-US" sz="800" dirty="0">
+                          <a:solidFill>
+                            <a:schemeClr val="tx1"/>
+                          </a:solidFill>
+                          <a:effectLst/>
+                        </a:rPr>
+                        <a:t>Guest</a:t>
+                      </a:r>
+                      <a:endParaRPr lang="en-US" sz="1000" dirty="0">
+                        <a:solidFill>
+                          <a:schemeClr val="tx1"/>
+                        </a:solidFill>
+                        <a:effectLst/>
+                        <a:latin typeface="Aptos" panose="020B0004020202020204" pitchFamily="34" charset="0"/>
+                        <a:ea typeface="Aptos" panose="020B0004020202020204" pitchFamily="34" charset="0"/>
+                        <a:cs typeface="Arial" panose="020B0604020202020204" pitchFamily="34" charset="0"/>
+                      </a:endParaRPr>
+                    </a:p>
+                  </a:txBody>
+                  <a:tcPr marL="68580" marR="68580" marT="0" marB="0" anchor="ctr">
+                    <a:solidFill>
+                      <a:srgbClr val="FFC000"/>
+                    </a:solidFill>
+                  </a:tcPr>
+                </a:tc>
+                <a:tc>
+                  <a:txBody>
+                    <a:bodyPr/>
+                    <a:lstStyle/>
+                    <a:p>
+                      <a:pPr>
+                        <a:lnSpc>
+                          <a:spcPct val="115000"/>
+                        </a:lnSpc>
+                        <a:spcAft>
+                          <a:spcPts val="1000"/>
+                        </a:spcAft>
+                        <a:buNone/>
+                      </a:pPr>
+                      <a:r>
+                        <a:rPr lang="en-US" sz="800" dirty="0">
+                          <a:solidFill>
+                            <a:schemeClr val="tx1"/>
+                          </a:solidFill>
+                          <a:effectLst/>
+                        </a:rPr>
+                        <a:t>Unauthenticated visitor browsing the storefront.</a:t>
+                      </a:r>
+                      <a:endParaRPr lang="en-US" sz="1000" dirty="0">
+                        <a:solidFill>
+                          <a:schemeClr val="tx1"/>
+                        </a:solidFill>
+                        <a:effectLst/>
+                        <a:latin typeface="Aptos" panose="020B0004020202020204" pitchFamily="34" charset="0"/>
+                        <a:ea typeface="Aptos" panose="020B0004020202020204" pitchFamily="34" charset="0"/>
+                        <a:cs typeface="Arial" panose="020B0604020202020204" pitchFamily="34" charset="0"/>
+                      </a:endParaRPr>
+                    </a:p>
+                  </a:txBody>
+                  <a:tcPr marL="68580" marR="68580" marT="0" marB="0" anchor="ctr">
+                    <a:solidFill>
+                      <a:srgbClr val="FFC000"/>
+                    </a:solidFill>
+                  </a:tcPr>
+                </a:tc>
+                <a:extLst>
+                  <a:ext uri="{0D108BD9-81ED-4DB2-BD59-A6C34878D82A}">
+                    <a16:rowId xmlns:a16="http://schemas.microsoft.com/office/drawing/2014/main" val="2230905038"/>
+                  </a:ext>
+                </a:extLst>
+              </a:tr>
+              <a:tr h="348001">
+                <a:tc>
+                  <a:txBody>
+                    <a:bodyPr/>
+                    <a:lstStyle/>
+                    <a:p>
+                      <a:pPr>
+                        <a:lnSpc>
+                          <a:spcPct val="115000"/>
+                        </a:lnSpc>
+                        <a:spcAft>
+                          <a:spcPts val="1000"/>
+                        </a:spcAft>
+                        <a:buNone/>
+                      </a:pPr>
+                      <a:r>
+                        <a:rPr lang="en-US" sz="800">
+                          <a:solidFill>
+                            <a:schemeClr val="tx1"/>
+                          </a:solidFill>
+                          <a:effectLst/>
+                        </a:rPr>
+                        <a:t>Registered User</a:t>
+                      </a:r>
+                      <a:endParaRPr lang="en-US" sz="1000">
+                        <a:solidFill>
+                          <a:schemeClr val="tx1"/>
+                        </a:solidFill>
+                        <a:effectLst/>
+                        <a:latin typeface="Aptos" panose="020B0004020202020204" pitchFamily="34" charset="0"/>
+                        <a:ea typeface="Aptos" panose="020B0004020202020204" pitchFamily="34" charset="0"/>
+                        <a:cs typeface="Arial" panose="020B0604020202020204" pitchFamily="34" charset="0"/>
+                      </a:endParaRPr>
+                    </a:p>
+                  </a:txBody>
+                  <a:tcPr marL="68580" marR="68580" marT="0" marB="0" anchor="ctr">
+                    <a:solidFill>
+                      <a:srgbClr val="FFC000"/>
+                    </a:solidFill>
+                  </a:tcPr>
+                </a:tc>
+                <a:tc>
+                  <a:txBody>
+                    <a:bodyPr/>
+                    <a:lstStyle/>
+                    <a:p>
+                      <a:pPr>
+                        <a:lnSpc>
+                          <a:spcPct val="115000"/>
+                        </a:lnSpc>
+                        <a:spcAft>
+                          <a:spcPts val="1000"/>
+                        </a:spcAft>
+                        <a:buNone/>
+                      </a:pPr>
+                      <a:r>
+                        <a:rPr lang="en-US" sz="800" dirty="0">
+                          <a:solidFill>
+                            <a:schemeClr val="tx1"/>
+                          </a:solidFill>
+                          <a:effectLst/>
+                        </a:rPr>
+                        <a:t>Customer with an account.</a:t>
+                      </a:r>
+                      <a:endParaRPr lang="en-US" sz="1000" dirty="0">
+                        <a:solidFill>
+                          <a:schemeClr val="tx1"/>
+                        </a:solidFill>
+                        <a:effectLst/>
+                        <a:latin typeface="Aptos" panose="020B0004020202020204" pitchFamily="34" charset="0"/>
+                        <a:ea typeface="Aptos" panose="020B0004020202020204" pitchFamily="34" charset="0"/>
+                        <a:cs typeface="Arial" panose="020B0604020202020204" pitchFamily="34" charset="0"/>
+                      </a:endParaRPr>
+                    </a:p>
+                  </a:txBody>
+                  <a:tcPr marL="68580" marR="68580" marT="0" marB="0" anchor="ctr">
+                    <a:solidFill>
+                      <a:srgbClr val="FFC000"/>
+                    </a:solidFill>
+                  </a:tcPr>
+                </a:tc>
+                <a:extLst>
+                  <a:ext uri="{0D108BD9-81ED-4DB2-BD59-A6C34878D82A}">
+                    <a16:rowId xmlns:a16="http://schemas.microsoft.com/office/drawing/2014/main" val="3567511297"/>
+                  </a:ext>
+                </a:extLst>
+              </a:tr>
+              <a:tr h="348001">
+                <a:tc>
+                  <a:txBody>
+                    <a:bodyPr/>
+                    <a:lstStyle/>
+                    <a:p>
+                      <a:pPr>
+                        <a:lnSpc>
+                          <a:spcPct val="115000"/>
+                        </a:lnSpc>
+                        <a:spcAft>
+                          <a:spcPts val="1000"/>
+                        </a:spcAft>
+                        <a:buNone/>
+                      </a:pPr>
+                      <a:r>
+                        <a:rPr lang="en-US" sz="800" dirty="0">
+                          <a:solidFill>
+                            <a:schemeClr val="tx1"/>
+                          </a:solidFill>
+                          <a:effectLst/>
+                        </a:rPr>
+                        <a:t>Admin</a:t>
+                      </a:r>
+                      <a:endParaRPr lang="en-US" sz="1000" dirty="0">
+                        <a:solidFill>
+                          <a:schemeClr val="tx1"/>
+                        </a:solidFill>
+                        <a:effectLst/>
+                        <a:latin typeface="Aptos" panose="020B0004020202020204" pitchFamily="34" charset="0"/>
+                        <a:ea typeface="Aptos" panose="020B0004020202020204" pitchFamily="34" charset="0"/>
+                        <a:cs typeface="Arial" panose="020B0604020202020204" pitchFamily="34" charset="0"/>
+                      </a:endParaRPr>
+                    </a:p>
+                  </a:txBody>
+                  <a:tcPr marL="68580" marR="68580" marT="0" marB="0" anchor="ctr">
+                    <a:solidFill>
+                      <a:srgbClr val="FFC000"/>
+                    </a:solidFill>
+                  </a:tcPr>
+                </a:tc>
+                <a:tc>
+                  <a:txBody>
+                    <a:bodyPr/>
+                    <a:lstStyle/>
+                    <a:p>
+                      <a:pPr>
+                        <a:lnSpc>
+                          <a:spcPct val="115000"/>
+                        </a:lnSpc>
+                        <a:spcAft>
+                          <a:spcPts val="1000"/>
+                        </a:spcAft>
+                        <a:buNone/>
+                      </a:pPr>
+                      <a:r>
+                        <a:rPr lang="en-US" sz="800">
+                          <a:solidFill>
+                            <a:schemeClr val="tx1"/>
+                          </a:solidFill>
+                          <a:effectLst/>
+                        </a:rPr>
+                        <a:t>Store manager/operator.</a:t>
+                      </a:r>
+                      <a:endParaRPr lang="en-US" sz="1000">
+                        <a:solidFill>
+                          <a:schemeClr val="tx1"/>
+                        </a:solidFill>
+                        <a:effectLst/>
+                        <a:latin typeface="Aptos" panose="020B0004020202020204" pitchFamily="34" charset="0"/>
+                        <a:ea typeface="Aptos" panose="020B0004020202020204" pitchFamily="34" charset="0"/>
+                        <a:cs typeface="Arial" panose="020B0604020202020204" pitchFamily="34" charset="0"/>
+                      </a:endParaRPr>
+                    </a:p>
+                  </a:txBody>
+                  <a:tcPr marL="68580" marR="68580" marT="0" marB="0" anchor="ctr">
+                    <a:solidFill>
+                      <a:srgbClr val="FFC000"/>
+                    </a:solidFill>
+                  </a:tcPr>
+                </a:tc>
+                <a:extLst>
+                  <a:ext uri="{0D108BD9-81ED-4DB2-BD59-A6C34878D82A}">
+                    <a16:rowId xmlns:a16="http://schemas.microsoft.com/office/drawing/2014/main" val="3565059670"/>
+                  </a:ext>
+                </a:extLst>
+              </a:tr>
+              <a:tr h="348001">
+                <a:tc>
+                  <a:txBody>
+                    <a:bodyPr/>
+                    <a:lstStyle/>
+                    <a:p>
+                      <a:pPr>
+                        <a:lnSpc>
+                          <a:spcPct val="115000"/>
+                        </a:lnSpc>
+                        <a:spcAft>
+                          <a:spcPts val="1000"/>
+                        </a:spcAft>
+                        <a:buNone/>
+                      </a:pPr>
+                      <a:r>
+                        <a:rPr lang="en-US" sz="800">
+                          <a:solidFill>
+                            <a:schemeClr val="tx1"/>
+                          </a:solidFill>
+                          <a:effectLst/>
+                        </a:rPr>
+                        <a:t>Development Team</a:t>
+                      </a:r>
+                      <a:endParaRPr lang="en-US" sz="1000">
+                        <a:solidFill>
+                          <a:schemeClr val="tx1"/>
+                        </a:solidFill>
+                        <a:effectLst/>
+                        <a:latin typeface="Aptos" panose="020B0004020202020204" pitchFamily="34" charset="0"/>
+                        <a:ea typeface="Aptos" panose="020B0004020202020204" pitchFamily="34" charset="0"/>
+                        <a:cs typeface="Arial" panose="020B0604020202020204" pitchFamily="34" charset="0"/>
+                      </a:endParaRPr>
+                    </a:p>
+                  </a:txBody>
+                  <a:tcPr marL="68580" marR="68580" marT="0" marB="0" anchor="ctr">
+                    <a:solidFill>
+                      <a:srgbClr val="FFC000"/>
+                    </a:solidFill>
+                  </a:tcPr>
+                </a:tc>
+                <a:tc>
+                  <a:txBody>
+                    <a:bodyPr/>
+                    <a:lstStyle/>
+                    <a:p>
+                      <a:pPr>
+                        <a:lnSpc>
+                          <a:spcPct val="115000"/>
+                        </a:lnSpc>
+                        <a:spcAft>
+                          <a:spcPts val="1000"/>
+                        </a:spcAft>
+                        <a:buNone/>
+                      </a:pPr>
+                      <a:r>
+                        <a:rPr lang="en-US" sz="800">
+                          <a:solidFill>
+                            <a:schemeClr val="tx1"/>
+                          </a:solidFill>
+                          <a:effectLst/>
+                        </a:rPr>
+                        <a:t>Students building and documenting the system.</a:t>
+                      </a:r>
+                      <a:endParaRPr lang="en-US" sz="1000">
+                        <a:solidFill>
+                          <a:schemeClr val="tx1"/>
+                        </a:solidFill>
+                        <a:effectLst/>
+                        <a:latin typeface="Aptos" panose="020B0004020202020204" pitchFamily="34" charset="0"/>
+                        <a:ea typeface="Aptos" panose="020B0004020202020204" pitchFamily="34" charset="0"/>
+                        <a:cs typeface="Arial" panose="020B0604020202020204" pitchFamily="34" charset="0"/>
+                      </a:endParaRPr>
+                    </a:p>
+                  </a:txBody>
+                  <a:tcPr marL="68580" marR="68580" marT="0" marB="0" anchor="ctr">
+                    <a:solidFill>
+                      <a:srgbClr val="FFC000"/>
+                    </a:solidFill>
+                  </a:tcPr>
+                </a:tc>
+                <a:extLst>
+                  <a:ext uri="{0D108BD9-81ED-4DB2-BD59-A6C34878D82A}">
+                    <a16:rowId xmlns:a16="http://schemas.microsoft.com/office/drawing/2014/main" val="1173889081"/>
+                  </a:ext>
+                </a:extLst>
+              </a:tr>
+              <a:tr h="526404">
+                <a:tc>
+                  <a:txBody>
+                    <a:bodyPr/>
+                    <a:lstStyle/>
+                    <a:p>
+                      <a:pPr>
+                        <a:lnSpc>
+                          <a:spcPct val="115000"/>
+                        </a:lnSpc>
+                        <a:spcAft>
+                          <a:spcPts val="1000"/>
+                        </a:spcAft>
+                        <a:buNone/>
+                      </a:pPr>
+                      <a:r>
+                        <a:rPr lang="en-US" sz="800" dirty="0">
+                          <a:solidFill>
+                            <a:schemeClr val="tx1"/>
+                          </a:solidFill>
+                          <a:effectLst/>
+                        </a:rPr>
+                        <a:t>Instructor / Evaluator</a:t>
+                      </a:r>
+                      <a:endParaRPr lang="en-US" sz="1000" dirty="0">
+                        <a:solidFill>
+                          <a:schemeClr val="tx1"/>
+                        </a:solidFill>
+                        <a:effectLst/>
+                        <a:latin typeface="Aptos" panose="020B0004020202020204" pitchFamily="34" charset="0"/>
+                        <a:ea typeface="Aptos" panose="020B0004020202020204" pitchFamily="34" charset="0"/>
+                        <a:cs typeface="Arial" panose="020B0604020202020204" pitchFamily="34" charset="0"/>
+                      </a:endParaRPr>
+                    </a:p>
+                  </a:txBody>
+                  <a:tcPr marL="68580" marR="68580" marT="0" marB="0" anchor="ctr">
+                    <a:solidFill>
+                      <a:srgbClr val="FFC000"/>
+                    </a:solidFill>
+                  </a:tcPr>
+                </a:tc>
+                <a:tc>
+                  <a:txBody>
+                    <a:bodyPr/>
+                    <a:lstStyle/>
+                    <a:p>
+                      <a:pPr>
+                        <a:lnSpc>
+                          <a:spcPct val="115000"/>
+                        </a:lnSpc>
+                        <a:spcAft>
+                          <a:spcPts val="1000"/>
+                        </a:spcAft>
+                        <a:buNone/>
+                      </a:pPr>
+                      <a:r>
+                        <a:rPr lang="en-US" sz="800" dirty="0">
+                          <a:solidFill>
+                            <a:schemeClr val="tx1"/>
+                          </a:solidFill>
+                          <a:effectLst/>
+                        </a:rPr>
+                        <a:t>Software Engineering course reviewer.</a:t>
+                      </a:r>
+                      <a:endParaRPr lang="en-US" sz="1000" dirty="0">
+                        <a:solidFill>
+                          <a:schemeClr val="tx1"/>
+                        </a:solidFill>
+                        <a:effectLst/>
+                        <a:latin typeface="Aptos" panose="020B0004020202020204" pitchFamily="34" charset="0"/>
+                        <a:ea typeface="Aptos" panose="020B0004020202020204" pitchFamily="34" charset="0"/>
+                        <a:cs typeface="Arial" panose="020B0604020202020204" pitchFamily="34" charset="0"/>
+                      </a:endParaRPr>
+                    </a:p>
+                  </a:txBody>
+                  <a:tcPr marL="68580" marR="68580" marT="0" marB="0" anchor="ctr">
+                    <a:solidFill>
+                      <a:srgbClr val="FFC000"/>
+                    </a:solidFill>
+                  </a:tcPr>
+                </a:tc>
+                <a:extLst>
+                  <a:ext uri="{0D108BD9-81ED-4DB2-BD59-A6C34878D82A}">
+                    <a16:rowId xmlns:a16="http://schemas.microsoft.com/office/drawing/2014/main" val="1929898653"/>
+                  </a:ext>
+                </a:extLst>
+              </a:tr>
+            </a:tbl>
+          </a:graphicData>
+        </a:graphic>
+      </p:graphicFrame>
     </p:spTree>
   </p:cSld>
   <p:clrMapOvr>
@@ -2706,83 +3367,6 @@
       </p:grpSpPr>
       <p:sp>
         <p:nvSpPr>
-          <p:cNvPr id="2" name="Shape 0"/>
-          <p:cNvSpPr/>
-          <p:nvPr/>
-        </p:nvSpPr>
-        <p:spPr>
-          <a:xfrm>
-            <a:off x="0" y="0"/>
-            <a:ext cx="12191695" cy="6858000"/>
-          </a:xfrm>
-          <a:prstGeom prst="rect">
-            <a:avLst/>
-          </a:prstGeom>
-          <a:solidFill>
-            <a:srgbClr val="FBFAF8"/>
-          </a:solidFill>
-          <a:ln w="12700">
-            <a:solidFill>
-              <a:srgbClr val="FBFAF8">
-                <a:alpha val="0"/>
-              </a:srgbClr>
-            </a:solidFill>
-            <a:prstDash val="solid"/>
-          </a:ln>
-        </p:spPr>
-      </p:sp>
-      <p:sp>
-        <p:nvSpPr>
-          <p:cNvPr id="3" name="Shape 1"/>
-          <p:cNvSpPr/>
-          <p:nvPr/>
-        </p:nvSpPr>
-        <p:spPr>
-          <a:xfrm>
-            <a:off x="8869680" y="-1051560"/>
-            <a:ext cx="4297680" cy="4297680"/>
-          </a:xfrm>
-          <a:prstGeom prst="arc">
-            <a:avLst/>
-          </a:prstGeom>
-          <a:noFill/>
-          <a:ln w="20320">
-            <a:solidFill>
-              <a:srgbClr val="FCD9A1">
-                <a:alpha val="75000"/>
-              </a:srgbClr>
-            </a:solidFill>
-            <a:prstDash val="solid"/>
-          </a:ln>
-        </p:spPr>
-      </p:sp>
-      <p:sp>
-        <p:nvSpPr>
-          <p:cNvPr id="4" name="Shape 2"/>
-          <p:cNvSpPr/>
-          <p:nvPr/>
-        </p:nvSpPr>
-        <p:spPr>
-          <a:xfrm>
-            <a:off x="-1097280" y="4800600"/>
-            <a:ext cx="2926080" cy="2926080"/>
-          </a:xfrm>
-          <a:prstGeom prst="arc">
-            <a:avLst/>
-          </a:prstGeom>
-          <a:noFill/>
-          <a:ln w="15240">
-            <a:solidFill>
-              <a:srgbClr val="FCD9A1">
-                <a:alpha val="55000"/>
-              </a:srgbClr>
-            </a:solidFill>
-            <a:prstDash val="solid"/>
-          </a:ln>
-        </p:spPr>
-      </p:sp>
-      <p:sp>
-        <p:nvSpPr>
           <p:cNvPr id="5" name="Text 3"/>
           <p:cNvSpPr/>
           <p:nvPr/>
@@ -2800,7 +3384,7 @@
         </p:spPr>
         <p:txBody>
           <a:bodyPr wrap="square" lIns="0" tIns="0" rIns="0" bIns="0" rtlCol="0" anchor="ctr">
-            <a:normAutofit/>
+            <a:normAutofit lnSpcReduction="10000"/>
           </a:bodyPr>
           <a:lstStyle/>
           <a:p>
@@ -2830,8 +3414,8 @@
         </p:nvSpPr>
         <p:spPr>
           <a:xfrm>
-            <a:off x="548640" y="713232"/>
-            <a:ext cx="6766560" cy="155448"/>
+            <a:off x="548640" y="713231"/>
+            <a:ext cx="6766560" cy="255281"/>
           </a:xfrm>
           <a:prstGeom prst="rect">
             <a:avLst/>
@@ -2845,18 +3429,15 @@
           </a:bodyPr>
           <a:lstStyle/>
           <a:p>
-            <a:pPr marL="0" indent="0">
-              <a:buNone/>
-            </a:pPr>
-            <a:r>
-              <a:rPr lang="en-US" sz="780" b="1" dirty="0">
+            <a:r>
+              <a:rPr lang="en-US" sz="1000" b="1" dirty="0">
                 <a:solidFill>
                   <a:srgbClr val="64748B"/>
                 </a:solidFill>
               </a:rPr>
-              <a:t>SEQUENCE DIAGRAMS FOR CRITICAL FLOWS</a:t>
-            </a:r>
-            <a:endParaRPr lang="en-US" sz="780" dirty="0"/>
+              <a:t>SEQUENCE DIAGRAMS FOR LANGUAGE SWITCH FLOW</a:t>
+            </a:r>
+            <a:endParaRPr lang="en-US" sz="1000" dirty="0"/>
           </a:p>
         </p:txBody>
       </p:sp>
@@ -2929,8 +3510,8 @@
         </p:nvSpPr>
         <p:spPr>
           <a:xfrm>
-            <a:off x="594360" y="1243584"/>
-            <a:ext cx="3566160" cy="4370832"/>
+            <a:off x="594360" y="1243583"/>
+            <a:ext cx="11100816" cy="5119144"/>
           </a:xfrm>
           <a:prstGeom prst="roundRect">
             <a:avLst>
@@ -2947,10 +3528,137 @@
             <a:prstDash val="solid"/>
           </a:ln>
         </p:spPr>
+        <p:txBody>
+          <a:bodyPr/>
+          <a:lstStyle/>
+          <a:p>
+            <a:endParaRPr lang="ar-SA" dirty="0"/>
+          </a:p>
+        </p:txBody>
+      </p:sp>
+      <p:sp>
+        <p:nvSpPr>
+          <p:cNvPr id="11" name="Text 8"/>
+          <p:cNvSpPr/>
+          <p:nvPr/>
+        </p:nvSpPr>
+        <p:spPr>
+          <a:xfrm>
+            <a:off x="4480560" y="6097089"/>
+            <a:ext cx="3200400" cy="244647"/>
+          </a:xfrm>
+          <a:prstGeom prst="rect">
+            <a:avLst/>
+          </a:prstGeom>
+          <a:noFill/>
+          <a:ln/>
+        </p:spPr>
+        <p:txBody>
+          <a:bodyPr wrap="square" lIns="0" tIns="0" rIns="0" bIns="0" rtlCol="0" anchor="ctr">
+            <a:normAutofit/>
+          </a:bodyPr>
+          <a:lstStyle/>
+          <a:p>
+            <a:pPr marL="0" indent="0" algn="ctr">
+              <a:buNone/>
+            </a:pPr>
+            <a:r>
+              <a:rPr lang="en-US" sz="1200" i="1" dirty="0">
+                <a:solidFill>
+                  <a:srgbClr val="64748B"/>
+                </a:solidFill>
+              </a:rPr>
+              <a:t>Language switch flow</a:t>
+            </a:r>
+            <a:endParaRPr lang="en-US" sz="1200" dirty="0"/>
+          </a:p>
+        </p:txBody>
+      </p:sp>
+      <p:sp>
+        <p:nvSpPr>
+          <p:cNvPr id="18" name="Text 13"/>
+          <p:cNvSpPr/>
+          <p:nvPr/>
+        </p:nvSpPr>
+        <p:spPr>
+          <a:xfrm>
+            <a:off x="777240" y="6363478"/>
+            <a:ext cx="10607040" cy="201168"/>
+          </a:xfrm>
+          <a:prstGeom prst="rect">
+            <a:avLst/>
+          </a:prstGeom>
+          <a:noFill/>
+          <a:ln/>
+        </p:spPr>
+        <p:txBody>
+          <a:bodyPr wrap="square" lIns="0" tIns="0" rIns="0" bIns="0" rtlCol="0" anchor="ctr">
+            <a:normAutofit/>
+          </a:bodyPr>
+          <a:lstStyle/>
+          <a:p>
+            <a:pPr marL="0" indent="0" algn="ctr">
+              <a:buNone/>
+            </a:pPr>
+            <a:r>
+              <a:rPr lang="en-US" sz="1030" b="1" dirty="0">
+                <a:solidFill>
+                  <a:srgbClr val="475569"/>
+                </a:solidFill>
+              </a:rPr>
+              <a:t>The diagram connect UI behavior to contexts, services, localStorage, Express APIs, JWT checks, and SQLite persistence.</a:t>
+            </a:r>
+            <a:endParaRPr lang="en-US" sz="1030" dirty="0"/>
+          </a:p>
+        </p:txBody>
+      </p:sp>
+      <p:sp>
+        <p:nvSpPr>
+          <p:cNvPr id="19" name="Text 14"/>
+          <p:cNvSpPr/>
+          <p:nvPr/>
+        </p:nvSpPr>
+        <p:spPr>
+          <a:xfrm>
+            <a:off x="530352" y="6565392"/>
+            <a:ext cx="4389120" cy="137160"/>
+          </a:xfrm>
+          <a:prstGeom prst="rect">
+            <a:avLst/>
+          </a:prstGeom>
+          <a:noFill/>
+          <a:ln/>
+        </p:spPr>
+        <p:txBody>
+          <a:bodyPr wrap="square" lIns="0" tIns="0" rIns="0" bIns="0" rtlCol="0" anchor="ctr">
+            <a:normAutofit/>
+          </a:bodyPr>
+          <a:lstStyle/>
+          <a:p>
+            <a:pPr marL="0" indent="0">
+              <a:buNone/>
+            </a:pPr>
+            <a:r>
+              <a:rPr lang="en-US" sz="660" dirty="0">
+                <a:solidFill>
+                  <a:srgbClr val="9CA3AF"/>
+                </a:solidFill>
+              </a:rPr>
+              <a:t>YallaMarket  •  Software Engineering Final Presentation</a:t>
+            </a:r>
+            <a:endParaRPr lang="en-US" sz="660" dirty="0"/>
+          </a:p>
+        </p:txBody>
       </p:sp>
       <p:pic>
         <p:nvPicPr>
-          <p:cNvPr id="10" name="Image 0" descr="/mnt/data/YallaMarket_Checkout_Flow_Sequence_Diagram.png"/>
+          <p:cNvPr id="30" name="Picture 29">
+            <a:extLst>
+              <a:ext uri="{FF2B5EF4-FFF2-40B4-BE49-F238E27FC236}">
+                <a16:creationId xmlns:a16="http://schemas.microsoft.com/office/drawing/2014/main" id="{8C31A7D5-EC72-E25F-1AE0-827F6C815514}"/>
+              </a:ext>
+            </a:extLst>
+          </p:cNvPr>
           <p:cNvPicPr>
             <a:picLocks noChangeAspect="1"/>
           </p:cNvPicPr>
@@ -2964,24 +3672,116 @@
         </p:blipFill>
         <p:spPr>
           <a:xfrm>
-            <a:off x="777240" y="1805940"/>
-            <a:ext cx="3200400" cy="3200400"/>
+            <a:off x="2771191" y="1269439"/>
+            <a:ext cx="6735147" cy="4723931"/>
           </a:xfrm>
           <a:prstGeom prst="rect">
             <a:avLst/>
           </a:prstGeom>
         </p:spPr>
       </p:pic>
-      <p:sp>
-        <p:nvSpPr>
-          <p:cNvPr id="11" name="Text 8"/>
-          <p:cNvSpPr/>
-          <p:nvPr/>
-        </p:nvSpPr>
-        <p:spPr>
-          <a:xfrm>
-            <a:off x="777240" y="5532120"/>
-            <a:ext cx="3200400" cy="128016"/>
+    </p:spTree>
+  </p:cSld>
+  <p:clrMapOvr>
+    <a:masterClrMapping/>
+  </p:clrMapOvr>
+</p:sld>
+</file>
+
+<file path=ppt/slides/slide11.xml><?xml version="1.0" encoding="utf-8"?>
+<p:sld xmlns:a="http://schemas.openxmlformats.org/drawingml/2006/main" xmlns:r="http://schemas.openxmlformats.org/officeDocument/2006/relationships" xmlns:p="http://schemas.openxmlformats.org/presentationml/2006/main">
+  <p:cSld>
+    <p:bg>
+      <p:bgPr>
+        <a:solidFill>
+          <a:srgbClr val="FBFAF8"/>
+        </a:solidFill>
+        <a:effectLst/>
+      </p:bgPr>
+    </p:bg>
+    <p:spTree>
+      <p:nvGrpSpPr>
+        <p:cNvPr id="1" name="">
+          <a:extLst>
+            <a:ext uri="{FF2B5EF4-FFF2-40B4-BE49-F238E27FC236}">
+              <a16:creationId xmlns:a16="http://schemas.microsoft.com/office/drawing/2014/main" id="{D535F883-2AE9-095C-09A5-09326CAD3A25}"/>
+            </a:ext>
+          </a:extLst>
+        </p:cNvPr>
+        <p:cNvGrpSpPr/>
+        <p:nvPr/>
+      </p:nvGrpSpPr>
+      <p:grpSpPr>
+        <a:xfrm>
+          <a:off x="0" y="0"/>
+          <a:ext cx="0" cy="0"/>
+          <a:chOff x="0" y="0"/>
+          <a:chExt cx="0" cy="0"/>
+        </a:xfrm>
+      </p:grpSpPr>
+      <p:sp>
+        <p:nvSpPr>
+          <p:cNvPr id="5" name="Text 3">
+            <a:extLst>
+              <a:ext uri="{FF2B5EF4-FFF2-40B4-BE49-F238E27FC236}">
+                <a16:creationId xmlns:a16="http://schemas.microsoft.com/office/drawing/2014/main" id="{2E2E1832-03E6-C321-72A0-93C3E0186BA7}"/>
+              </a:ext>
+            </a:extLst>
+          </p:cNvPr>
+          <p:cNvSpPr/>
+          <p:nvPr/>
+        </p:nvSpPr>
+        <p:spPr>
+          <a:xfrm>
+            <a:off x="530352" y="301752"/>
+            <a:ext cx="7863840" cy="347472"/>
+          </a:xfrm>
+          <a:prstGeom prst="rect">
+            <a:avLst/>
+          </a:prstGeom>
+          <a:noFill/>
+          <a:ln/>
+        </p:spPr>
+        <p:txBody>
+          <a:bodyPr wrap="square" lIns="0" tIns="0" rIns="0" bIns="0" rtlCol="0" anchor="ctr">
+            <a:normAutofit lnSpcReduction="10000"/>
+          </a:bodyPr>
+          <a:lstStyle/>
+          <a:p>
+            <a:pPr marL="0" indent="0">
+              <a:buNone/>
+            </a:pPr>
+            <a:r>
+              <a:rPr lang="en-US" sz="2300" b="1" dirty="0">
+                <a:solidFill>
+                  <a:srgbClr val="171717"/>
+                </a:solidFill>
+                <a:latin typeface="Aptos Display" pitchFamily="34" charset="0"/>
+                <a:ea typeface="Aptos Display" pitchFamily="34" charset="-122"/>
+                <a:cs typeface="Aptos Display" pitchFamily="34" charset="-120"/>
+              </a:rPr>
+              <a:t>Behavioral Design</a:t>
+            </a:r>
+            <a:endParaRPr lang="en-US" sz="2300" dirty="0"/>
+          </a:p>
+        </p:txBody>
+      </p:sp>
+      <p:sp>
+        <p:nvSpPr>
+          <p:cNvPr id="6" name="Text 4">
+            <a:extLst>
+              <a:ext uri="{FF2B5EF4-FFF2-40B4-BE49-F238E27FC236}">
+                <a16:creationId xmlns:a16="http://schemas.microsoft.com/office/drawing/2014/main" id="{A264F8AA-CBE1-C280-03F6-E980B27DFCDF}"/>
+              </a:ext>
+            </a:extLst>
+          </p:cNvPr>
+          <p:cNvSpPr/>
+          <p:nvPr/>
+        </p:nvSpPr>
+        <p:spPr>
+          <a:xfrm>
+            <a:off x="548640" y="713232"/>
+            <a:ext cx="6766560" cy="256032"/>
           </a:xfrm>
           <a:prstGeom prst="rect">
             <a:avLst/>
@@ -2995,31 +3795,107 @@
           </a:bodyPr>
           <a:lstStyle/>
           <a:p>
-            <a:pPr marL="0" indent="0" algn="ctr">
-              <a:buNone/>
-            </a:pPr>
-            <a:r>
-              <a:rPr lang="en-US" sz="780" i="1" dirty="0">
+            <a:r>
+              <a:rPr lang="en-US" sz="1000" b="1" dirty="0">
                 <a:solidFill>
                   <a:srgbClr val="64748B"/>
                 </a:solidFill>
               </a:rPr>
-              <a:t>Checkout Flow</a:t>
-            </a:r>
-            <a:endParaRPr lang="en-US" sz="780" dirty="0"/>
-          </a:p>
-        </p:txBody>
-      </p:sp>
-      <p:sp>
-        <p:nvSpPr>
-          <p:cNvPr id="12" name="Shape 9"/>
-          <p:cNvSpPr/>
-          <p:nvPr/>
-        </p:nvSpPr>
-        <p:spPr>
-          <a:xfrm>
-            <a:off x="4343400" y="1243584"/>
-            <a:ext cx="3566160" cy="4370832"/>
+              <a:t>SEQUENCE DIAGRAMS FOR LANGUAGE SWITCH FLOW</a:t>
+            </a:r>
+            <a:endParaRPr lang="en-US" sz="1000" dirty="0"/>
+          </a:p>
+        </p:txBody>
+      </p:sp>
+      <p:sp>
+        <p:nvSpPr>
+          <p:cNvPr id="7" name="Text 5">
+            <a:extLst>
+              <a:ext uri="{FF2B5EF4-FFF2-40B4-BE49-F238E27FC236}">
+                <a16:creationId xmlns:a16="http://schemas.microsoft.com/office/drawing/2014/main" id="{92E545FD-CE6F-D707-41AB-37E2ED8201D3}"/>
+              </a:ext>
+            </a:extLst>
+          </p:cNvPr>
+          <p:cNvSpPr/>
+          <p:nvPr/>
+        </p:nvSpPr>
+        <p:spPr>
+          <a:xfrm>
+            <a:off x="11283696" y="393192"/>
+            <a:ext cx="347472" cy="137160"/>
+          </a:xfrm>
+          <a:prstGeom prst="rect">
+            <a:avLst/>
+          </a:prstGeom>
+          <a:noFill/>
+          <a:ln/>
+        </p:spPr>
+        <p:txBody>
+          <a:bodyPr wrap="square" lIns="0" tIns="0" rIns="0" bIns="0" rtlCol="0" anchor="ctr">
+            <a:normAutofit/>
+          </a:bodyPr>
+          <a:lstStyle/>
+          <a:p>
+            <a:pPr marL="0" indent="0" algn="r">
+              <a:buNone/>
+            </a:pPr>
+            <a:r>
+              <a:rPr lang="en-US" sz="800" b="1" dirty="0">
+                <a:solidFill>
+                  <a:srgbClr val="64748B"/>
+                </a:solidFill>
+              </a:rPr>
+              <a:t>10</a:t>
+            </a:r>
+            <a:endParaRPr lang="en-US" sz="800" dirty="0"/>
+          </a:p>
+        </p:txBody>
+      </p:sp>
+      <p:sp>
+        <p:nvSpPr>
+          <p:cNvPr id="8" name="Shape 6">
+            <a:extLst>
+              <a:ext uri="{FF2B5EF4-FFF2-40B4-BE49-F238E27FC236}">
+                <a16:creationId xmlns:a16="http://schemas.microsoft.com/office/drawing/2014/main" id="{BDF04B8F-A9B2-3E96-9B0A-675792F9C584}"/>
+              </a:ext>
+            </a:extLst>
+          </p:cNvPr>
+          <p:cNvSpPr/>
+          <p:nvPr/>
+        </p:nvSpPr>
+        <p:spPr>
+          <a:xfrm>
+            <a:off x="530352" y="969264"/>
+            <a:ext cx="11100816" cy="0"/>
+          </a:xfrm>
+          <a:prstGeom prst="line">
+            <a:avLst/>
+          </a:prstGeom>
+          <a:noFill/>
+          <a:ln w="12700">
+            <a:solidFill>
+              <a:srgbClr val="E7E2D9"/>
+            </a:solidFill>
+            <a:prstDash val="solid"/>
+          </a:ln>
+        </p:spPr>
+      </p:sp>
+      <p:sp>
+        <p:nvSpPr>
+          <p:cNvPr id="9" name="Shape 7">
+            <a:extLst>
+              <a:ext uri="{FF2B5EF4-FFF2-40B4-BE49-F238E27FC236}">
+                <a16:creationId xmlns:a16="http://schemas.microsoft.com/office/drawing/2014/main" id="{3FE0963C-68C8-965E-7856-40C0FC11E43F}"/>
+              </a:ext>
+            </a:extLst>
+          </p:cNvPr>
+          <p:cNvSpPr/>
+          <p:nvPr/>
+        </p:nvSpPr>
+        <p:spPr>
+          <a:xfrm>
+            <a:off x="594360" y="1243583"/>
+            <a:ext cx="11100816" cy="5119144"/>
           </a:xfrm>
           <a:prstGeom prst="roundRect">
             <a:avLst>
@@ -3036,41 +3912,283 @@
             <a:prstDash val="solid"/>
           </a:ln>
         </p:spPr>
+        <p:txBody>
+          <a:bodyPr/>
+          <a:lstStyle/>
+          <a:p>
+            <a:endParaRPr lang="ar-SA" dirty="0"/>
+          </a:p>
+        </p:txBody>
+      </p:sp>
+      <p:sp>
+        <p:nvSpPr>
+          <p:cNvPr id="11" name="Text 8">
+            <a:extLst>
+              <a:ext uri="{FF2B5EF4-FFF2-40B4-BE49-F238E27FC236}">
+                <a16:creationId xmlns:a16="http://schemas.microsoft.com/office/drawing/2014/main" id="{9F21C2C7-B531-7577-E006-E6F03D9F7A0F}"/>
+              </a:ext>
+            </a:extLst>
+          </p:cNvPr>
+          <p:cNvSpPr/>
+          <p:nvPr/>
+        </p:nvSpPr>
+        <p:spPr>
+          <a:xfrm>
+            <a:off x="4480560" y="6097089"/>
+            <a:ext cx="3200400" cy="244647"/>
+          </a:xfrm>
+          <a:prstGeom prst="rect">
+            <a:avLst/>
+          </a:prstGeom>
+          <a:noFill/>
+          <a:ln/>
+        </p:spPr>
+        <p:txBody>
+          <a:bodyPr wrap="square" lIns="0" tIns="0" rIns="0" bIns="0" rtlCol="0" anchor="ctr">
+            <a:normAutofit/>
+          </a:bodyPr>
+          <a:lstStyle/>
+          <a:p>
+            <a:pPr marL="0" indent="0" algn="ctr">
+              <a:buNone/>
+            </a:pPr>
+            <a:r>
+              <a:rPr lang="en-US" sz="1200" i="1" dirty="0">
+                <a:solidFill>
+                  <a:srgbClr val="64748B"/>
+                </a:solidFill>
+              </a:rPr>
+              <a:t>Checkout Flow</a:t>
+            </a:r>
+            <a:endParaRPr lang="en-US" sz="1200" dirty="0"/>
+          </a:p>
+        </p:txBody>
+      </p:sp>
+      <p:sp>
+        <p:nvSpPr>
+          <p:cNvPr id="18" name="Text 13">
+            <a:extLst>
+              <a:ext uri="{FF2B5EF4-FFF2-40B4-BE49-F238E27FC236}">
+                <a16:creationId xmlns:a16="http://schemas.microsoft.com/office/drawing/2014/main" id="{5E73B678-C4F7-346D-BB4C-895D30BCB41C}"/>
+              </a:ext>
+            </a:extLst>
+          </p:cNvPr>
+          <p:cNvSpPr/>
+          <p:nvPr/>
+        </p:nvSpPr>
+        <p:spPr>
+          <a:xfrm>
+            <a:off x="777240" y="6363478"/>
+            <a:ext cx="10607040" cy="201168"/>
+          </a:xfrm>
+          <a:prstGeom prst="rect">
+            <a:avLst/>
+          </a:prstGeom>
+          <a:noFill/>
+          <a:ln/>
+        </p:spPr>
+        <p:txBody>
+          <a:bodyPr wrap="square" lIns="0" tIns="0" rIns="0" bIns="0" rtlCol="0" anchor="ctr">
+            <a:normAutofit/>
+          </a:bodyPr>
+          <a:lstStyle/>
+          <a:p>
+            <a:pPr marL="0" indent="0" algn="ctr">
+              <a:buNone/>
+            </a:pPr>
+            <a:r>
+              <a:rPr lang="en-US" sz="1030" b="1" dirty="0">
+                <a:solidFill>
+                  <a:srgbClr val="475569"/>
+                </a:solidFill>
+              </a:rPr>
+              <a:t>The diagram connect UI behavior to contexts, services, localStorage, Express APIs, JWT checks, and SQLite persistence.</a:t>
+            </a:r>
+            <a:endParaRPr lang="en-US" sz="1030" dirty="0"/>
+          </a:p>
+        </p:txBody>
+      </p:sp>
+      <p:sp>
+        <p:nvSpPr>
+          <p:cNvPr id="19" name="Text 14">
+            <a:extLst>
+              <a:ext uri="{FF2B5EF4-FFF2-40B4-BE49-F238E27FC236}">
+                <a16:creationId xmlns:a16="http://schemas.microsoft.com/office/drawing/2014/main" id="{59BBC161-8FD6-00FC-CF2C-DDB049A5DAEC}"/>
+              </a:ext>
+            </a:extLst>
+          </p:cNvPr>
+          <p:cNvSpPr/>
+          <p:nvPr/>
+        </p:nvSpPr>
+        <p:spPr>
+          <a:xfrm>
+            <a:off x="530352" y="6565392"/>
+            <a:ext cx="4389120" cy="137160"/>
+          </a:xfrm>
+          <a:prstGeom prst="rect">
+            <a:avLst/>
+          </a:prstGeom>
+          <a:noFill/>
+          <a:ln/>
+        </p:spPr>
+        <p:txBody>
+          <a:bodyPr wrap="square" lIns="0" tIns="0" rIns="0" bIns="0" rtlCol="0" anchor="ctr">
+            <a:normAutofit/>
+          </a:bodyPr>
+          <a:lstStyle/>
+          <a:p>
+            <a:pPr marL="0" indent="0">
+              <a:buNone/>
+            </a:pPr>
+            <a:r>
+              <a:rPr lang="en-US" sz="660" dirty="0">
+                <a:solidFill>
+                  <a:srgbClr val="9CA3AF"/>
+                </a:solidFill>
+              </a:rPr>
+              <a:t>YallaMarket  •  Software Engineering Final Presentation</a:t>
+            </a:r>
+            <a:endParaRPr lang="en-US" sz="660" dirty="0"/>
+          </a:p>
+        </p:txBody>
       </p:sp>
       <p:pic>
         <p:nvPicPr>
-          <p:cNvPr id="13" name="Image 1" descr="/mnt/data/YallaMarket_Login_Logout_Flow_Sequence_Diagram(1).png"/>
+          <p:cNvPr id="17" name="Picture 16">
+            <a:extLst>
+              <a:ext uri="{FF2B5EF4-FFF2-40B4-BE49-F238E27FC236}">
+                <a16:creationId xmlns:a16="http://schemas.microsoft.com/office/drawing/2014/main" id="{AB8F00A3-B3DD-2436-C4DA-1D1DF9ACFF7A}"/>
+              </a:ext>
+            </a:extLst>
+          </p:cNvPr>
           <p:cNvPicPr>
             <a:picLocks noChangeAspect="1"/>
           </p:cNvPicPr>
           <p:nvPr/>
         </p:nvPicPr>
         <p:blipFill>
-          <a:blip r:embed="rId4"/>
+          <a:blip r:embed="rId3"/>
           <a:stretch>
             <a:fillRect/>
           </a:stretch>
         </p:blipFill>
         <p:spPr>
           <a:xfrm>
-            <a:off x="4526280" y="1805940"/>
-            <a:ext cx="3200400" cy="3200400"/>
+            <a:off x="3033724" y="1307592"/>
+            <a:ext cx="5570606" cy="4621318"/>
           </a:xfrm>
           <a:prstGeom prst="rect">
             <a:avLst/>
           </a:prstGeom>
         </p:spPr>
       </p:pic>
-      <p:sp>
-        <p:nvSpPr>
-          <p:cNvPr id="14" name="Text 10"/>
-          <p:cNvSpPr/>
-          <p:nvPr/>
-        </p:nvSpPr>
-        <p:spPr>
-          <a:xfrm>
-            <a:off x="4526280" y="5532120"/>
-            <a:ext cx="3200400" cy="128016"/>
+    </p:spTree>
+    <p:extLst>
+      <p:ext uri="{BB962C8B-B14F-4D97-AF65-F5344CB8AC3E}">
+        <p14:creationId xmlns:p14="http://schemas.microsoft.com/office/powerpoint/2010/main" val="2651661076"/>
+      </p:ext>
+    </p:extLst>
+  </p:cSld>
+  <p:clrMapOvr>
+    <a:masterClrMapping/>
+  </p:clrMapOvr>
+</p:sld>
+</file>
+
+<file path=ppt/slides/slide12.xml><?xml version="1.0" encoding="utf-8"?>
+<p:sld xmlns:a="http://schemas.openxmlformats.org/drawingml/2006/main" xmlns:r="http://schemas.openxmlformats.org/officeDocument/2006/relationships" xmlns:p="http://schemas.openxmlformats.org/presentationml/2006/main">
+  <p:cSld>
+    <p:bg>
+      <p:bgPr>
+        <a:solidFill>
+          <a:srgbClr val="FBFAF8"/>
+        </a:solidFill>
+        <a:effectLst/>
+      </p:bgPr>
+    </p:bg>
+    <p:spTree>
+      <p:nvGrpSpPr>
+        <p:cNvPr id="1" name="">
+          <a:extLst>
+            <a:ext uri="{FF2B5EF4-FFF2-40B4-BE49-F238E27FC236}">
+              <a16:creationId xmlns:a16="http://schemas.microsoft.com/office/drawing/2014/main" id="{BCB7AAF9-DA9B-F909-928F-33761DBA8972}"/>
+            </a:ext>
+          </a:extLst>
+        </p:cNvPr>
+        <p:cNvGrpSpPr/>
+        <p:nvPr/>
+      </p:nvGrpSpPr>
+      <p:grpSpPr>
+        <a:xfrm>
+          <a:off x="0" y="0"/>
+          <a:ext cx="0" cy="0"/>
+          <a:chOff x="0" y="0"/>
+          <a:chExt cx="0" cy="0"/>
+        </a:xfrm>
+      </p:grpSpPr>
+      <p:sp>
+        <p:nvSpPr>
+          <p:cNvPr id="5" name="Text 3">
+            <a:extLst>
+              <a:ext uri="{FF2B5EF4-FFF2-40B4-BE49-F238E27FC236}">
+                <a16:creationId xmlns:a16="http://schemas.microsoft.com/office/drawing/2014/main" id="{C65C25F3-9789-644C-3795-8E6E6ED90377}"/>
+              </a:ext>
+            </a:extLst>
+          </p:cNvPr>
+          <p:cNvSpPr/>
+          <p:nvPr/>
+        </p:nvSpPr>
+        <p:spPr>
+          <a:xfrm>
+            <a:off x="530352" y="301752"/>
+            <a:ext cx="7863840" cy="347472"/>
+          </a:xfrm>
+          <a:prstGeom prst="rect">
+            <a:avLst/>
+          </a:prstGeom>
+          <a:noFill/>
+          <a:ln/>
+        </p:spPr>
+        <p:txBody>
+          <a:bodyPr wrap="square" lIns="0" tIns="0" rIns="0" bIns="0" rtlCol="0" anchor="ctr">
+            <a:normAutofit lnSpcReduction="10000"/>
+          </a:bodyPr>
+          <a:lstStyle/>
+          <a:p>
+            <a:pPr marL="0" indent="0">
+              <a:buNone/>
+            </a:pPr>
+            <a:r>
+              <a:rPr lang="en-US" sz="2300" b="1" dirty="0">
+                <a:solidFill>
+                  <a:srgbClr val="171717"/>
+                </a:solidFill>
+                <a:latin typeface="Aptos Display" pitchFamily="34" charset="0"/>
+                <a:ea typeface="Aptos Display" pitchFamily="34" charset="-122"/>
+                <a:cs typeface="Aptos Display" pitchFamily="34" charset="-120"/>
+              </a:rPr>
+              <a:t>Behavioral Design</a:t>
+            </a:r>
+            <a:endParaRPr lang="en-US" sz="2300" dirty="0"/>
+          </a:p>
+        </p:txBody>
+      </p:sp>
+      <p:sp>
+        <p:nvSpPr>
+          <p:cNvPr id="6" name="Text 4">
+            <a:extLst>
+              <a:ext uri="{FF2B5EF4-FFF2-40B4-BE49-F238E27FC236}">
+                <a16:creationId xmlns:a16="http://schemas.microsoft.com/office/drawing/2014/main" id="{92AE3B47-C167-8AF6-8CCC-94F591775B71}"/>
+              </a:ext>
+            </a:extLst>
+          </p:cNvPr>
+          <p:cNvSpPr/>
+          <p:nvPr/>
+        </p:nvSpPr>
+        <p:spPr>
+          <a:xfrm>
+            <a:off x="548640" y="713231"/>
+            <a:ext cx="6766560" cy="284951"/>
           </a:xfrm>
           <a:prstGeom prst="rect">
             <a:avLst/>
@@ -3084,31 +4202,107 @@
           </a:bodyPr>
           <a:lstStyle/>
           <a:p>
-            <a:pPr marL="0" indent="0" algn="ctr">
-              <a:buNone/>
-            </a:pPr>
-            <a:r>
-              <a:rPr lang="en-US" sz="780" i="1" dirty="0">
+            <a:r>
+              <a:rPr lang="en-US" sz="1000" b="1" dirty="0">
                 <a:solidFill>
                   <a:srgbClr val="64748B"/>
                 </a:solidFill>
               </a:rPr>
-              <a:t>Login / Logout Flow</a:t>
-            </a:r>
-            <a:endParaRPr lang="en-US" sz="780" dirty="0"/>
-          </a:p>
-        </p:txBody>
-      </p:sp>
-      <p:sp>
-        <p:nvSpPr>
-          <p:cNvPr id="15" name="Shape 11"/>
-          <p:cNvSpPr/>
-          <p:nvPr/>
-        </p:nvSpPr>
-        <p:spPr>
-          <a:xfrm>
-            <a:off x="8092440" y="1243584"/>
-            <a:ext cx="3566160" cy="4370832"/>
+              <a:t>SEQUENCE DIAGRAMS FOR LANGUAGE SWITCH FLOW</a:t>
+            </a:r>
+            <a:endParaRPr lang="en-US" sz="1000" dirty="0"/>
+          </a:p>
+        </p:txBody>
+      </p:sp>
+      <p:sp>
+        <p:nvSpPr>
+          <p:cNvPr id="7" name="Text 5">
+            <a:extLst>
+              <a:ext uri="{FF2B5EF4-FFF2-40B4-BE49-F238E27FC236}">
+                <a16:creationId xmlns:a16="http://schemas.microsoft.com/office/drawing/2014/main" id="{C160D358-ED8B-C0A8-5E9F-1202DDBAFB51}"/>
+              </a:ext>
+            </a:extLst>
+          </p:cNvPr>
+          <p:cNvSpPr/>
+          <p:nvPr/>
+        </p:nvSpPr>
+        <p:spPr>
+          <a:xfrm>
+            <a:off x="11283696" y="393192"/>
+            <a:ext cx="347472" cy="137160"/>
+          </a:xfrm>
+          <a:prstGeom prst="rect">
+            <a:avLst/>
+          </a:prstGeom>
+          <a:noFill/>
+          <a:ln/>
+        </p:spPr>
+        <p:txBody>
+          <a:bodyPr wrap="square" lIns="0" tIns="0" rIns="0" bIns="0" rtlCol="0" anchor="ctr">
+            <a:normAutofit/>
+          </a:bodyPr>
+          <a:lstStyle/>
+          <a:p>
+            <a:pPr marL="0" indent="0" algn="r">
+              <a:buNone/>
+            </a:pPr>
+            <a:r>
+              <a:rPr lang="en-US" sz="800" b="1" dirty="0">
+                <a:solidFill>
+                  <a:srgbClr val="64748B"/>
+                </a:solidFill>
+              </a:rPr>
+              <a:t>10</a:t>
+            </a:r>
+            <a:endParaRPr lang="en-US" sz="800" dirty="0"/>
+          </a:p>
+        </p:txBody>
+      </p:sp>
+      <p:sp>
+        <p:nvSpPr>
+          <p:cNvPr id="8" name="Shape 6">
+            <a:extLst>
+              <a:ext uri="{FF2B5EF4-FFF2-40B4-BE49-F238E27FC236}">
+                <a16:creationId xmlns:a16="http://schemas.microsoft.com/office/drawing/2014/main" id="{413098C5-D442-3F44-DE48-B0C9EFE3C062}"/>
+              </a:ext>
+            </a:extLst>
+          </p:cNvPr>
+          <p:cNvSpPr/>
+          <p:nvPr/>
+        </p:nvSpPr>
+        <p:spPr>
+          <a:xfrm>
+            <a:off x="530352" y="969264"/>
+            <a:ext cx="11100816" cy="0"/>
+          </a:xfrm>
+          <a:prstGeom prst="line">
+            <a:avLst/>
+          </a:prstGeom>
+          <a:noFill/>
+          <a:ln w="12700">
+            <a:solidFill>
+              <a:srgbClr val="E7E2D9"/>
+            </a:solidFill>
+            <a:prstDash val="solid"/>
+          </a:ln>
+        </p:spPr>
+      </p:sp>
+      <p:sp>
+        <p:nvSpPr>
+          <p:cNvPr id="9" name="Shape 7">
+            <a:extLst>
+              <a:ext uri="{FF2B5EF4-FFF2-40B4-BE49-F238E27FC236}">
+                <a16:creationId xmlns:a16="http://schemas.microsoft.com/office/drawing/2014/main" id="{559A9C74-98FD-1239-8CD9-435A30150538}"/>
+              </a:ext>
+            </a:extLst>
+          </p:cNvPr>
+          <p:cNvSpPr/>
+          <p:nvPr/>
+        </p:nvSpPr>
+        <p:spPr>
+          <a:xfrm>
+            <a:off x="594360" y="1243583"/>
+            <a:ext cx="11100816" cy="5119144"/>
           </a:xfrm>
           <a:prstGeom prst="roundRect">
             <a:avLst>
@@ -3125,146 +4319,188 @@
             <a:prstDash val="solid"/>
           </a:ln>
         </p:spPr>
+        <p:txBody>
+          <a:bodyPr/>
+          <a:lstStyle/>
+          <a:p>
+            <a:endParaRPr lang="ar-SA" dirty="0"/>
+          </a:p>
+        </p:txBody>
+      </p:sp>
+      <p:sp>
+        <p:nvSpPr>
+          <p:cNvPr id="11" name="Text 8">
+            <a:extLst>
+              <a:ext uri="{FF2B5EF4-FFF2-40B4-BE49-F238E27FC236}">
+                <a16:creationId xmlns:a16="http://schemas.microsoft.com/office/drawing/2014/main" id="{FE44B5D5-0B1E-A59C-B299-7415ED145BF9}"/>
+              </a:ext>
+            </a:extLst>
+          </p:cNvPr>
+          <p:cNvSpPr/>
+          <p:nvPr/>
+        </p:nvSpPr>
+        <p:spPr>
+          <a:xfrm>
+            <a:off x="4480560" y="6097089"/>
+            <a:ext cx="3200400" cy="244647"/>
+          </a:xfrm>
+          <a:prstGeom prst="rect">
+            <a:avLst/>
+          </a:prstGeom>
+          <a:noFill/>
+          <a:ln/>
+        </p:spPr>
+        <p:txBody>
+          <a:bodyPr wrap="square" lIns="0" tIns="0" rIns="0" bIns="0" rtlCol="0" anchor="ctr">
+            <a:normAutofit/>
+          </a:bodyPr>
+          <a:lstStyle/>
+          <a:p>
+            <a:pPr marL="0" indent="0" algn="ctr">
+              <a:buNone/>
+            </a:pPr>
+            <a:r>
+              <a:rPr lang="en-US" sz="1200" i="1" dirty="0">
+                <a:solidFill>
+                  <a:srgbClr val="64748B"/>
+                </a:solidFill>
+              </a:rPr>
+              <a:t>Class diagram</a:t>
+            </a:r>
+            <a:endParaRPr lang="en-US" sz="1200" dirty="0"/>
+          </a:p>
+        </p:txBody>
+      </p:sp>
+      <p:sp>
+        <p:nvSpPr>
+          <p:cNvPr id="18" name="Text 13">
+            <a:extLst>
+              <a:ext uri="{FF2B5EF4-FFF2-40B4-BE49-F238E27FC236}">
+                <a16:creationId xmlns:a16="http://schemas.microsoft.com/office/drawing/2014/main" id="{B3785CFE-F85F-1236-FCCB-DED0898D9F11}"/>
+              </a:ext>
+            </a:extLst>
+          </p:cNvPr>
+          <p:cNvSpPr/>
+          <p:nvPr/>
+        </p:nvSpPr>
+        <p:spPr>
+          <a:xfrm>
+            <a:off x="777240" y="6363478"/>
+            <a:ext cx="10607040" cy="201168"/>
+          </a:xfrm>
+          <a:prstGeom prst="rect">
+            <a:avLst/>
+          </a:prstGeom>
+          <a:noFill/>
+          <a:ln/>
+        </p:spPr>
+        <p:txBody>
+          <a:bodyPr wrap="square" lIns="0" tIns="0" rIns="0" bIns="0" rtlCol="0" anchor="ctr">
+            <a:normAutofit/>
+          </a:bodyPr>
+          <a:lstStyle/>
+          <a:p>
+            <a:pPr marL="0" indent="0" algn="ctr">
+              <a:buNone/>
+            </a:pPr>
+            <a:r>
+              <a:rPr lang="en-US" sz="1030" b="1" dirty="0">
+                <a:solidFill>
+                  <a:srgbClr val="475569"/>
+                </a:solidFill>
+              </a:rPr>
+              <a:t>The diagram connect UI behavior to contexts, services, localStorage, Express APIs, JWT checks, and SQLite persistence.</a:t>
+            </a:r>
+            <a:endParaRPr lang="en-US" sz="1030" dirty="0"/>
+          </a:p>
+        </p:txBody>
+      </p:sp>
+      <p:sp>
+        <p:nvSpPr>
+          <p:cNvPr id="19" name="Text 14">
+            <a:extLst>
+              <a:ext uri="{FF2B5EF4-FFF2-40B4-BE49-F238E27FC236}">
+                <a16:creationId xmlns:a16="http://schemas.microsoft.com/office/drawing/2014/main" id="{3A79A51E-A4C8-8848-8459-4F4D2C729BBF}"/>
+              </a:ext>
+            </a:extLst>
+          </p:cNvPr>
+          <p:cNvSpPr/>
+          <p:nvPr/>
+        </p:nvSpPr>
+        <p:spPr>
+          <a:xfrm>
+            <a:off x="530352" y="6565392"/>
+            <a:ext cx="4389120" cy="137160"/>
+          </a:xfrm>
+          <a:prstGeom prst="rect">
+            <a:avLst/>
+          </a:prstGeom>
+          <a:noFill/>
+          <a:ln/>
+        </p:spPr>
+        <p:txBody>
+          <a:bodyPr wrap="square" lIns="0" tIns="0" rIns="0" bIns="0" rtlCol="0" anchor="ctr">
+            <a:normAutofit/>
+          </a:bodyPr>
+          <a:lstStyle/>
+          <a:p>
+            <a:pPr marL="0" indent="0">
+              <a:buNone/>
+            </a:pPr>
+            <a:r>
+              <a:rPr lang="en-US" sz="660" dirty="0">
+                <a:solidFill>
+                  <a:srgbClr val="9CA3AF"/>
+                </a:solidFill>
+              </a:rPr>
+              <a:t>YallaMarket  •  Software Engineering Final Presentation</a:t>
+            </a:r>
+            <a:endParaRPr lang="en-US" sz="660" dirty="0"/>
+          </a:p>
+        </p:txBody>
       </p:sp>
       <p:pic>
         <p:nvPicPr>
-          <p:cNvPr id="16" name="Image 2" descr="/mnt/data/YallaMarket_Language_Switch_Sequence_Diagram.png"/>
+          <p:cNvPr id="10" name="Graphic 9">
+            <a:extLst>
+              <a:ext uri="{FF2B5EF4-FFF2-40B4-BE49-F238E27FC236}">
+                <a16:creationId xmlns:a16="http://schemas.microsoft.com/office/drawing/2014/main" id="{11A84A15-E997-0F20-1CF4-5FCCF9A8D601}"/>
+              </a:ext>
+            </a:extLst>
+          </p:cNvPr>
           <p:cNvPicPr>
             <a:picLocks noChangeAspect="1"/>
           </p:cNvPicPr>
           <p:nvPr/>
         </p:nvPicPr>
         <p:blipFill>
-          <a:blip r:embed="rId5"/>
+          <a:blip>
+            <a:extLst>
+              <a:ext uri="{96DAC541-7B7A-43D3-8B79-37D633B846F1}">
+                <asvg:svgBlip xmlns:asvg="http://schemas.microsoft.com/office/drawing/2016/SVG/main" r:embed="rId3"/>
+              </a:ext>
+            </a:extLst>
+          </a:blip>
           <a:stretch>
             <a:fillRect/>
           </a:stretch>
         </p:blipFill>
         <p:spPr>
           <a:xfrm>
-            <a:off x="8275320" y="1805940"/>
-            <a:ext cx="3200400" cy="3200400"/>
+            <a:off x="2724912" y="1242832"/>
+            <a:ext cx="6424192" cy="4854257"/>
           </a:xfrm>
           <a:prstGeom prst="rect">
             <a:avLst/>
           </a:prstGeom>
         </p:spPr>
       </p:pic>
-      <p:sp>
-        <p:nvSpPr>
-          <p:cNvPr id="17" name="Text 12"/>
-          <p:cNvSpPr/>
-          <p:nvPr/>
-        </p:nvSpPr>
-        <p:spPr>
-          <a:xfrm>
-            <a:off x="8275320" y="5532120"/>
-            <a:ext cx="3200400" cy="128016"/>
-          </a:xfrm>
-          <a:prstGeom prst="rect">
-            <a:avLst/>
-          </a:prstGeom>
-          <a:noFill/>
-          <a:ln/>
-        </p:spPr>
-        <p:txBody>
-          <a:bodyPr wrap="square" lIns="0" tIns="0" rIns="0" bIns="0" rtlCol="0" anchor="ctr">
-            <a:normAutofit/>
-          </a:bodyPr>
-          <a:lstStyle/>
-          <a:p>
-            <a:pPr marL="0" indent="0" algn="ctr">
-              <a:buNone/>
-            </a:pPr>
-            <a:r>
-              <a:rPr lang="en-US" sz="780" i="1" dirty="0">
-                <a:solidFill>
-                  <a:srgbClr val="64748B"/>
-                </a:solidFill>
-              </a:rPr>
-              <a:t>Language Switch Flow</a:t>
-            </a:r>
-            <a:endParaRPr lang="en-US" sz="780" dirty="0"/>
-          </a:p>
-        </p:txBody>
-      </p:sp>
-      <p:sp>
-        <p:nvSpPr>
-          <p:cNvPr id="18" name="Text 13"/>
-          <p:cNvSpPr/>
-          <p:nvPr/>
-        </p:nvSpPr>
-        <p:spPr>
-          <a:xfrm>
-            <a:off x="777240" y="5989320"/>
-            <a:ext cx="10607040" cy="201168"/>
-          </a:xfrm>
-          <a:prstGeom prst="rect">
-            <a:avLst/>
-          </a:prstGeom>
-          <a:noFill/>
-          <a:ln/>
-        </p:spPr>
-        <p:txBody>
-          <a:bodyPr wrap="square" lIns="0" tIns="0" rIns="0" bIns="0" rtlCol="0" anchor="ctr">
-            <a:normAutofit/>
-          </a:bodyPr>
-          <a:lstStyle/>
-          <a:p>
-            <a:pPr marL="0" indent="0" algn="ctr">
-              <a:buNone/>
-            </a:pPr>
-            <a:r>
-              <a:rPr lang="en-US" sz="1030" b="1" dirty="0">
-                <a:solidFill>
-                  <a:srgbClr val="475569"/>
-                </a:solidFill>
-              </a:rPr>
-              <a:t>The diagrams connect UI behavior to contexts, services, localStorage, Express APIs, JWT checks, and SQLite persistence.</a:t>
-            </a:r>
-            <a:endParaRPr lang="en-US" sz="1030" dirty="0"/>
-          </a:p>
-        </p:txBody>
-      </p:sp>
-      <p:sp>
-        <p:nvSpPr>
-          <p:cNvPr id="19" name="Text 14"/>
-          <p:cNvSpPr/>
-          <p:nvPr/>
-        </p:nvSpPr>
-        <p:spPr>
-          <a:xfrm>
-            <a:off x="530352" y="6565392"/>
-            <a:ext cx="4389120" cy="137160"/>
-          </a:xfrm>
-          <a:prstGeom prst="rect">
-            <a:avLst/>
-          </a:prstGeom>
-          <a:noFill/>
-          <a:ln/>
-        </p:spPr>
-        <p:txBody>
-          <a:bodyPr wrap="square" lIns="0" tIns="0" rIns="0" bIns="0" rtlCol="0" anchor="ctr">
-            <a:normAutofit/>
-          </a:bodyPr>
-          <a:lstStyle/>
-          <a:p>
-            <a:pPr marL="0" indent="0">
-              <a:buNone/>
-            </a:pPr>
-            <a:r>
-              <a:rPr lang="en-US" sz="660" dirty="0">
-                <a:solidFill>
-                  <a:srgbClr val="9CA3AF"/>
-                </a:solidFill>
-              </a:rPr>
-              <a:t>YallaMarket  •  Software Engineering Final Presentation</a:t>
-            </a:r>
-            <a:endParaRPr lang="en-US" sz="660" dirty="0"/>
-          </a:p>
-        </p:txBody>
-      </p:sp>
     </p:spTree>
+    <p:extLst>
+      <p:ext uri="{BB962C8B-B14F-4D97-AF65-F5344CB8AC3E}">
+        <p14:creationId xmlns:p14="http://schemas.microsoft.com/office/powerpoint/2010/main" val="3037418576"/>
+      </p:ext>
+    </p:extLst>
   </p:cSld>
   <p:clrMapOvr>
     <a:masterClrMapping/>
@@ -3272,7 +4508,7 @@
 </p:sld>
 </file>
 
-<file path=ppt/slides/slide11.xml><?xml version="1.0" encoding="utf-8"?>
+<file path=ppt/slides/slide13.xml><?xml version="1.0" encoding="utf-8"?>
 <p:sld xmlns:a="http://schemas.openxmlformats.org/drawingml/2006/main" xmlns:r="http://schemas.openxmlformats.org/officeDocument/2006/relationships" xmlns:p="http://schemas.openxmlformats.org/presentationml/2006/main">
   <p:cSld name="Slide 11">
     <p:bg>
@@ -3299,83 +4535,6 @@
       </p:grpSpPr>
       <p:sp>
         <p:nvSpPr>
-          <p:cNvPr id="2" name="Shape 0"/>
-          <p:cNvSpPr/>
-          <p:nvPr/>
-        </p:nvSpPr>
-        <p:spPr>
-          <a:xfrm>
-            <a:off x="0" y="0"/>
-            <a:ext cx="12191695" cy="6858000"/>
-          </a:xfrm>
-          <a:prstGeom prst="rect">
-            <a:avLst/>
-          </a:prstGeom>
-          <a:solidFill>
-            <a:srgbClr val="FBFAF8"/>
-          </a:solidFill>
-          <a:ln w="12700">
-            <a:solidFill>
-              <a:srgbClr val="FBFAF8">
-                <a:alpha val="0"/>
-              </a:srgbClr>
-            </a:solidFill>
-            <a:prstDash val="solid"/>
-          </a:ln>
-        </p:spPr>
-      </p:sp>
-      <p:sp>
-        <p:nvSpPr>
-          <p:cNvPr id="3" name="Shape 1"/>
-          <p:cNvSpPr/>
-          <p:nvPr/>
-        </p:nvSpPr>
-        <p:spPr>
-          <a:xfrm>
-            <a:off x="8869680" y="-1051560"/>
-            <a:ext cx="4297680" cy="4297680"/>
-          </a:xfrm>
-          <a:prstGeom prst="arc">
-            <a:avLst/>
-          </a:prstGeom>
-          <a:noFill/>
-          <a:ln w="20320">
-            <a:solidFill>
-              <a:srgbClr val="FCD9A1">
-                <a:alpha val="75000"/>
-              </a:srgbClr>
-            </a:solidFill>
-            <a:prstDash val="solid"/>
-          </a:ln>
-        </p:spPr>
-      </p:sp>
-      <p:sp>
-        <p:nvSpPr>
-          <p:cNvPr id="4" name="Shape 2"/>
-          <p:cNvSpPr/>
-          <p:nvPr/>
-        </p:nvSpPr>
-        <p:spPr>
-          <a:xfrm>
-            <a:off x="-1097280" y="4800600"/>
-            <a:ext cx="2926080" cy="2926080"/>
-          </a:xfrm>
-          <a:prstGeom prst="arc">
-            <a:avLst/>
-          </a:prstGeom>
-          <a:noFill/>
-          <a:ln w="15240">
-            <a:solidFill>
-              <a:srgbClr val="FCD9A1">
-                <a:alpha val="55000"/>
-              </a:srgbClr>
-            </a:solidFill>
-            <a:prstDash val="solid"/>
-          </a:ln>
-        </p:spPr>
-      </p:sp>
-      <p:sp>
-        <p:nvSpPr>
           <p:cNvPr id="5" name="Text 3"/>
           <p:cNvSpPr/>
           <p:nvPr/>
@@ -3393,7 +4552,7 @@
         </p:spPr>
         <p:txBody>
           <a:bodyPr wrap="square" lIns="0" tIns="0" rIns="0" bIns="0" rtlCol="0" anchor="ctr">
-            <a:normAutofit/>
+            <a:normAutofit lnSpcReduction="10000"/>
           </a:bodyPr>
           <a:lstStyle/>
           <a:p>
@@ -3424,7 +4583,7 @@
         <p:spPr>
           <a:xfrm>
             <a:off x="548640" y="713232"/>
-            <a:ext cx="6766560" cy="155448"/>
+            <a:ext cx="6766560" cy="256032"/>
           </a:xfrm>
           <a:prstGeom prst="rect">
             <a:avLst/>
@@ -3442,14 +4601,14 @@
               <a:buNone/>
             </a:pPr>
             <a:r>
-              <a:rPr lang="en-US" sz="780" b="1" dirty="0">
+              <a:rPr lang="en-US" sz="1000" b="1" dirty="0">
                 <a:solidFill>
                   <a:srgbClr val="64748B"/>
                 </a:solidFill>
               </a:rPr>
               <a:t>MAIN MODULES AND API COVERAGE</a:t>
             </a:r>
-            <a:endParaRPr lang="en-US" sz="780" dirty="0"/>
+            <a:endParaRPr lang="en-US" sz="1000" dirty="0"/>
           </a:p>
         </p:txBody>
       </p:sp>
@@ -3950,7 +5109,7 @@
         </p:spPr>
         <p:txBody>
           <a:bodyPr wrap="square" lIns="0" tIns="0" rIns="0" bIns="0" rtlCol="0" anchor="ctr">
-            <a:normAutofit/>
+            <a:normAutofit lnSpcReduction="10000"/>
           </a:bodyPr>
           <a:lstStyle/>
           <a:p>
@@ -4405,7 +5564,7 @@
 </p:sld>
 </file>
 
-<file path=ppt/slides/slide12.xml><?xml version="1.0" encoding="utf-8"?>
+<file path=ppt/slides/slide14.xml><?xml version="1.0" encoding="utf-8"?>
 <p:sld xmlns:a="http://schemas.openxmlformats.org/drawingml/2006/main" xmlns:r="http://schemas.openxmlformats.org/officeDocument/2006/relationships" xmlns:p="http://schemas.openxmlformats.org/presentationml/2006/main">
   <p:cSld name="Slide 12">
     <p:bg>
@@ -4432,83 +5591,6 @@
       </p:grpSpPr>
       <p:sp>
         <p:nvSpPr>
-          <p:cNvPr id="2" name="Shape 0"/>
-          <p:cNvSpPr/>
-          <p:nvPr/>
-        </p:nvSpPr>
-        <p:spPr>
-          <a:xfrm>
-            <a:off x="0" y="0"/>
-            <a:ext cx="12191695" cy="6858000"/>
-          </a:xfrm>
-          <a:prstGeom prst="rect">
-            <a:avLst/>
-          </a:prstGeom>
-          <a:solidFill>
-            <a:srgbClr val="FBFAF8"/>
-          </a:solidFill>
-          <a:ln w="12700">
-            <a:solidFill>
-              <a:srgbClr val="FBFAF8">
-                <a:alpha val="0"/>
-              </a:srgbClr>
-            </a:solidFill>
-            <a:prstDash val="solid"/>
-          </a:ln>
-        </p:spPr>
-      </p:sp>
-      <p:sp>
-        <p:nvSpPr>
-          <p:cNvPr id="3" name="Shape 1"/>
-          <p:cNvSpPr/>
-          <p:nvPr/>
-        </p:nvSpPr>
-        <p:spPr>
-          <a:xfrm>
-            <a:off x="8869680" y="-1051560"/>
-            <a:ext cx="4297680" cy="4297680"/>
-          </a:xfrm>
-          <a:prstGeom prst="arc">
-            <a:avLst/>
-          </a:prstGeom>
-          <a:noFill/>
-          <a:ln w="20320">
-            <a:solidFill>
-              <a:srgbClr val="FCD9A1">
-                <a:alpha val="75000"/>
-              </a:srgbClr>
-            </a:solidFill>
-            <a:prstDash val="solid"/>
-          </a:ln>
-        </p:spPr>
-      </p:sp>
-      <p:sp>
-        <p:nvSpPr>
-          <p:cNvPr id="4" name="Shape 2"/>
-          <p:cNvSpPr/>
-          <p:nvPr/>
-        </p:nvSpPr>
-        <p:spPr>
-          <a:xfrm>
-            <a:off x="-1097280" y="4800600"/>
-            <a:ext cx="2926080" cy="2926080"/>
-          </a:xfrm>
-          <a:prstGeom prst="arc">
-            <a:avLst/>
-          </a:prstGeom>
-          <a:noFill/>
-          <a:ln w="15240">
-            <a:solidFill>
-              <a:srgbClr val="FCD9A1">
-                <a:alpha val="55000"/>
-              </a:srgbClr>
-            </a:solidFill>
-            <a:prstDash val="solid"/>
-          </a:ln>
-        </p:spPr>
-      </p:sp>
-      <p:sp>
-        <p:nvSpPr>
           <p:cNvPr id="5" name="Text 3"/>
           <p:cNvSpPr/>
           <p:nvPr/>
@@ -4526,7 +5608,7 @@
         </p:spPr>
         <p:txBody>
           <a:bodyPr wrap="square" lIns="0" tIns="0" rIns="0" bIns="0" rtlCol="0" anchor="ctr">
-            <a:normAutofit/>
+            <a:normAutofit lnSpcReduction="10000"/>
           </a:bodyPr>
           <a:lstStyle/>
           <a:p>
@@ -4557,7 +5639,7 @@
         <p:spPr>
           <a:xfrm>
             <a:off x="548640" y="713232"/>
-            <a:ext cx="6766560" cy="155448"/>
+            <a:ext cx="6766560" cy="256032"/>
           </a:xfrm>
           <a:prstGeom prst="rect">
             <a:avLst/>
@@ -4575,14 +5657,14 @@
               <a:buNone/>
             </a:pPr>
             <a:r>
-              <a:rPr lang="en-US" sz="780" b="1" dirty="0">
+              <a:rPr lang="en-US" sz="1000" b="1" dirty="0">
                 <a:solidFill>
                   <a:srgbClr val="64748B"/>
                 </a:solidFill>
               </a:rPr>
               <a:t>MANUAL TESTING AND FINAL QA SPRINT</a:t>
             </a:r>
-            <a:endParaRPr lang="en-US" sz="780" dirty="0"/>
+            <a:endParaRPr lang="en-US" sz="1000" dirty="0"/>
           </a:p>
         </p:txBody>
       </p:sp>
@@ -4693,7 +5775,7 @@
         </p:spPr>
         <p:txBody>
           <a:bodyPr wrap="square" lIns="0" tIns="0" rIns="0" bIns="0" rtlCol="0" anchor="ctr">
-            <a:normAutofit/>
+            <a:normAutofit lnSpcReduction="10000"/>
           </a:bodyPr>
           <a:lstStyle/>
           <a:p>
@@ -4796,7 +5878,7 @@
         </p:spPr>
         <p:txBody>
           <a:bodyPr wrap="square" lIns="0" tIns="0" rIns="0" bIns="0" rtlCol="0" anchor="ctr">
-            <a:normAutofit/>
+            <a:normAutofit lnSpcReduction="10000"/>
           </a:bodyPr>
           <a:lstStyle/>
           <a:p>
@@ -4899,7 +5981,7 @@
         </p:spPr>
         <p:txBody>
           <a:bodyPr wrap="square" lIns="0" tIns="0" rIns="0" bIns="0" rtlCol="0" anchor="ctr">
-            <a:normAutofit/>
+            <a:normAutofit lnSpcReduction="10000"/>
           </a:bodyPr>
           <a:lstStyle/>
           <a:p>
@@ -4991,8 +6073,8 @@
         </p:nvSpPr>
         <p:spPr>
           <a:xfrm>
-            <a:off x="1051560" y="2880360"/>
-            <a:ext cx="2194560" cy="219456"/>
+            <a:off x="1051560" y="2798064"/>
+            <a:ext cx="2194560" cy="411480"/>
           </a:xfrm>
           <a:prstGeom prst="rect">
             <a:avLst/>
@@ -5010,14 +6092,14 @@
               <a:buNone/>
             </a:pPr>
             <a:r>
-              <a:rPr lang="en-US" sz="1600" b="1" dirty="0">
+              <a:rPr lang="en-US" sz="2000" b="1" dirty="0">
                 <a:solidFill>
                   <a:srgbClr val="171717"/>
                 </a:solidFill>
               </a:rPr>
               <a:t>Test Coverage</a:t>
             </a:r>
-            <a:endParaRPr lang="en-US" sz="1600" dirty="0"/>
+            <a:endParaRPr lang="en-US" sz="2000" dirty="0"/>
           </a:p>
         </p:txBody>
       </p:sp>
@@ -5048,7 +6130,7 @@
               <a:buNone/>
             </a:pPr>
             <a:r>
-              <a:rPr lang="en-US" sz="960" dirty="0">
+              <a:rPr lang="en-US" sz="1400" dirty="0">
                 <a:solidFill>
                   <a:srgbClr val="475569"/>
                 </a:solidFill>
@@ -5060,7 +6142,7 @@
 • Admin dashboard and order status updates
 • Localization and fallback handling</a:t>
             </a:r>
-            <a:endParaRPr lang="en-US" sz="960" dirty="0"/>
+            <a:endParaRPr lang="en-US" sz="1400" dirty="0"/>
           </a:p>
         </p:txBody>
       </p:sp>
@@ -5099,8 +6181,8 @@
         </p:nvSpPr>
         <p:spPr>
           <a:xfrm>
-            <a:off x="6876288" y="1664208"/>
-            <a:ext cx="2971800" cy="219456"/>
+            <a:off x="6876288" y="1581912"/>
+            <a:ext cx="2971800" cy="301752"/>
           </a:xfrm>
           <a:prstGeom prst="rect">
             <a:avLst/>
@@ -5118,14 +6200,14 @@
               <a:buNone/>
             </a:pPr>
             <a:r>
-              <a:rPr lang="en-US" sz="1600" b="1" dirty="0">
+              <a:rPr lang="en-US" b="1" dirty="0">
                 <a:solidFill>
                   <a:srgbClr val="171717"/>
                 </a:solidFill>
               </a:rPr>
               <a:t>Sprint 5 Bugs Closed</a:t>
             </a:r>
-            <a:endParaRPr lang="en-US" sz="1600" dirty="0"/>
+            <a:endParaRPr lang="en-US" dirty="0"/>
           </a:p>
         </p:txBody>
       </p:sp>
@@ -5148,7 +6230,7 @@
         </p:spPr>
         <p:txBody>
           <a:bodyPr wrap="square" lIns="254" tIns="254" rIns="254" bIns="254" rtlCol="0" anchor="ctr">
-            <a:normAutofit/>
+            <a:normAutofit fontScale="92500"/>
           </a:bodyPr>
           <a:lstStyle/>
           <a:p>
@@ -5156,7 +6238,7 @@
               <a:buNone/>
             </a:pPr>
             <a:r>
-              <a:rPr lang="en-US" sz="950" dirty="0">
+              <a:rPr lang="en-US" sz="1600" dirty="0">
                 <a:solidFill>
                   <a:srgbClr val="475569"/>
                 </a:solidFill>
@@ -5166,7 +6248,7 @@
 • SCRUM-129: RTL/LTR consistency
 • SCRUM-130: invalid route fallback</a:t>
             </a:r>
-            <a:endParaRPr lang="en-US" sz="950" dirty="0"/>
+            <a:endParaRPr lang="en-US" sz="1600" dirty="0"/>
           </a:p>
         </p:txBody>
       </p:sp>
@@ -5179,7 +6261,7 @@
         <p:spPr>
           <a:xfrm>
             <a:off x="6876288" y="3886200"/>
-            <a:ext cx="3337560" cy="438912"/>
+            <a:ext cx="3937892" cy="438912"/>
           </a:xfrm>
           <a:prstGeom prst="rect">
             <a:avLst/>
@@ -5197,14 +6279,14 @@
               <a:buNone/>
             </a:pPr>
             <a:r>
-              <a:rPr lang="en-US" sz="1050" b="1" dirty="0">
+              <a:rPr lang="en-US" sz="1200" b="1" dirty="0">
                 <a:solidFill>
                   <a:srgbClr val="16A34A"/>
                 </a:solidFill>
               </a:rPr>
               <a:t>All final QA bugs were moved to Done and documented as resolved/verified.</a:t>
             </a:r>
-            <a:endParaRPr lang="en-US" sz="1050" dirty="0"/>
+            <a:endParaRPr lang="en-US" sz="1200" dirty="0"/>
           </a:p>
         </p:txBody>
       </p:sp>
@@ -5254,7 +6336,125 @@
 </p:sld>
 </file>
 
-<file path=ppt/slides/slide13.xml><?xml version="1.0" encoding="utf-8"?>
+<file path=ppt/slides/slide15.xml><?xml version="1.0" encoding="utf-8"?>
+<p:sld xmlns:a="http://schemas.openxmlformats.org/drawingml/2006/main" xmlns:r="http://schemas.openxmlformats.org/officeDocument/2006/relationships" xmlns:p="http://schemas.openxmlformats.org/presentationml/2006/main">
+  <p:cSld>
+    <p:spTree>
+      <p:nvGrpSpPr>
+        <p:cNvPr id="1" name=""/>
+        <p:cNvGrpSpPr/>
+        <p:nvPr/>
+      </p:nvGrpSpPr>
+      <p:grpSpPr>
+        <a:xfrm>
+          <a:off x="0" y="0"/>
+          <a:ext cx="0" cy="0"/>
+          <a:chOff x="0" y="0"/>
+          <a:chExt cx="0" cy="0"/>
+        </a:xfrm>
+      </p:grpSpPr>
+      <p:sp>
+        <p:nvSpPr>
+          <p:cNvPr id="3" name="TextBox 2">
+            <a:extLst>
+              <a:ext uri="{FF2B5EF4-FFF2-40B4-BE49-F238E27FC236}">
+                <a16:creationId xmlns:a16="http://schemas.microsoft.com/office/drawing/2014/main" id="{D62D0FAF-288A-2093-1F8E-CB401282E764}"/>
+              </a:ext>
+            </a:extLst>
+          </p:cNvPr>
+          <p:cNvSpPr txBox="1"/>
+          <p:nvPr/>
+        </p:nvSpPr>
+        <p:spPr>
+          <a:xfrm>
+            <a:off x="3048778" y="2551837"/>
+            <a:ext cx="6097554" cy="1754326"/>
+          </a:xfrm>
+          <a:prstGeom prst="rect">
+            <a:avLst/>
+          </a:prstGeom>
+          <a:noFill/>
+        </p:spPr>
+        <p:txBody>
+          <a:bodyPr wrap="square">
+            <a:spAutoFit/>
+          </a:bodyPr>
+          <a:lstStyle/>
+          <a:p>
+            <a:pPr>
+              <a:buNone/>
+            </a:pPr>
+            <a:r>
+              <a:rPr lang="en-US" dirty="0"/>
+              <a:t>We prepared a complete manual QA report including:</a:t>
+            </a:r>
+          </a:p>
+          <a:p>
+            <a:pPr>
+              <a:buFont typeface="Arial" panose="020B0604020202020204" pitchFamily="34" charset="0"/>
+              <a:buChar char="•"/>
+            </a:pPr>
+            <a:r>
+              <a:rPr lang="en-US" dirty="0"/>
+              <a:t>20 manual test cases </a:t>
+            </a:r>
+          </a:p>
+          <a:p>
+            <a:pPr>
+              <a:buFont typeface="Arial" panose="020B0604020202020204" pitchFamily="34" charset="0"/>
+              <a:buChar char="•"/>
+            </a:pPr>
+            <a:r>
+              <a:rPr lang="en-US" dirty="0"/>
+              <a:t>execution results </a:t>
+            </a:r>
+          </a:p>
+          <a:p>
+            <a:pPr>
+              <a:buFont typeface="Arial" panose="020B0604020202020204" pitchFamily="34" charset="0"/>
+              <a:buChar char="•"/>
+            </a:pPr>
+            <a:r>
+              <a:rPr lang="en-US" dirty="0"/>
+              <a:t>Jira bug tracking </a:t>
+            </a:r>
+          </a:p>
+          <a:p>
+            <a:pPr>
+              <a:buFont typeface="Arial" panose="020B0604020202020204" pitchFamily="34" charset="0"/>
+              <a:buChar char="•"/>
+            </a:pPr>
+            <a:r>
+              <a:rPr lang="en-US" dirty="0"/>
+              <a:t>requirements traceability matrix </a:t>
+            </a:r>
+          </a:p>
+          <a:p>
+            <a:pPr>
+              <a:buFont typeface="Arial" panose="020B0604020202020204" pitchFamily="34" charset="0"/>
+              <a:buChar char="•"/>
+            </a:pPr>
+            <a:r>
+              <a:rPr lang="en-US" dirty="0"/>
+              <a:t>and final QA verification. And show him the document</a:t>
+            </a:r>
+          </a:p>
+        </p:txBody>
+      </p:sp>
+    </p:spTree>
+    <p:extLst>
+      <p:ext uri="{BB962C8B-B14F-4D97-AF65-F5344CB8AC3E}">
+        <p14:creationId xmlns:p14="http://schemas.microsoft.com/office/powerpoint/2010/main" val="4239330768"/>
+      </p:ext>
+    </p:extLst>
+  </p:cSld>
+  <p:clrMapOvr>
+    <a:masterClrMapping/>
+  </p:clrMapOvr>
+</p:sld>
+</file>
+
+<file path=ppt/slides/slide16.xml><?xml version="1.0" encoding="utf-8"?>
 <p:sld xmlns:a="http://schemas.openxmlformats.org/drawingml/2006/main" xmlns:r="http://schemas.openxmlformats.org/officeDocument/2006/relationships" xmlns:p="http://schemas.openxmlformats.org/presentationml/2006/main">
   <p:cSld name="Slide 13">
     <p:bg>
@@ -5281,83 +6481,6 @@
       </p:grpSpPr>
       <p:sp>
         <p:nvSpPr>
-          <p:cNvPr id="2" name="Shape 0"/>
-          <p:cNvSpPr/>
-          <p:nvPr/>
-        </p:nvSpPr>
-        <p:spPr>
-          <a:xfrm>
-            <a:off x="0" y="0"/>
-            <a:ext cx="12191695" cy="6858000"/>
-          </a:xfrm>
-          <a:prstGeom prst="rect">
-            <a:avLst/>
-          </a:prstGeom>
-          <a:solidFill>
-            <a:srgbClr val="FBFAF8"/>
-          </a:solidFill>
-          <a:ln w="12700">
-            <a:solidFill>
-              <a:srgbClr val="FBFAF8">
-                <a:alpha val="0"/>
-              </a:srgbClr>
-            </a:solidFill>
-            <a:prstDash val="solid"/>
-          </a:ln>
-        </p:spPr>
-      </p:sp>
-      <p:sp>
-        <p:nvSpPr>
-          <p:cNvPr id="3" name="Shape 1"/>
-          <p:cNvSpPr/>
-          <p:nvPr/>
-        </p:nvSpPr>
-        <p:spPr>
-          <a:xfrm>
-            <a:off x="8869680" y="-1051560"/>
-            <a:ext cx="4297680" cy="4297680"/>
-          </a:xfrm>
-          <a:prstGeom prst="arc">
-            <a:avLst/>
-          </a:prstGeom>
-          <a:noFill/>
-          <a:ln w="20320">
-            <a:solidFill>
-              <a:srgbClr val="FCD9A1">
-                <a:alpha val="75000"/>
-              </a:srgbClr>
-            </a:solidFill>
-            <a:prstDash val="solid"/>
-          </a:ln>
-        </p:spPr>
-      </p:sp>
-      <p:sp>
-        <p:nvSpPr>
-          <p:cNvPr id="4" name="Shape 2"/>
-          <p:cNvSpPr/>
-          <p:nvPr/>
-        </p:nvSpPr>
-        <p:spPr>
-          <a:xfrm>
-            <a:off x="-1097280" y="4800600"/>
-            <a:ext cx="2926080" cy="2926080"/>
-          </a:xfrm>
-          <a:prstGeom prst="arc">
-            <a:avLst/>
-          </a:prstGeom>
-          <a:noFill/>
-          <a:ln w="15240">
-            <a:solidFill>
-              <a:srgbClr val="FCD9A1">
-                <a:alpha val="55000"/>
-              </a:srgbClr>
-            </a:solidFill>
-            <a:prstDash val="solid"/>
-          </a:ln>
-        </p:spPr>
-      </p:sp>
-      <p:sp>
-        <p:nvSpPr>
           <p:cNvPr id="5" name="Text 3"/>
           <p:cNvSpPr/>
           <p:nvPr/>
@@ -5375,7 +6498,7 @@
         </p:spPr>
         <p:txBody>
           <a:bodyPr wrap="square" lIns="0" tIns="0" rIns="0" bIns="0" rtlCol="0" anchor="ctr">
-            <a:normAutofit/>
+            <a:normAutofit lnSpcReduction="10000"/>
           </a:bodyPr>
           <a:lstStyle/>
           <a:p>
@@ -5405,8 +6528,8 @@
         </p:nvSpPr>
         <p:spPr>
           <a:xfrm>
-            <a:off x="548640" y="713232"/>
-            <a:ext cx="6766560" cy="155448"/>
+            <a:off x="548640" y="713231"/>
+            <a:ext cx="6766560" cy="225567"/>
           </a:xfrm>
           <a:prstGeom prst="rect">
             <a:avLst/>
@@ -5424,14 +6547,14 @@
               <a:buNone/>
             </a:pPr>
             <a:r>
-              <a:rPr lang="en-US" sz="780" b="1" dirty="0">
+              <a:rPr lang="en-US" sz="1000" b="1" dirty="0">
                 <a:solidFill>
                   <a:srgbClr val="64748B"/>
                 </a:solidFill>
               </a:rPr>
               <a:t>JIRA SPRINT EVIDENCE AND VELOCITY</a:t>
             </a:r>
-            <a:endParaRPr lang="en-US" sz="780" dirty="0"/>
+            <a:endParaRPr lang="en-US" sz="1000" dirty="0"/>
           </a:p>
         </p:txBody>
       </p:sp>
@@ -5504,8 +6627,8 @@
         </p:nvSpPr>
         <p:spPr>
           <a:xfrm>
-            <a:off x="594360" y="1143000"/>
-            <a:ext cx="5349240" cy="1600200"/>
+            <a:off x="658368" y="1177409"/>
+            <a:ext cx="5349240" cy="1999214"/>
           </a:xfrm>
           <a:prstGeom prst="roundRect">
             <a:avLst>
@@ -5523,30 +6646,6 @@
           </a:ln>
         </p:spPr>
       </p:sp>
-      <p:pic>
-        <p:nvPicPr>
-          <p:cNvPr id="10" name="Image 0" descr="/mnt/data/image(589).png"/>
-          <p:cNvPicPr>
-            <a:picLocks noChangeAspect="1"/>
-          </p:cNvPicPr>
-          <p:nvPr/>
-        </p:nvPicPr>
-        <p:blipFill>
-          <a:blip r:embed="rId3"/>
-          <a:stretch>
-            <a:fillRect/>
-          </a:stretch>
-        </p:blipFill>
-        <p:spPr>
-          <a:xfrm>
-            <a:off x="1097280" y="1298448"/>
-            <a:ext cx="4496105" cy="1298448"/>
-          </a:xfrm>
-          <a:prstGeom prst="rect">
-            <a:avLst/>
-          </a:prstGeom>
-        </p:spPr>
-      </p:pic>
       <p:sp>
         <p:nvSpPr>
           <p:cNvPr id="11" name="Text 8"/>
@@ -5555,8 +6654,8 @@
         </p:nvSpPr>
         <p:spPr>
           <a:xfrm>
-            <a:off x="822960" y="2834640"/>
-            <a:ext cx="4892040" cy="137160"/>
+            <a:off x="889426" y="3246745"/>
+            <a:ext cx="4892040" cy="347910"/>
           </a:xfrm>
           <a:prstGeom prst="rect">
             <a:avLst/>
@@ -5574,14 +6673,14 @@
               <a:buNone/>
             </a:pPr>
             <a:r>
-              <a:rPr lang="en-US" sz="720" i="1" dirty="0">
+              <a:rPr lang="en-US" sz="1000" i="1" dirty="0">
                 <a:solidFill>
                   <a:srgbClr val="64748B"/>
                 </a:solidFill>
               </a:rPr>
               <a:t>Sprint 1: setup, SRS, home, navigation, diagrams</a:t>
             </a:r>
-            <a:endParaRPr lang="en-US" sz="720" dirty="0"/>
+            <a:endParaRPr lang="en-US" sz="1000" dirty="0"/>
           </a:p>
         </p:txBody>
       </p:sp>
@@ -5593,8 +6692,8 @@
         </p:nvSpPr>
         <p:spPr>
           <a:xfrm>
-            <a:off x="594360" y="3063240"/>
-            <a:ext cx="5349240" cy="1600200"/>
+            <a:off x="594360" y="3625118"/>
+            <a:ext cx="5413248" cy="2070199"/>
           </a:xfrm>
           <a:prstGeom prst="roundRect">
             <a:avLst>
@@ -5612,30 +6711,6 @@
           </a:ln>
         </p:spPr>
       </p:sp>
-      <p:pic>
-        <p:nvPicPr>
-          <p:cNvPr id="13" name="Image 1" descr="/mnt/data/image(591).png"/>
-          <p:cNvPicPr>
-            <a:picLocks noChangeAspect="1"/>
-          </p:cNvPicPr>
-          <p:nvPr/>
-        </p:nvPicPr>
-        <p:blipFill>
-          <a:blip r:embed="rId4"/>
-          <a:stretch>
-            <a:fillRect/>
-          </a:stretch>
-        </p:blipFill>
-        <p:spPr>
-          <a:xfrm>
-            <a:off x="1097281" y="3218688"/>
-            <a:ext cx="4496104" cy="1298448"/>
-          </a:xfrm>
-          <a:prstGeom prst="rect">
-            <a:avLst/>
-          </a:prstGeom>
-        </p:spPr>
-      </p:pic>
       <p:sp>
         <p:nvSpPr>
           <p:cNvPr id="14" name="Text 10"/>
@@ -5644,8 +6719,8 @@
         </p:nvSpPr>
         <p:spPr>
           <a:xfrm>
-            <a:off x="822960" y="4754880"/>
-            <a:ext cx="4892040" cy="137160"/>
+            <a:off x="822960" y="5750180"/>
+            <a:ext cx="4892040" cy="205186"/>
           </a:xfrm>
           <a:prstGeom prst="rect">
             <a:avLst/>
@@ -5663,14 +6738,14 @@
               <a:buNone/>
             </a:pPr>
             <a:r>
-              <a:rPr lang="en-US" sz="720" i="1" dirty="0">
+              <a:rPr lang="en-US" sz="1000" i="1" dirty="0">
                 <a:solidFill>
                   <a:srgbClr val="64748B"/>
                 </a:solidFill>
               </a:rPr>
               <a:t>Sprint 3: backend, SQLite models, auth, sample data</a:t>
             </a:r>
-            <a:endParaRPr lang="en-US" sz="720" dirty="0"/>
+            <a:endParaRPr lang="en-US" sz="1000" dirty="0"/>
           </a:p>
         </p:txBody>
       </p:sp>
@@ -5682,8 +6757,8 @@
         </p:nvSpPr>
         <p:spPr>
           <a:xfrm>
-            <a:off x="6217920" y="1143000"/>
-            <a:ext cx="5349240" cy="1600200"/>
+            <a:off x="6281928" y="1177409"/>
+            <a:ext cx="5349240" cy="1999214"/>
           </a:xfrm>
           <a:prstGeom prst="roundRect">
             <a:avLst>
@@ -5709,8 +6784,8 @@
         </p:nvSpPr>
         <p:spPr>
           <a:xfrm>
-            <a:off x="6446520" y="2834640"/>
-            <a:ext cx="4892040" cy="137160"/>
+            <a:off x="6512986" y="3248908"/>
+            <a:ext cx="4892040" cy="347909"/>
           </a:xfrm>
           <a:prstGeom prst="rect">
             <a:avLst/>
@@ -5728,14 +6803,14 @@
               <a:buNone/>
             </a:pPr>
             <a:r>
-              <a:rPr lang="en-US" sz="720" i="1" dirty="0">
+              <a:rPr lang="en-US" sz="1000" i="1" dirty="0">
                 <a:solidFill>
                   <a:srgbClr val="64748B"/>
                 </a:solidFill>
               </a:rPr>
               <a:t>Sprint 5: final QA, bugs, documentation, evidence</a:t>
             </a:r>
-            <a:endParaRPr lang="en-US" sz="720" dirty="0"/>
+            <a:endParaRPr lang="en-US" sz="1000" dirty="0"/>
           </a:p>
         </p:txBody>
       </p:sp>
@@ -5747,8 +6822,8 @@
         </p:nvSpPr>
         <p:spPr>
           <a:xfrm>
-            <a:off x="6217920" y="3063240"/>
-            <a:ext cx="5349240" cy="1600200"/>
+            <a:off x="6217920" y="3625118"/>
+            <a:ext cx="5413248" cy="2070199"/>
           </a:xfrm>
           <a:prstGeom prst="roundRect">
             <a:avLst>
@@ -5774,8 +6849,8 @@
         </p:nvSpPr>
         <p:spPr>
           <a:xfrm>
-            <a:off x="6446520" y="4754880"/>
-            <a:ext cx="4892040" cy="137160"/>
+            <a:off x="6446520" y="5750180"/>
+            <a:ext cx="4892040" cy="205186"/>
           </a:xfrm>
           <a:prstGeom prst="rect">
             <a:avLst/>
@@ -5793,14 +6868,14 @@
               <a:buNone/>
             </a:pPr>
             <a:r>
-              <a:rPr lang="en-US" sz="720" i="1" dirty="0">
+              <a:rPr lang="en-US" sz="1000" i="1" dirty="0">
                 <a:solidFill>
                   <a:srgbClr val="64748B"/>
                 </a:solidFill>
               </a:rPr>
               <a:t>Velocity report: iterative delivery across sprints</a:t>
             </a:r>
-            <a:endParaRPr lang="en-US" sz="720" dirty="0"/>
+            <a:endParaRPr lang="en-US" sz="1000" dirty="0"/>
           </a:p>
         </p:txBody>
       </p:sp>
@@ -5812,7 +6887,7 @@
         </p:nvSpPr>
         <p:spPr>
           <a:xfrm>
-            <a:off x="914400" y="5486400"/>
+            <a:off x="914400" y="6070221"/>
             <a:ext cx="10058400" cy="384048"/>
           </a:xfrm>
           <a:prstGeom prst="roundRect">
@@ -5841,7 +6916,7 @@
         </p:nvSpPr>
         <p:spPr>
           <a:xfrm>
-            <a:off x="1097280" y="5605272"/>
+            <a:off x="1097280" y="6214472"/>
             <a:ext cx="9692640" cy="100584"/>
           </a:xfrm>
           <a:prstGeom prst="rect">
@@ -5852,7 +6927,7 @@
         </p:spPr>
         <p:txBody>
           <a:bodyPr wrap="square" lIns="0" tIns="0" rIns="0" bIns="0" rtlCol="0" anchor="ctr">
-            <a:normAutofit/>
+            <a:normAutofit fontScale="85000" lnSpcReduction="10000"/>
           </a:bodyPr>
           <a:lstStyle/>
           <a:p>
@@ -5911,10 +6986,70 @@
       </p:sp>
       <p:pic>
         <p:nvPicPr>
-          <p:cNvPr id="25" name="Picture 24">
+          <p:cNvPr id="19" name="Picture 18">
             <a:extLst>
               <a:ext uri="{FF2B5EF4-FFF2-40B4-BE49-F238E27FC236}">
-                <a16:creationId xmlns:a16="http://schemas.microsoft.com/office/drawing/2014/main" id="{8DEEF9B7-55EB-FEF5-59B7-BB1A6FDD4FEE}"/>
+                <a16:creationId xmlns:a16="http://schemas.microsoft.com/office/drawing/2014/main" id="{23E03834-70A6-B30A-03DF-A3D2464A5B06}"/>
+              </a:ext>
+            </a:extLst>
+          </p:cNvPr>
+          <p:cNvPicPr>
+            <a:picLocks noChangeAspect="1"/>
+          </p:cNvPicPr>
+          <p:nvPr/>
+        </p:nvPicPr>
+        <p:blipFill>
+          <a:blip r:embed="rId3"/>
+          <a:stretch>
+            <a:fillRect/>
+          </a:stretch>
+        </p:blipFill>
+        <p:spPr>
+          <a:xfrm>
+            <a:off x="779417" y="1315994"/>
+            <a:ext cx="5147964" cy="1722043"/>
+          </a:xfrm>
+          <a:prstGeom prst="rect">
+            <a:avLst/>
+          </a:prstGeom>
+        </p:spPr>
+      </p:pic>
+      <p:pic>
+        <p:nvPicPr>
+          <p:cNvPr id="26" name="Picture 25">
+            <a:extLst>
+              <a:ext uri="{FF2B5EF4-FFF2-40B4-BE49-F238E27FC236}">
+                <a16:creationId xmlns:a16="http://schemas.microsoft.com/office/drawing/2014/main" id="{0D7E270F-8904-1414-F3B5-6A99984F5B5F}"/>
+              </a:ext>
+            </a:extLst>
+          </p:cNvPr>
+          <p:cNvPicPr>
+            <a:picLocks noChangeAspect="1"/>
+          </p:cNvPicPr>
+          <p:nvPr/>
+        </p:nvPicPr>
+        <p:blipFill>
+          <a:blip r:embed="rId4"/>
+          <a:stretch>
+            <a:fillRect/>
+          </a:stretch>
+        </p:blipFill>
+        <p:spPr>
+          <a:xfrm>
+            <a:off x="779417" y="3837199"/>
+            <a:ext cx="5147964" cy="1704807"/>
+          </a:xfrm>
+          <a:prstGeom prst="rect">
+            <a:avLst/>
+          </a:prstGeom>
+        </p:spPr>
+      </p:pic>
+      <p:pic>
+        <p:nvPicPr>
+          <p:cNvPr id="29" name="Picture 28">
+            <a:extLst>
+              <a:ext uri="{FF2B5EF4-FFF2-40B4-BE49-F238E27FC236}">
+                <a16:creationId xmlns:a16="http://schemas.microsoft.com/office/drawing/2014/main" id="{9FD59FA4-DC0C-E49D-6D83-6305A56349E2}"/>
               </a:ext>
             </a:extLst>
           </p:cNvPr>
@@ -5931,8 +7066,8 @@
         </p:blipFill>
         <p:spPr>
           <a:xfrm>
-            <a:off x="6685280" y="1293431"/>
-            <a:ext cx="4358639" cy="1278371"/>
+            <a:off x="6446520" y="1296588"/>
+            <a:ext cx="5087112" cy="1741449"/>
           </a:xfrm>
           <a:prstGeom prst="rect">
             <a:avLst/>
@@ -5941,10 +7076,10 @@
       </p:pic>
       <p:pic>
         <p:nvPicPr>
-          <p:cNvPr id="27" name="Picture 26">
+          <p:cNvPr id="31" name="Picture 30">
             <a:extLst>
               <a:ext uri="{FF2B5EF4-FFF2-40B4-BE49-F238E27FC236}">
-                <a16:creationId xmlns:a16="http://schemas.microsoft.com/office/drawing/2014/main" id="{CDE10E4E-9FF3-6A93-350C-4D8B854F1C41}"/>
+                <a16:creationId xmlns:a16="http://schemas.microsoft.com/office/drawing/2014/main" id="{66F93ECD-D8CD-4A13-4FFA-2ED825D52221}"/>
               </a:ext>
             </a:extLst>
           </p:cNvPr>
@@ -5961,8 +7096,8 @@
         </p:blipFill>
         <p:spPr>
           <a:xfrm>
-            <a:off x="6685280" y="3222437"/>
-            <a:ext cx="4358639" cy="1297705"/>
+            <a:off x="6446520" y="3816409"/>
+            <a:ext cx="5087112" cy="1725598"/>
           </a:xfrm>
           <a:prstGeom prst="rect">
             <a:avLst/>
@@ -5977,7 +7112,7 @@
 </p:sld>
 </file>
 
-<file path=ppt/slides/slide14.xml><?xml version="1.0" encoding="utf-8"?>
+<file path=ppt/slides/slide17.xml><?xml version="1.0" encoding="utf-8"?>
 <p:sld xmlns:a="http://schemas.openxmlformats.org/drawingml/2006/main" xmlns:r="http://schemas.openxmlformats.org/officeDocument/2006/relationships" xmlns:p="http://schemas.openxmlformats.org/presentationml/2006/main">
   <p:cSld name="Slide 14">
     <p:bg>
@@ -6004,83 +7139,6 @@
       </p:grpSpPr>
       <p:sp>
         <p:nvSpPr>
-          <p:cNvPr id="2" name="Shape 0"/>
-          <p:cNvSpPr/>
-          <p:nvPr/>
-        </p:nvSpPr>
-        <p:spPr>
-          <a:xfrm>
-            <a:off x="0" y="0"/>
-            <a:ext cx="12191695" cy="6858000"/>
-          </a:xfrm>
-          <a:prstGeom prst="rect">
-            <a:avLst/>
-          </a:prstGeom>
-          <a:solidFill>
-            <a:srgbClr val="FBFAF8"/>
-          </a:solidFill>
-          <a:ln w="12700">
-            <a:solidFill>
-              <a:srgbClr val="FBFAF8">
-                <a:alpha val="0"/>
-              </a:srgbClr>
-            </a:solidFill>
-            <a:prstDash val="solid"/>
-          </a:ln>
-        </p:spPr>
-      </p:sp>
-      <p:sp>
-        <p:nvSpPr>
-          <p:cNvPr id="3" name="Shape 1"/>
-          <p:cNvSpPr/>
-          <p:nvPr/>
-        </p:nvSpPr>
-        <p:spPr>
-          <a:xfrm>
-            <a:off x="8869680" y="-1051560"/>
-            <a:ext cx="4297680" cy="4297680"/>
-          </a:xfrm>
-          <a:prstGeom prst="arc">
-            <a:avLst/>
-          </a:prstGeom>
-          <a:noFill/>
-          <a:ln w="20320">
-            <a:solidFill>
-              <a:srgbClr val="FCD9A1">
-                <a:alpha val="75000"/>
-              </a:srgbClr>
-            </a:solidFill>
-            <a:prstDash val="solid"/>
-          </a:ln>
-        </p:spPr>
-      </p:sp>
-      <p:sp>
-        <p:nvSpPr>
-          <p:cNvPr id="4" name="Shape 2"/>
-          <p:cNvSpPr/>
-          <p:nvPr/>
-        </p:nvSpPr>
-        <p:spPr>
-          <a:xfrm>
-            <a:off x="-1097280" y="4800600"/>
-            <a:ext cx="2926080" cy="2926080"/>
-          </a:xfrm>
-          <a:prstGeom prst="arc">
-            <a:avLst/>
-          </a:prstGeom>
-          <a:noFill/>
-          <a:ln w="15240">
-            <a:solidFill>
-              <a:srgbClr val="FCD9A1">
-                <a:alpha val="55000"/>
-              </a:srgbClr>
-            </a:solidFill>
-            <a:prstDash val="solid"/>
-          </a:ln>
-        </p:spPr>
-      </p:sp>
-      <p:sp>
-        <p:nvSpPr>
           <p:cNvPr id="5" name="Text 3"/>
           <p:cNvSpPr/>
           <p:nvPr/>
@@ -6098,7 +7156,7 @@
         </p:spPr>
         <p:txBody>
           <a:bodyPr wrap="square" lIns="0" tIns="0" rIns="0" bIns="0" rtlCol="0" anchor="ctr">
-            <a:normAutofit/>
+            <a:normAutofit lnSpcReduction="10000"/>
           </a:bodyPr>
           <a:lstStyle/>
           <a:p>
@@ -6128,8 +7186,8 @@
         </p:nvSpPr>
         <p:spPr>
           <a:xfrm>
-            <a:off x="548640" y="713232"/>
-            <a:ext cx="6766560" cy="155448"/>
+            <a:off x="548640" y="713231"/>
+            <a:ext cx="6766560" cy="244059"/>
           </a:xfrm>
           <a:prstGeom prst="rect">
             <a:avLst/>
@@ -6147,14 +7205,14 @@
               <a:buNone/>
             </a:pPr>
             <a:r>
-              <a:rPr lang="en-US" sz="780" b="1" dirty="0">
+              <a:rPr lang="en-US" sz="1000" b="1" dirty="0">
                 <a:solidFill>
                   <a:srgbClr val="64748B"/>
                 </a:solidFill>
               </a:rPr>
               <a:t>GITHUB REPOSITORY AND JIRA-LINKED WORK</a:t>
             </a:r>
-            <a:endParaRPr lang="en-US" sz="780" dirty="0"/>
+            <a:endParaRPr lang="en-US" sz="1000" dirty="0"/>
           </a:p>
         </p:txBody>
       </p:sp>
@@ -6227,8 +7285,8 @@
         </p:nvSpPr>
         <p:spPr>
           <a:xfrm>
-            <a:off x="658368" y="1234440"/>
-            <a:ext cx="6492240" cy="4069080"/>
+            <a:off x="548641" y="1380743"/>
+            <a:ext cx="6159138" cy="3236977"/>
           </a:xfrm>
           <a:prstGeom prst="roundRect">
             <a:avLst>
@@ -6254,8 +7312,8 @@
         </p:nvSpPr>
         <p:spPr>
           <a:xfrm>
-            <a:off x="7452360" y="1234440"/>
-            <a:ext cx="3886200" cy="1508760"/>
+            <a:off x="6830007" y="1380743"/>
+            <a:ext cx="5253134" cy="1274504"/>
           </a:xfrm>
           <a:prstGeom prst="roundRect">
             <a:avLst>
@@ -6281,7 +7339,7 @@
         </p:nvSpPr>
         <p:spPr>
           <a:xfrm>
-            <a:off x="7726680" y="1536192"/>
+            <a:off x="7017553" y="1699699"/>
             <a:ext cx="2011680" cy="201168"/>
           </a:xfrm>
           <a:prstGeom prst="rect">
@@ -6292,6 +7350,44 @@
         </p:spPr>
         <p:txBody>
           <a:bodyPr wrap="square" lIns="0" tIns="0" rIns="0" bIns="0" rtlCol="0" anchor="ctr">
+            <a:normAutofit fontScale="92500" lnSpcReduction="20000"/>
+          </a:bodyPr>
+          <a:lstStyle/>
+          <a:p>
+            <a:pPr marL="0" indent="0">
+              <a:buNone/>
+            </a:pPr>
+            <a:r>
+              <a:rPr lang="en-US" sz="1600" b="1" dirty="0">
+                <a:solidFill>
+                  <a:srgbClr val="171717"/>
+                </a:solidFill>
+              </a:rPr>
+              <a:t>Repository</a:t>
+            </a:r>
+            <a:endParaRPr lang="en-US" sz="1600" dirty="0"/>
+          </a:p>
+        </p:txBody>
+      </p:sp>
+      <p:sp>
+        <p:nvSpPr>
+          <p:cNvPr id="13" name="Text 10"/>
+          <p:cNvSpPr/>
+          <p:nvPr/>
+        </p:nvSpPr>
+        <p:spPr>
+          <a:xfrm>
+            <a:off x="7017553" y="2065459"/>
+            <a:ext cx="3154680" cy="201168"/>
+          </a:xfrm>
+          <a:prstGeom prst="rect">
+            <a:avLst/>
+          </a:prstGeom>
+          <a:noFill/>
+          <a:ln/>
+        </p:spPr>
+        <p:txBody>
+          <a:bodyPr wrap="square" lIns="0" tIns="0" rIns="0" bIns="0" rtlCol="0" anchor="ctr">
             <a:normAutofit/>
           </a:bodyPr>
           <a:lstStyle/>
@@ -6300,27 +7396,27 @@
               <a:buNone/>
             </a:pPr>
             <a:r>
-              <a:rPr lang="en-US" sz="1600" b="1" dirty="0">
-                <a:solidFill>
-                  <a:srgbClr val="171717"/>
-                </a:solidFill>
-              </a:rPr>
-              <a:t>Repository</a:t>
-            </a:r>
-            <a:endParaRPr lang="en-US" sz="1600" dirty="0"/>
-          </a:p>
-        </p:txBody>
-      </p:sp>
-      <p:sp>
-        <p:nvSpPr>
-          <p:cNvPr id="13" name="Text 10"/>
-          <p:cNvSpPr/>
-          <p:nvPr/>
-        </p:nvSpPr>
-        <p:spPr>
-          <a:xfrm>
-            <a:off x="7726680" y="1901952"/>
-            <a:ext cx="3154680" cy="201168"/>
+              <a:rPr lang="en-US" sz="980" b="1" dirty="0">
+                <a:solidFill>
+                  <a:srgbClr val="2563EB"/>
+                </a:solidFill>
+              </a:rPr>
+              <a:t>github.com/BaraaMasri99/yallaMarket</a:t>
+            </a:r>
+            <a:endParaRPr lang="en-US" sz="980" dirty="0"/>
+          </a:p>
+        </p:txBody>
+      </p:sp>
+      <p:sp>
+        <p:nvSpPr>
+          <p:cNvPr id="14" name="Text 11"/>
+          <p:cNvSpPr/>
+          <p:nvPr/>
+        </p:nvSpPr>
+        <p:spPr>
+          <a:xfrm>
+            <a:off x="7017553" y="2394643"/>
+            <a:ext cx="3017520" cy="137160"/>
           </a:xfrm>
           <a:prstGeom prst="rect">
             <a:avLst/>
@@ -6338,44 +7434,6 @@
               <a:buNone/>
             </a:pPr>
             <a:r>
-              <a:rPr lang="en-US" sz="980" b="1" dirty="0">
-                <a:solidFill>
-                  <a:srgbClr val="2563EB"/>
-                </a:solidFill>
-              </a:rPr>
-              <a:t>github.com/BaraaMasri99/yallaMarket</a:t>
-            </a:r>
-            <a:endParaRPr lang="en-US" sz="980" dirty="0"/>
-          </a:p>
-        </p:txBody>
-      </p:sp>
-      <p:sp>
-        <p:nvSpPr>
-          <p:cNvPr id="14" name="Text 11"/>
-          <p:cNvSpPr/>
-          <p:nvPr/>
-        </p:nvSpPr>
-        <p:spPr>
-          <a:xfrm>
-            <a:off x="7726680" y="2231136"/>
-            <a:ext cx="3017520" cy="137160"/>
-          </a:xfrm>
-          <a:prstGeom prst="rect">
-            <a:avLst/>
-          </a:prstGeom>
-          <a:noFill/>
-          <a:ln/>
-        </p:spPr>
-        <p:txBody>
-          <a:bodyPr wrap="square" lIns="0" tIns="0" rIns="0" bIns="0" rtlCol="0" anchor="ctr">
-            <a:normAutofit/>
-          </a:bodyPr>
-          <a:lstStyle/>
-          <a:p>
-            <a:pPr marL="0" indent="0">
-              <a:buNone/>
-            </a:pPr>
-            <a:r>
               <a:rPr lang="en-US" sz="780" dirty="0">
                 <a:solidFill>
                   <a:srgbClr val="64748B"/>
@@ -6395,8 +7453,8 @@
         </p:nvSpPr>
         <p:spPr>
           <a:xfrm>
-            <a:off x="7452360" y="3017520"/>
-            <a:ext cx="3886200" cy="1664208"/>
+            <a:off x="6744145" y="2868392"/>
+            <a:ext cx="5338998" cy="1749328"/>
           </a:xfrm>
           <a:prstGeom prst="roundRect">
             <a:avLst>
@@ -6422,8 +7480,8 @@
         </p:nvSpPr>
         <p:spPr>
           <a:xfrm>
-            <a:off x="7635240" y="4535424"/>
-            <a:ext cx="3520440" cy="128016"/>
+            <a:off x="7635240" y="4377147"/>
+            <a:ext cx="3520440" cy="206082"/>
           </a:xfrm>
           <a:prstGeom prst="rect">
             <a:avLst/>
@@ -6441,14 +7499,14 @@
               <a:buNone/>
             </a:pPr>
             <a:r>
-              <a:rPr lang="en-US" sz="730" i="1" dirty="0">
+              <a:rPr lang="en-US" sz="1000" i="1" dirty="0">
                 <a:solidFill>
                   <a:srgbClr val="64748B"/>
                 </a:solidFill>
               </a:rPr>
               <a:t>Merged PRs linked with Jira issues</a:t>
             </a:r>
-            <a:endParaRPr lang="en-US" sz="730" dirty="0"/>
+            <a:endParaRPr lang="en-US" sz="1000" dirty="0"/>
           </a:p>
         </p:txBody>
       </p:sp>
@@ -6460,8 +7518,8 @@
         </p:nvSpPr>
         <p:spPr>
           <a:xfrm>
-            <a:off x="914400" y="5824728"/>
-            <a:ext cx="10149840" cy="228600"/>
+            <a:off x="824204" y="5623560"/>
+            <a:ext cx="10543592" cy="429768"/>
           </a:xfrm>
           <a:prstGeom prst="rect">
             <a:avLst/>
@@ -6479,14 +7537,14 @@
               <a:buNone/>
             </a:pPr>
             <a:r>
-              <a:rPr lang="en-US" sz="1080" b="1" dirty="0">
+              <a:rPr lang="en-US" sz="1400" b="1" dirty="0">
                 <a:solidFill>
                   <a:srgbClr val="475569"/>
                 </a:solidFill>
               </a:rPr>
               <a:t>Collaboration message: Jira issues defined the work, GitHub branches/commits/PRs provided traceable implementation evidence.</a:t>
             </a:r>
-            <a:endParaRPr lang="en-US" sz="1080" dirty="0"/>
+            <a:endParaRPr lang="en-US" sz="1400" dirty="0"/>
           </a:p>
         </p:txBody>
       </p:sp>
@@ -6528,12 +7586,56 @@
           </a:p>
         </p:txBody>
       </p:sp>
+      <p:sp>
+        <p:nvSpPr>
+          <p:cNvPr id="20" name="Text 13">
+            <a:extLst>
+              <a:ext uri="{FF2B5EF4-FFF2-40B4-BE49-F238E27FC236}">
+                <a16:creationId xmlns:a16="http://schemas.microsoft.com/office/drawing/2014/main" id="{45FA27E4-E621-4B7F-7B26-446EE55F3C83}"/>
+              </a:ext>
+            </a:extLst>
+          </p:cNvPr>
+          <p:cNvSpPr/>
+          <p:nvPr/>
+        </p:nvSpPr>
+        <p:spPr>
+          <a:xfrm>
+            <a:off x="2263140" y="4377147"/>
+            <a:ext cx="3520440" cy="228600"/>
+          </a:xfrm>
+          <a:prstGeom prst="rect">
+            <a:avLst/>
+          </a:prstGeom>
+          <a:noFill/>
+          <a:ln/>
+        </p:spPr>
+        <p:txBody>
+          <a:bodyPr wrap="square" lIns="0" tIns="0" rIns="0" bIns="0" rtlCol="0" anchor="ctr">
+            <a:normAutofit/>
+          </a:bodyPr>
+          <a:lstStyle/>
+          <a:p>
+            <a:pPr marL="0" indent="0" algn="ctr">
+              <a:buNone/>
+            </a:pPr>
+            <a:r>
+              <a:rPr lang="en-US" sz="1000" i="1" dirty="0">
+                <a:solidFill>
+                  <a:srgbClr val="64748B"/>
+                </a:solidFill>
+              </a:rPr>
+              <a:t>GitHub repo</a:t>
+            </a:r>
+            <a:endParaRPr lang="en-US" sz="1000" dirty="0"/>
+          </a:p>
+        </p:txBody>
+      </p:sp>
       <p:pic>
         <p:nvPicPr>
-          <p:cNvPr id="21" name="Picture 20">
+          <p:cNvPr id="24" name="Picture 23">
             <a:extLst>
               <a:ext uri="{FF2B5EF4-FFF2-40B4-BE49-F238E27FC236}">
-                <a16:creationId xmlns:a16="http://schemas.microsoft.com/office/drawing/2014/main" id="{4B38F7F1-B701-95B5-3391-7F50F47DCFEC}"/>
+                <a16:creationId xmlns:a16="http://schemas.microsoft.com/office/drawing/2014/main" id="{54AED326-7AA9-B76E-D70B-41BD0D966189}"/>
               </a:ext>
             </a:extLst>
           </p:cNvPr>
@@ -6550,8 +7652,8 @@
         </p:blipFill>
         <p:spPr>
           <a:xfrm>
-            <a:off x="853440" y="1584960"/>
-            <a:ext cx="6141720" cy="3264408"/>
+            <a:off x="6830008" y="3020605"/>
+            <a:ext cx="5178490" cy="1330607"/>
           </a:xfrm>
           <a:prstGeom prst="rect">
             <a:avLst/>
@@ -6560,10 +7662,10 @@
       </p:pic>
       <p:pic>
         <p:nvPicPr>
-          <p:cNvPr id="23" name="Picture 22">
+          <p:cNvPr id="3" name="Picture 2">
             <a:extLst>
               <a:ext uri="{FF2B5EF4-FFF2-40B4-BE49-F238E27FC236}">
-                <a16:creationId xmlns:a16="http://schemas.microsoft.com/office/drawing/2014/main" id="{5D6552B9-90D0-E8D7-9CDD-895A816EB2D3}"/>
+                <a16:creationId xmlns:a16="http://schemas.microsoft.com/office/drawing/2014/main" id="{68A972E4-74EE-1D34-7ED7-59A1417A759D}"/>
               </a:ext>
             </a:extLst>
           </p:cNvPr>
@@ -6580,8 +7682,8 @@
         </p:blipFill>
         <p:spPr>
           <a:xfrm>
-            <a:off x="7566659" y="3394876"/>
-            <a:ext cx="3657601" cy="820508"/>
+            <a:off x="684479" y="1715942"/>
+            <a:ext cx="5887461" cy="2635269"/>
           </a:xfrm>
           <a:prstGeom prst="rect">
             <a:avLst/>
@@ -6596,1291 +7698,7 @@
 </p:sld>
 </file>
 
-<file path=ppt/slides/slide15.xml><?xml version="1.0" encoding="utf-8"?>
-<p:sld xmlns:a="http://schemas.openxmlformats.org/drawingml/2006/main" xmlns:r="http://schemas.openxmlformats.org/officeDocument/2006/relationships" xmlns:p="http://schemas.openxmlformats.org/presentationml/2006/main">
-  <p:cSld name="Slide 15">
-    <p:bg>
-      <p:bgPr>
-        <a:solidFill>
-          <a:srgbClr val="FBFAF8"/>
-        </a:solidFill>
-        <a:effectLst/>
-      </p:bgPr>
-    </p:bg>
-    <p:spTree>
-      <p:nvGrpSpPr>
-        <p:cNvPr id="1" name=""/>
-        <p:cNvGrpSpPr/>
-        <p:nvPr/>
-      </p:nvGrpSpPr>
-      <p:grpSpPr>
-        <a:xfrm>
-          <a:off x="0" y="0"/>
-          <a:ext cx="0" cy="0"/>
-          <a:chOff x="0" y="0"/>
-          <a:chExt cx="0" cy="0"/>
-        </a:xfrm>
-      </p:grpSpPr>
-      <p:sp>
-        <p:nvSpPr>
-          <p:cNvPr id="2" name="Shape 0"/>
-          <p:cNvSpPr/>
-          <p:nvPr/>
-        </p:nvSpPr>
-        <p:spPr>
-          <a:xfrm>
-            <a:off x="0" y="0"/>
-            <a:ext cx="12191695" cy="6858000"/>
-          </a:xfrm>
-          <a:prstGeom prst="rect">
-            <a:avLst/>
-          </a:prstGeom>
-          <a:solidFill>
-            <a:srgbClr val="FBFAF8"/>
-          </a:solidFill>
-          <a:ln w="12700">
-            <a:solidFill>
-              <a:srgbClr val="FBFAF8">
-                <a:alpha val="0"/>
-              </a:srgbClr>
-            </a:solidFill>
-            <a:prstDash val="solid"/>
-          </a:ln>
-        </p:spPr>
-      </p:sp>
-      <p:sp>
-        <p:nvSpPr>
-          <p:cNvPr id="3" name="Shape 1"/>
-          <p:cNvSpPr/>
-          <p:nvPr/>
-        </p:nvSpPr>
-        <p:spPr>
-          <a:xfrm>
-            <a:off x="8869680" y="-1051560"/>
-            <a:ext cx="4297680" cy="4297680"/>
-          </a:xfrm>
-          <a:prstGeom prst="arc">
-            <a:avLst/>
-          </a:prstGeom>
-          <a:noFill/>
-          <a:ln w="20320">
-            <a:solidFill>
-              <a:srgbClr val="FCD9A1">
-                <a:alpha val="75000"/>
-              </a:srgbClr>
-            </a:solidFill>
-            <a:prstDash val="solid"/>
-          </a:ln>
-        </p:spPr>
-      </p:sp>
-      <p:sp>
-        <p:nvSpPr>
-          <p:cNvPr id="4" name="Shape 2"/>
-          <p:cNvSpPr/>
-          <p:nvPr/>
-        </p:nvSpPr>
-        <p:spPr>
-          <a:xfrm>
-            <a:off x="-1097280" y="4800600"/>
-            <a:ext cx="2926080" cy="2926080"/>
-          </a:xfrm>
-          <a:prstGeom prst="arc">
-            <a:avLst/>
-          </a:prstGeom>
-          <a:noFill/>
-          <a:ln w="15240">
-            <a:solidFill>
-              <a:srgbClr val="FCD9A1">
-                <a:alpha val="55000"/>
-              </a:srgbClr>
-            </a:solidFill>
-            <a:prstDash val="solid"/>
-          </a:ln>
-        </p:spPr>
-      </p:sp>
-      <p:sp>
-        <p:nvSpPr>
-          <p:cNvPr id="5" name="Text 3"/>
-          <p:cNvSpPr/>
-          <p:nvPr/>
-        </p:nvSpPr>
-        <p:spPr>
-          <a:xfrm>
-            <a:off x="530352" y="301752"/>
-            <a:ext cx="7863840" cy="347472"/>
-          </a:xfrm>
-          <a:prstGeom prst="rect">
-            <a:avLst/>
-          </a:prstGeom>
-          <a:noFill/>
-          <a:ln/>
-        </p:spPr>
-        <p:txBody>
-          <a:bodyPr wrap="square" lIns="0" tIns="0" rIns="0" bIns="0" rtlCol="0" anchor="ctr">
-            <a:normAutofit/>
-          </a:bodyPr>
-          <a:lstStyle/>
-          <a:p>
-            <a:pPr marL="0" indent="0">
-              <a:buNone/>
-            </a:pPr>
-            <a:r>
-              <a:rPr lang="en-US" sz="2300" b="1" dirty="0">
-                <a:solidFill>
-                  <a:srgbClr val="171717"/>
-                </a:solidFill>
-                <a:latin typeface="Aptos Display" pitchFamily="34" charset="0"/>
-                <a:ea typeface="Aptos Display" pitchFamily="34" charset="-122"/>
-                <a:cs typeface="Aptos Display" pitchFamily="34" charset="-120"/>
-              </a:rPr>
-              <a:t>Final Demo Plan</a:t>
-            </a:r>
-            <a:endParaRPr lang="en-US" sz="2300" dirty="0"/>
-          </a:p>
-        </p:txBody>
-      </p:sp>
-      <p:sp>
-        <p:nvSpPr>
-          <p:cNvPr id="6" name="Text 4"/>
-          <p:cNvSpPr/>
-          <p:nvPr/>
-        </p:nvSpPr>
-        <p:spPr>
-          <a:xfrm>
-            <a:off x="548640" y="713232"/>
-            <a:ext cx="6766560" cy="155448"/>
-          </a:xfrm>
-          <a:prstGeom prst="rect">
-            <a:avLst/>
-          </a:prstGeom>
-          <a:noFill/>
-          <a:ln/>
-        </p:spPr>
-        <p:txBody>
-          <a:bodyPr wrap="square" lIns="0" tIns="0" rIns="0" bIns="0" rtlCol="0" anchor="ctr">
-            <a:normAutofit/>
-          </a:bodyPr>
-          <a:lstStyle/>
-          <a:p>
-            <a:pPr marL="0" indent="0">
-              <a:buNone/>
-            </a:pPr>
-            <a:r>
-              <a:rPr lang="en-US" sz="780" b="1" dirty="0">
-                <a:solidFill>
-                  <a:srgbClr val="64748B"/>
-                </a:solidFill>
-              </a:rPr>
-              <a:t>RECOMMENDED SPEAKING AND RECORDING FLOW</a:t>
-            </a:r>
-            <a:endParaRPr lang="en-US" sz="780" dirty="0"/>
-          </a:p>
-        </p:txBody>
-      </p:sp>
-      <p:sp>
-        <p:nvSpPr>
-          <p:cNvPr id="7" name="Text 5"/>
-          <p:cNvSpPr/>
-          <p:nvPr/>
-        </p:nvSpPr>
-        <p:spPr>
-          <a:xfrm>
-            <a:off x="11283696" y="393192"/>
-            <a:ext cx="347472" cy="137160"/>
-          </a:xfrm>
-          <a:prstGeom prst="rect">
-            <a:avLst/>
-          </a:prstGeom>
-          <a:noFill/>
-          <a:ln/>
-        </p:spPr>
-        <p:txBody>
-          <a:bodyPr wrap="square" lIns="0" tIns="0" rIns="0" bIns="0" rtlCol="0" anchor="ctr">
-            <a:normAutofit/>
-          </a:bodyPr>
-          <a:lstStyle/>
-          <a:p>
-            <a:pPr marL="0" indent="0" algn="r">
-              <a:buNone/>
-            </a:pPr>
-            <a:r>
-              <a:rPr lang="en-US" sz="800" b="1" dirty="0">
-                <a:solidFill>
-                  <a:srgbClr val="64748B"/>
-                </a:solidFill>
-              </a:rPr>
-              <a:t>15</a:t>
-            </a:r>
-            <a:endParaRPr lang="en-US" sz="800" dirty="0"/>
-          </a:p>
-        </p:txBody>
-      </p:sp>
-      <p:sp>
-        <p:nvSpPr>
-          <p:cNvPr id="8" name="Shape 6"/>
-          <p:cNvSpPr/>
-          <p:nvPr/>
-        </p:nvSpPr>
-        <p:spPr>
-          <a:xfrm>
-            <a:off x="530352" y="969264"/>
-            <a:ext cx="11100816" cy="0"/>
-          </a:xfrm>
-          <a:prstGeom prst="line">
-            <a:avLst/>
-          </a:prstGeom>
-          <a:noFill/>
-          <a:ln w="12700">
-            <a:solidFill>
-              <a:srgbClr val="E7E2D9"/>
-            </a:solidFill>
-            <a:prstDash val="solid"/>
-          </a:ln>
-        </p:spPr>
-      </p:sp>
-      <p:sp>
-        <p:nvSpPr>
-          <p:cNvPr id="9" name="Shape 7"/>
-          <p:cNvSpPr/>
-          <p:nvPr/>
-        </p:nvSpPr>
-        <p:spPr>
-          <a:xfrm>
-            <a:off x="777240" y="1234440"/>
-            <a:ext cx="5394960" cy="347472"/>
-          </a:xfrm>
-          <a:prstGeom prst="roundRect">
-            <a:avLst>
-              <a:gd name="adj" fmla="val 18421"/>
-            </a:avLst>
-          </a:prstGeom>
-          <a:solidFill>
-            <a:srgbClr val="FFFFFF"/>
-          </a:solidFill>
-          <a:ln w="12700">
-            <a:solidFill>
-              <a:srgbClr val="E4DED4"/>
-            </a:solidFill>
-            <a:prstDash val="solid"/>
-          </a:ln>
-        </p:spPr>
-      </p:sp>
-      <p:sp>
-        <p:nvSpPr>
-          <p:cNvPr id="10" name="Text 8"/>
-          <p:cNvSpPr/>
-          <p:nvPr/>
-        </p:nvSpPr>
-        <p:spPr>
-          <a:xfrm>
-            <a:off x="950976" y="1316736"/>
-            <a:ext cx="228600" cy="100584"/>
-          </a:xfrm>
-          <a:prstGeom prst="rect">
-            <a:avLst/>
-          </a:prstGeom>
-          <a:noFill/>
-          <a:ln/>
-        </p:spPr>
-        <p:txBody>
-          <a:bodyPr wrap="square" lIns="0" tIns="0" rIns="0" bIns="0" rtlCol="0" anchor="ctr">
-            <a:normAutofit/>
-          </a:bodyPr>
-          <a:lstStyle/>
-          <a:p>
-            <a:pPr marL="0" indent="0" algn="ctr">
-              <a:buNone/>
-            </a:pPr>
-            <a:r>
-              <a:rPr lang="en-US" sz="780" b="1" dirty="0">
-                <a:solidFill>
-                  <a:srgbClr val="F59E0B"/>
-                </a:solidFill>
-              </a:rPr>
-              <a:t>1</a:t>
-            </a:r>
-            <a:endParaRPr lang="en-US" sz="780" dirty="0"/>
-          </a:p>
-        </p:txBody>
-      </p:sp>
-      <p:sp>
-        <p:nvSpPr>
-          <p:cNvPr id="11" name="Text 9"/>
-          <p:cNvSpPr/>
-          <p:nvPr/>
-        </p:nvSpPr>
-        <p:spPr>
-          <a:xfrm>
-            <a:off x="1325880" y="1307592"/>
-            <a:ext cx="4480560" cy="109728"/>
-          </a:xfrm>
-          <a:prstGeom prst="rect">
-            <a:avLst/>
-          </a:prstGeom>
-          <a:noFill/>
-          <a:ln/>
-        </p:spPr>
-        <p:txBody>
-          <a:bodyPr wrap="square" lIns="0" tIns="0" rIns="0" bIns="0" rtlCol="0" anchor="ctr">
-            <a:normAutofit/>
-          </a:bodyPr>
-          <a:lstStyle/>
-          <a:p>
-            <a:pPr marL="0" indent="0">
-              <a:buNone/>
-            </a:pPr>
-            <a:r>
-              <a:rPr lang="en-US" sz="850" b="1" dirty="0">
-                <a:solidFill>
-                  <a:srgbClr val="475569"/>
-                </a:solidFill>
-              </a:rPr>
-              <a:t>Project introduction and problem statement</a:t>
-            </a:r>
-            <a:endParaRPr lang="en-US" sz="850" dirty="0"/>
-          </a:p>
-        </p:txBody>
-      </p:sp>
-      <p:sp>
-        <p:nvSpPr>
-          <p:cNvPr id="12" name="Shape 10"/>
-          <p:cNvSpPr/>
-          <p:nvPr/>
-        </p:nvSpPr>
-        <p:spPr>
-          <a:xfrm>
-            <a:off x="777240" y="1737360"/>
-            <a:ext cx="5394960" cy="347472"/>
-          </a:xfrm>
-          <a:prstGeom prst="roundRect">
-            <a:avLst>
-              <a:gd name="adj" fmla="val 18421"/>
-            </a:avLst>
-          </a:prstGeom>
-          <a:solidFill>
-            <a:srgbClr val="FFF7ED"/>
-          </a:solidFill>
-          <a:ln w="12700">
-            <a:solidFill>
-              <a:srgbClr val="E4DED4"/>
-            </a:solidFill>
-            <a:prstDash val="solid"/>
-          </a:ln>
-        </p:spPr>
-      </p:sp>
-      <p:sp>
-        <p:nvSpPr>
-          <p:cNvPr id="13" name="Text 11"/>
-          <p:cNvSpPr/>
-          <p:nvPr/>
-        </p:nvSpPr>
-        <p:spPr>
-          <a:xfrm>
-            <a:off x="950976" y="1819656"/>
-            <a:ext cx="228600" cy="100584"/>
-          </a:xfrm>
-          <a:prstGeom prst="rect">
-            <a:avLst/>
-          </a:prstGeom>
-          <a:noFill/>
-          <a:ln/>
-        </p:spPr>
-        <p:txBody>
-          <a:bodyPr wrap="square" lIns="0" tIns="0" rIns="0" bIns="0" rtlCol="0" anchor="ctr">
-            <a:normAutofit/>
-          </a:bodyPr>
-          <a:lstStyle/>
-          <a:p>
-            <a:pPr marL="0" indent="0" algn="ctr">
-              <a:buNone/>
-            </a:pPr>
-            <a:r>
-              <a:rPr lang="en-US" sz="780" b="1" dirty="0">
-                <a:solidFill>
-                  <a:srgbClr val="F59E0B"/>
-                </a:solidFill>
-              </a:rPr>
-              <a:t>2</a:t>
-            </a:r>
-            <a:endParaRPr lang="en-US" sz="780" dirty="0"/>
-          </a:p>
-        </p:txBody>
-      </p:sp>
-      <p:sp>
-        <p:nvSpPr>
-          <p:cNvPr id="14" name="Text 12"/>
-          <p:cNvSpPr/>
-          <p:nvPr/>
-        </p:nvSpPr>
-        <p:spPr>
-          <a:xfrm>
-            <a:off x="1325880" y="1810512"/>
-            <a:ext cx="4480560" cy="109728"/>
-          </a:xfrm>
-          <a:prstGeom prst="rect">
-            <a:avLst/>
-          </a:prstGeom>
-          <a:noFill/>
-          <a:ln/>
-        </p:spPr>
-        <p:txBody>
-          <a:bodyPr wrap="square" lIns="0" tIns="0" rIns="0" bIns="0" rtlCol="0" anchor="ctr">
-            <a:normAutofit/>
-          </a:bodyPr>
-          <a:lstStyle/>
-          <a:p>
-            <a:pPr marL="0" indent="0">
-              <a:buNone/>
-            </a:pPr>
-            <a:r>
-              <a:rPr lang="en-US" sz="850" b="1" dirty="0">
-                <a:solidFill>
-                  <a:srgbClr val="475569"/>
-                </a:solidFill>
-              </a:rPr>
-              <a:t>SRS scope and stakeholder overview</a:t>
-            </a:r>
-            <a:endParaRPr lang="en-US" sz="850" dirty="0"/>
-          </a:p>
-        </p:txBody>
-      </p:sp>
-      <p:sp>
-        <p:nvSpPr>
-          <p:cNvPr id="15" name="Shape 13"/>
-          <p:cNvSpPr/>
-          <p:nvPr/>
-        </p:nvSpPr>
-        <p:spPr>
-          <a:xfrm>
-            <a:off x="777240" y="2240280"/>
-            <a:ext cx="5394960" cy="347472"/>
-          </a:xfrm>
-          <a:prstGeom prst="roundRect">
-            <a:avLst>
-              <a:gd name="adj" fmla="val 18421"/>
-            </a:avLst>
-          </a:prstGeom>
-          <a:solidFill>
-            <a:srgbClr val="FFFFFF"/>
-          </a:solidFill>
-          <a:ln w="12700">
-            <a:solidFill>
-              <a:srgbClr val="E4DED4"/>
-            </a:solidFill>
-            <a:prstDash val="solid"/>
-          </a:ln>
-        </p:spPr>
-      </p:sp>
-      <p:sp>
-        <p:nvSpPr>
-          <p:cNvPr id="16" name="Text 14"/>
-          <p:cNvSpPr/>
-          <p:nvPr/>
-        </p:nvSpPr>
-        <p:spPr>
-          <a:xfrm>
-            <a:off x="950976" y="2322576"/>
-            <a:ext cx="228600" cy="100584"/>
-          </a:xfrm>
-          <a:prstGeom prst="rect">
-            <a:avLst/>
-          </a:prstGeom>
-          <a:noFill/>
-          <a:ln/>
-        </p:spPr>
-        <p:txBody>
-          <a:bodyPr wrap="square" lIns="0" tIns="0" rIns="0" bIns="0" rtlCol="0" anchor="ctr">
-            <a:normAutofit/>
-          </a:bodyPr>
-          <a:lstStyle/>
-          <a:p>
-            <a:pPr marL="0" indent="0" algn="ctr">
-              <a:buNone/>
-            </a:pPr>
-            <a:r>
-              <a:rPr lang="en-US" sz="780" b="1" dirty="0">
-                <a:solidFill>
-                  <a:srgbClr val="F59E0B"/>
-                </a:solidFill>
-              </a:rPr>
-              <a:t>3</a:t>
-            </a:r>
-            <a:endParaRPr lang="en-US" sz="780" dirty="0"/>
-          </a:p>
-        </p:txBody>
-      </p:sp>
-      <p:sp>
-        <p:nvSpPr>
-          <p:cNvPr id="17" name="Text 15"/>
-          <p:cNvSpPr/>
-          <p:nvPr/>
-        </p:nvSpPr>
-        <p:spPr>
-          <a:xfrm>
-            <a:off x="1325880" y="2313432"/>
-            <a:ext cx="4480560" cy="109728"/>
-          </a:xfrm>
-          <a:prstGeom prst="rect">
-            <a:avLst/>
-          </a:prstGeom>
-          <a:noFill/>
-          <a:ln/>
-        </p:spPr>
-        <p:txBody>
-          <a:bodyPr wrap="square" lIns="0" tIns="0" rIns="0" bIns="0" rtlCol="0" anchor="ctr">
-            <a:normAutofit/>
-          </a:bodyPr>
-          <a:lstStyle/>
-          <a:p>
-            <a:pPr marL="0" indent="0">
-              <a:buNone/>
-            </a:pPr>
-            <a:r>
-              <a:rPr lang="en-US" sz="850" b="1" dirty="0">
-                <a:solidFill>
-                  <a:srgbClr val="475569"/>
-                </a:solidFill>
-              </a:rPr>
-              <a:t>Architecture + ERD + UML design models</a:t>
-            </a:r>
-            <a:endParaRPr lang="en-US" sz="850" dirty="0"/>
-          </a:p>
-        </p:txBody>
-      </p:sp>
-      <p:sp>
-        <p:nvSpPr>
-          <p:cNvPr id="18" name="Shape 16"/>
-          <p:cNvSpPr/>
-          <p:nvPr/>
-        </p:nvSpPr>
-        <p:spPr>
-          <a:xfrm>
-            <a:off x="777240" y="2743200"/>
-            <a:ext cx="5394960" cy="347472"/>
-          </a:xfrm>
-          <a:prstGeom prst="roundRect">
-            <a:avLst>
-              <a:gd name="adj" fmla="val 18421"/>
-            </a:avLst>
-          </a:prstGeom>
-          <a:solidFill>
-            <a:srgbClr val="FFF7ED"/>
-          </a:solidFill>
-          <a:ln w="12700">
-            <a:solidFill>
-              <a:srgbClr val="E4DED4"/>
-            </a:solidFill>
-            <a:prstDash val="solid"/>
-          </a:ln>
-        </p:spPr>
-      </p:sp>
-      <p:sp>
-        <p:nvSpPr>
-          <p:cNvPr id="19" name="Text 17"/>
-          <p:cNvSpPr/>
-          <p:nvPr/>
-        </p:nvSpPr>
-        <p:spPr>
-          <a:xfrm>
-            <a:off x="950976" y="2825496"/>
-            <a:ext cx="228600" cy="100584"/>
-          </a:xfrm>
-          <a:prstGeom prst="rect">
-            <a:avLst/>
-          </a:prstGeom>
-          <a:noFill/>
-          <a:ln/>
-        </p:spPr>
-        <p:txBody>
-          <a:bodyPr wrap="square" lIns="0" tIns="0" rIns="0" bIns="0" rtlCol="0" anchor="ctr">
-            <a:normAutofit/>
-          </a:bodyPr>
-          <a:lstStyle/>
-          <a:p>
-            <a:pPr marL="0" indent="0" algn="ctr">
-              <a:buNone/>
-            </a:pPr>
-            <a:r>
-              <a:rPr lang="en-US" sz="780" b="1" dirty="0">
-                <a:solidFill>
-                  <a:srgbClr val="F59E0B"/>
-                </a:solidFill>
-              </a:rPr>
-              <a:t>4</a:t>
-            </a:r>
-            <a:endParaRPr lang="en-US" sz="780" dirty="0"/>
-          </a:p>
-        </p:txBody>
-      </p:sp>
-      <p:sp>
-        <p:nvSpPr>
-          <p:cNvPr id="20" name="Text 18"/>
-          <p:cNvSpPr/>
-          <p:nvPr/>
-        </p:nvSpPr>
-        <p:spPr>
-          <a:xfrm>
-            <a:off x="1325880" y="2816352"/>
-            <a:ext cx="4480560" cy="109728"/>
-          </a:xfrm>
-          <a:prstGeom prst="rect">
-            <a:avLst/>
-          </a:prstGeom>
-          <a:noFill/>
-          <a:ln/>
-        </p:spPr>
-        <p:txBody>
-          <a:bodyPr wrap="square" lIns="0" tIns="0" rIns="0" bIns="0" rtlCol="0" anchor="ctr">
-            <a:normAutofit/>
-          </a:bodyPr>
-          <a:lstStyle/>
-          <a:p>
-            <a:pPr marL="0" indent="0">
-              <a:buNone/>
-            </a:pPr>
-            <a:r>
-              <a:rPr lang="en-US" sz="850" b="1" dirty="0">
-                <a:solidFill>
-                  <a:srgbClr val="475569"/>
-                </a:solidFill>
-              </a:rPr>
-              <a:t>Storefront demo: home → category → product</a:t>
-            </a:r>
-            <a:endParaRPr lang="en-US" sz="850" dirty="0"/>
-          </a:p>
-        </p:txBody>
-      </p:sp>
-      <p:sp>
-        <p:nvSpPr>
-          <p:cNvPr id="21" name="Shape 19"/>
-          <p:cNvSpPr/>
-          <p:nvPr/>
-        </p:nvSpPr>
-        <p:spPr>
-          <a:xfrm>
-            <a:off x="777240" y="3246120"/>
-            <a:ext cx="5394960" cy="347472"/>
-          </a:xfrm>
-          <a:prstGeom prst="roundRect">
-            <a:avLst>
-              <a:gd name="adj" fmla="val 18421"/>
-            </a:avLst>
-          </a:prstGeom>
-          <a:solidFill>
-            <a:srgbClr val="FFFFFF"/>
-          </a:solidFill>
-          <a:ln w="12700">
-            <a:solidFill>
-              <a:srgbClr val="E4DED4"/>
-            </a:solidFill>
-            <a:prstDash val="solid"/>
-          </a:ln>
-        </p:spPr>
-      </p:sp>
-      <p:sp>
-        <p:nvSpPr>
-          <p:cNvPr id="22" name="Text 20"/>
-          <p:cNvSpPr/>
-          <p:nvPr/>
-        </p:nvSpPr>
-        <p:spPr>
-          <a:xfrm>
-            <a:off x="950976" y="3328416"/>
-            <a:ext cx="228600" cy="100584"/>
-          </a:xfrm>
-          <a:prstGeom prst="rect">
-            <a:avLst/>
-          </a:prstGeom>
-          <a:noFill/>
-          <a:ln/>
-        </p:spPr>
-        <p:txBody>
-          <a:bodyPr wrap="square" lIns="0" tIns="0" rIns="0" bIns="0" rtlCol="0" anchor="ctr">
-            <a:normAutofit/>
-          </a:bodyPr>
-          <a:lstStyle/>
-          <a:p>
-            <a:pPr marL="0" indent="0" algn="ctr">
-              <a:buNone/>
-            </a:pPr>
-            <a:r>
-              <a:rPr lang="en-US" sz="780" b="1" dirty="0">
-                <a:solidFill>
-                  <a:srgbClr val="F59E0B"/>
-                </a:solidFill>
-              </a:rPr>
-              <a:t>5</a:t>
-            </a:r>
-            <a:endParaRPr lang="en-US" sz="780" dirty="0"/>
-          </a:p>
-        </p:txBody>
-      </p:sp>
-      <p:sp>
-        <p:nvSpPr>
-          <p:cNvPr id="23" name="Text 21"/>
-          <p:cNvSpPr/>
-          <p:nvPr/>
-        </p:nvSpPr>
-        <p:spPr>
-          <a:xfrm>
-            <a:off x="1325880" y="3319272"/>
-            <a:ext cx="4480560" cy="109728"/>
-          </a:xfrm>
-          <a:prstGeom prst="rect">
-            <a:avLst/>
-          </a:prstGeom>
-          <a:noFill/>
-          <a:ln/>
-        </p:spPr>
-        <p:txBody>
-          <a:bodyPr wrap="square" lIns="0" tIns="0" rIns="0" bIns="0" rtlCol="0" anchor="ctr">
-            <a:normAutofit/>
-          </a:bodyPr>
-          <a:lstStyle/>
-          <a:p>
-            <a:pPr marL="0" indent="0">
-              <a:buNone/>
-            </a:pPr>
-            <a:r>
-              <a:rPr lang="en-US" sz="850" b="1" dirty="0">
-                <a:solidFill>
-                  <a:srgbClr val="475569"/>
-                </a:solidFill>
-              </a:rPr>
-              <a:t>Cart demo: add/update/remove + persistence</a:t>
-            </a:r>
-            <a:endParaRPr lang="en-US" sz="850" dirty="0"/>
-          </a:p>
-        </p:txBody>
-      </p:sp>
-      <p:sp>
-        <p:nvSpPr>
-          <p:cNvPr id="24" name="Shape 22"/>
-          <p:cNvSpPr/>
-          <p:nvPr/>
-        </p:nvSpPr>
-        <p:spPr>
-          <a:xfrm>
-            <a:off x="777240" y="3749040"/>
-            <a:ext cx="5394960" cy="347472"/>
-          </a:xfrm>
-          <a:prstGeom prst="roundRect">
-            <a:avLst>
-              <a:gd name="adj" fmla="val 18421"/>
-            </a:avLst>
-          </a:prstGeom>
-          <a:solidFill>
-            <a:srgbClr val="FFF7ED"/>
-          </a:solidFill>
-          <a:ln w="12700">
-            <a:solidFill>
-              <a:srgbClr val="E4DED4"/>
-            </a:solidFill>
-            <a:prstDash val="solid"/>
-          </a:ln>
-        </p:spPr>
-      </p:sp>
-      <p:sp>
-        <p:nvSpPr>
-          <p:cNvPr id="25" name="Text 23"/>
-          <p:cNvSpPr/>
-          <p:nvPr/>
-        </p:nvSpPr>
-        <p:spPr>
-          <a:xfrm>
-            <a:off x="950976" y="3831336"/>
-            <a:ext cx="228600" cy="100584"/>
-          </a:xfrm>
-          <a:prstGeom prst="rect">
-            <a:avLst/>
-          </a:prstGeom>
-          <a:noFill/>
-          <a:ln/>
-        </p:spPr>
-        <p:txBody>
-          <a:bodyPr wrap="square" lIns="0" tIns="0" rIns="0" bIns="0" rtlCol="0" anchor="ctr">
-            <a:normAutofit/>
-          </a:bodyPr>
-          <a:lstStyle/>
-          <a:p>
-            <a:pPr marL="0" indent="0" algn="ctr">
-              <a:buNone/>
-            </a:pPr>
-            <a:r>
-              <a:rPr lang="en-US" sz="780" b="1" dirty="0">
-                <a:solidFill>
-                  <a:srgbClr val="F59E0B"/>
-                </a:solidFill>
-              </a:rPr>
-              <a:t>6</a:t>
-            </a:r>
-            <a:endParaRPr lang="en-US" sz="780" dirty="0"/>
-          </a:p>
-        </p:txBody>
-      </p:sp>
-      <p:sp>
-        <p:nvSpPr>
-          <p:cNvPr id="26" name="Text 24"/>
-          <p:cNvSpPr/>
-          <p:nvPr/>
-        </p:nvSpPr>
-        <p:spPr>
-          <a:xfrm>
-            <a:off x="1325880" y="3822192"/>
-            <a:ext cx="4480560" cy="109728"/>
-          </a:xfrm>
-          <a:prstGeom prst="rect">
-            <a:avLst/>
-          </a:prstGeom>
-          <a:noFill/>
-          <a:ln/>
-        </p:spPr>
-        <p:txBody>
-          <a:bodyPr wrap="square" lIns="0" tIns="0" rIns="0" bIns="0" rtlCol="0" anchor="ctr">
-            <a:normAutofit/>
-          </a:bodyPr>
-          <a:lstStyle/>
-          <a:p>
-            <a:pPr marL="0" indent="0">
-              <a:buNone/>
-            </a:pPr>
-            <a:r>
-              <a:rPr lang="en-US" sz="850" b="1" dirty="0">
-                <a:solidFill>
-                  <a:srgbClr val="475569"/>
-                </a:solidFill>
-              </a:rPr>
-              <a:t>Authentication and checkout order submission</a:t>
-            </a:r>
-            <a:endParaRPr lang="en-US" sz="850" dirty="0"/>
-          </a:p>
-        </p:txBody>
-      </p:sp>
-      <p:sp>
-        <p:nvSpPr>
-          <p:cNvPr id="27" name="Shape 25"/>
-          <p:cNvSpPr/>
-          <p:nvPr/>
-        </p:nvSpPr>
-        <p:spPr>
-          <a:xfrm>
-            <a:off x="777240" y="4251960"/>
-            <a:ext cx="5394960" cy="347472"/>
-          </a:xfrm>
-          <a:prstGeom prst="roundRect">
-            <a:avLst>
-              <a:gd name="adj" fmla="val 18421"/>
-            </a:avLst>
-          </a:prstGeom>
-          <a:solidFill>
-            <a:srgbClr val="FFFFFF"/>
-          </a:solidFill>
-          <a:ln w="12700">
-            <a:solidFill>
-              <a:srgbClr val="E4DED4"/>
-            </a:solidFill>
-            <a:prstDash val="solid"/>
-          </a:ln>
-        </p:spPr>
-      </p:sp>
-      <p:sp>
-        <p:nvSpPr>
-          <p:cNvPr id="28" name="Text 26"/>
-          <p:cNvSpPr/>
-          <p:nvPr/>
-        </p:nvSpPr>
-        <p:spPr>
-          <a:xfrm>
-            <a:off x="950976" y="4334256"/>
-            <a:ext cx="228600" cy="100584"/>
-          </a:xfrm>
-          <a:prstGeom prst="rect">
-            <a:avLst/>
-          </a:prstGeom>
-          <a:noFill/>
-          <a:ln/>
-        </p:spPr>
-        <p:txBody>
-          <a:bodyPr wrap="square" lIns="0" tIns="0" rIns="0" bIns="0" rtlCol="0" anchor="ctr">
-            <a:normAutofit/>
-          </a:bodyPr>
-          <a:lstStyle/>
-          <a:p>
-            <a:pPr marL="0" indent="0" algn="ctr">
-              <a:buNone/>
-            </a:pPr>
-            <a:r>
-              <a:rPr lang="en-US" sz="780" b="1" dirty="0">
-                <a:solidFill>
-                  <a:srgbClr val="F59E0B"/>
-                </a:solidFill>
-              </a:rPr>
-              <a:t>7</a:t>
-            </a:r>
-            <a:endParaRPr lang="en-US" sz="780" dirty="0"/>
-          </a:p>
-        </p:txBody>
-      </p:sp>
-      <p:sp>
-        <p:nvSpPr>
-          <p:cNvPr id="29" name="Text 27"/>
-          <p:cNvSpPr/>
-          <p:nvPr/>
-        </p:nvSpPr>
-        <p:spPr>
-          <a:xfrm>
-            <a:off x="1325880" y="4325112"/>
-            <a:ext cx="4480560" cy="109728"/>
-          </a:xfrm>
-          <a:prstGeom prst="rect">
-            <a:avLst/>
-          </a:prstGeom>
-          <a:noFill/>
-          <a:ln/>
-        </p:spPr>
-        <p:txBody>
-          <a:bodyPr wrap="square" lIns="0" tIns="0" rIns="0" bIns="0" rtlCol="0" anchor="ctr">
-            <a:normAutofit/>
-          </a:bodyPr>
-          <a:lstStyle/>
-          <a:p>
-            <a:pPr marL="0" indent="0">
-              <a:buNone/>
-            </a:pPr>
-            <a:r>
-              <a:rPr lang="en-US" sz="850" b="1" dirty="0">
-                <a:solidFill>
-                  <a:srgbClr val="475569"/>
-                </a:solidFill>
-              </a:rPr>
-              <a:t>Admin dashboard: stats, products, orders</a:t>
-            </a:r>
-            <a:endParaRPr lang="en-US" sz="850" dirty="0"/>
-          </a:p>
-        </p:txBody>
-      </p:sp>
-      <p:sp>
-        <p:nvSpPr>
-          <p:cNvPr id="30" name="Shape 28"/>
-          <p:cNvSpPr/>
-          <p:nvPr/>
-        </p:nvSpPr>
-        <p:spPr>
-          <a:xfrm>
-            <a:off x="777240" y="4754880"/>
-            <a:ext cx="5394960" cy="347472"/>
-          </a:xfrm>
-          <a:prstGeom prst="roundRect">
-            <a:avLst>
-              <a:gd name="adj" fmla="val 18421"/>
-            </a:avLst>
-          </a:prstGeom>
-          <a:solidFill>
-            <a:srgbClr val="FFF7ED"/>
-          </a:solidFill>
-          <a:ln w="12700">
-            <a:solidFill>
-              <a:srgbClr val="E4DED4"/>
-            </a:solidFill>
-            <a:prstDash val="solid"/>
-          </a:ln>
-        </p:spPr>
-      </p:sp>
-      <p:sp>
-        <p:nvSpPr>
-          <p:cNvPr id="31" name="Text 29"/>
-          <p:cNvSpPr/>
-          <p:nvPr/>
-        </p:nvSpPr>
-        <p:spPr>
-          <a:xfrm>
-            <a:off x="950976" y="4837176"/>
-            <a:ext cx="228600" cy="100584"/>
-          </a:xfrm>
-          <a:prstGeom prst="rect">
-            <a:avLst/>
-          </a:prstGeom>
-          <a:noFill/>
-          <a:ln/>
-        </p:spPr>
-        <p:txBody>
-          <a:bodyPr wrap="square" lIns="0" tIns="0" rIns="0" bIns="0" rtlCol="0" anchor="ctr">
-            <a:normAutofit/>
-          </a:bodyPr>
-          <a:lstStyle/>
-          <a:p>
-            <a:pPr marL="0" indent="0" algn="ctr">
-              <a:buNone/>
-            </a:pPr>
-            <a:r>
-              <a:rPr lang="en-US" sz="780" b="1" dirty="0">
-                <a:solidFill>
-                  <a:srgbClr val="F59E0B"/>
-                </a:solidFill>
-              </a:rPr>
-              <a:t>8</a:t>
-            </a:r>
-            <a:endParaRPr lang="en-US" sz="780" dirty="0"/>
-          </a:p>
-        </p:txBody>
-      </p:sp>
-      <p:sp>
-        <p:nvSpPr>
-          <p:cNvPr id="32" name="Text 30"/>
-          <p:cNvSpPr/>
-          <p:nvPr/>
-        </p:nvSpPr>
-        <p:spPr>
-          <a:xfrm>
-            <a:off x="1325880" y="4828032"/>
-            <a:ext cx="4480560" cy="109728"/>
-          </a:xfrm>
-          <a:prstGeom prst="rect">
-            <a:avLst/>
-          </a:prstGeom>
-          <a:noFill/>
-          <a:ln/>
-        </p:spPr>
-        <p:txBody>
-          <a:bodyPr wrap="square" lIns="0" tIns="0" rIns="0" bIns="0" rtlCol="0" anchor="ctr">
-            <a:normAutofit/>
-          </a:bodyPr>
-          <a:lstStyle/>
-          <a:p>
-            <a:pPr marL="0" indent="0">
-              <a:buNone/>
-            </a:pPr>
-            <a:r>
-              <a:rPr lang="en-US" sz="850" b="1" dirty="0">
-                <a:solidFill>
-                  <a:srgbClr val="475569"/>
-                </a:solidFill>
-              </a:rPr>
-              <a:t>QA/Jira/GitHub evidence and final conclusion</a:t>
-            </a:r>
-            <a:endParaRPr lang="en-US" sz="850" dirty="0"/>
-          </a:p>
-        </p:txBody>
-      </p:sp>
-      <p:sp>
-        <p:nvSpPr>
-          <p:cNvPr id="33" name="Shape 31"/>
-          <p:cNvSpPr/>
-          <p:nvPr/>
-        </p:nvSpPr>
-        <p:spPr>
-          <a:xfrm>
-            <a:off x="6766560" y="1234440"/>
-            <a:ext cx="4343400" cy="2834640"/>
-          </a:xfrm>
-          <a:prstGeom prst="roundRect">
-            <a:avLst>
-              <a:gd name="adj" fmla="val 3871"/>
-            </a:avLst>
-          </a:prstGeom>
-          <a:solidFill>
-            <a:srgbClr val="0E0E0E"/>
-          </a:solidFill>
-          <a:ln w="12700">
-            <a:solidFill>
-              <a:srgbClr val="0E0E0E">
-                <a:alpha val="0"/>
-              </a:srgbClr>
-            </a:solidFill>
-            <a:prstDash val="solid"/>
-          </a:ln>
-        </p:spPr>
-      </p:sp>
-      <p:sp>
-        <p:nvSpPr>
-          <p:cNvPr id="34" name="Text 32"/>
-          <p:cNvSpPr/>
-          <p:nvPr/>
-        </p:nvSpPr>
-        <p:spPr>
-          <a:xfrm>
-            <a:off x="7086600" y="1572768"/>
-            <a:ext cx="2743200" cy="237744"/>
-          </a:xfrm>
-          <a:prstGeom prst="rect">
-            <a:avLst/>
-          </a:prstGeom>
-          <a:noFill/>
-          <a:ln/>
-        </p:spPr>
-        <p:txBody>
-          <a:bodyPr wrap="square" lIns="0" tIns="0" rIns="0" bIns="0" rtlCol="0" anchor="ctr">
-            <a:normAutofit/>
-          </a:bodyPr>
-          <a:lstStyle/>
-          <a:p>
-            <a:pPr marL="0" indent="0">
-              <a:buNone/>
-            </a:pPr>
-            <a:r>
-              <a:rPr lang="en-US" sz="1700" b="1" dirty="0">
-                <a:solidFill>
-                  <a:srgbClr val="FFFFFF"/>
-                </a:solidFill>
-              </a:rPr>
-              <a:t>Team Speaking Flow</a:t>
-            </a:r>
-            <a:endParaRPr lang="en-US" sz="1700" dirty="0"/>
-          </a:p>
-        </p:txBody>
-      </p:sp>
-      <p:sp>
-        <p:nvSpPr>
-          <p:cNvPr id="35" name="Text 33"/>
-          <p:cNvSpPr/>
-          <p:nvPr/>
-        </p:nvSpPr>
-        <p:spPr>
-          <a:xfrm>
-            <a:off x="7086600" y="2029968"/>
-            <a:ext cx="3337560" cy="914400"/>
-          </a:xfrm>
-          <a:prstGeom prst="rect">
-            <a:avLst/>
-          </a:prstGeom>
-          <a:noFill/>
-          <a:ln/>
-        </p:spPr>
-        <p:txBody>
-          <a:bodyPr wrap="square" lIns="254" tIns="254" rIns="254" bIns="254" rtlCol="0" anchor="ctr">
-            <a:normAutofit/>
-          </a:bodyPr>
-          <a:lstStyle/>
-          <a:p>
-            <a:pPr marL="0" indent="0">
-              <a:buNone/>
-            </a:pPr>
-            <a:r>
-              <a:rPr lang="en-US" sz="1020" dirty="0">
-                <a:solidFill>
-                  <a:srgbClr val="FFFFFF"/>
-                </a:solidFill>
-              </a:rPr>
-              <a:t>• Baraa: intro, Agile/Jira, final delivery
-• Hamed: backend, database, QA support
-• Yahya: UI, diagrams, admin/demo features</a:t>
-            </a:r>
-            <a:endParaRPr lang="en-US" sz="1020" dirty="0"/>
-          </a:p>
-        </p:txBody>
-      </p:sp>
-      <p:sp>
-        <p:nvSpPr>
-          <p:cNvPr id="36" name="Shape 34"/>
-          <p:cNvSpPr/>
-          <p:nvPr/>
-        </p:nvSpPr>
-        <p:spPr>
-          <a:xfrm>
-            <a:off x="6766560" y="4462272"/>
-            <a:ext cx="4343400" cy="530352"/>
-          </a:xfrm>
-          <a:prstGeom prst="roundRect">
-            <a:avLst>
-              <a:gd name="adj" fmla="val 20690"/>
-            </a:avLst>
-          </a:prstGeom>
-          <a:solidFill>
-            <a:srgbClr val="ECFDF5"/>
-          </a:solidFill>
-          <a:ln w="12700">
-            <a:solidFill>
-              <a:srgbClr val="A7F3D0"/>
-            </a:solidFill>
-            <a:prstDash val="solid"/>
-          </a:ln>
-        </p:spPr>
-      </p:sp>
-      <p:sp>
-        <p:nvSpPr>
-          <p:cNvPr id="37" name="Text 35"/>
-          <p:cNvSpPr/>
-          <p:nvPr/>
-        </p:nvSpPr>
-        <p:spPr>
-          <a:xfrm>
-            <a:off x="7022592" y="4636008"/>
-            <a:ext cx="3822192" cy="118872"/>
-          </a:xfrm>
-          <a:prstGeom prst="rect">
-            <a:avLst/>
-          </a:prstGeom>
-          <a:noFill/>
-          <a:ln/>
-        </p:spPr>
-        <p:txBody>
-          <a:bodyPr wrap="square" lIns="0" tIns="0" rIns="0" bIns="0" rtlCol="0" anchor="ctr">
-            <a:normAutofit/>
-          </a:bodyPr>
-          <a:lstStyle/>
-          <a:p>
-            <a:pPr marL="0" indent="0" algn="ctr">
-              <a:buNone/>
-            </a:pPr>
-            <a:r>
-              <a:rPr lang="en-US" sz="850" b="1" dirty="0">
-                <a:solidFill>
-                  <a:srgbClr val="065F46"/>
-                </a:solidFill>
-              </a:rPr>
-              <a:t>Record using seeded data and avoid deleting existing products during the live demo.</a:t>
-            </a:r>
-            <a:endParaRPr lang="en-US" sz="850" dirty="0"/>
-          </a:p>
-        </p:txBody>
-      </p:sp>
-      <p:sp>
-        <p:nvSpPr>
-          <p:cNvPr id="38" name="Text 36"/>
-          <p:cNvSpPr/>
-          <p:nvPr/>
-        </p:nvSpPr>
-        <p:spPr>
-          <a:xfrm>
-            <a:off x="530352" y="6565392"/>
-            <a:ext cx="4389120" cy="137160"/>
-          </a:xfrm>
-          <a:prstGeom prst="rect">
-            <a:avLst/>
-          </a:prstGeom>
-          <a:noFill/>
-          <a:ln/>
-        </p:spPr>
-        <p:txBody>
-          <a:bodyPr wrap="square" lIns="0" tIns="0" rIns="0" bIns="0" rtlCol="0" anchor="ctr">
-            <a:normAutofit/>
-          </a:bodyPr>
-          <a:lstStyle/>
-          <a:p>
-            <a:pPr marL="0" indent="0">
-              <a:buNone/>
-            </a:pPr>
-            <a:r>
-              <a:rPr lang="en-US" sz="660" dirty="0">
-                <a:solidFill>
-                  <a:srgbClr val="9CA3AF"/>
-                </a:solidFill>
-              </a:rPr>
-              <a:t>YallaMarket  •  Software Engineering Final Presentation</a:t>
-            </a:r>
-            <a:endParaRPr lang="en-US" sz="660" dirty="0"/>
-          </a:p>
-        </p:txBody>
-      </p:sp>
-    </p:spTree>
-  </p:cSld>
-  <p:clrMapOvr>
-    <a:masterClrMapping/>
-  </p:clrMapOvr>
-</p:sld>
-</file>
-
-<file path=ppt/slides/slide16.xml><?xml version="1.0" encoding="utf-8"?>
+<file path=ppt/slides/slide18.xml><?xml version="1.0" encoding="utf-8"?>
 <p:sld xmlns:a="http://schemas.openxmlformats.org/drawingml/2006/main" xmlns:r="http://schemas.openxmlformats.org/officeDocument/2006/relationships" xmlns:p="http://schemas.openxmlformats.org/presentationml/2006/main">
   <p:cSld name="Slide 16">
     <p:bg>
@@ -7907,58 +7725,6 @@
       </p:grpSpPr>
       <p:sp>
         <p:nvSpPr>
-          <p:cNvPr id="2" name="Shape 0"/>
-          <p:cNvSpPr/>
-          <p:nvPr/>
-        </p:nvSpPr>
-        <p:spPr>
-          <a:xfrm>
-            <a:off x="0" y="0"/>
-            <a:ext cx="12191695" cy="6858000"/>
-          </a:xfrm>
-          <a:prstGeom prst="rect">
-            <a:avLst/>
-          </a:prstGeom>
-          <a:solidFill>
-            <a:srgbClr val="0E0E0E"/>
-          </a:solidFill>
-          <a:ln w="12700">
-            <a:solidFill>
-              <a:srgbClr val="0E0E0E">
-                <a:alpha val="0"/>
-              </a:srgbClr>
-            </a:solidFill>
-            <a:prstDash val="solid"/>
-          </a:ln>
-        </p:spPr>
-      </p:sp>
-      <p:sp>
-        <p:nvSpPr>
-          <p:cNvPr id="3" name="Shape 1"/>
-          <p:cNvSpPr/>
-          <p:nvPr/>
-        </p:nvSpPr>
-        <p:spPr>
-          <a:xfrm>
-            <a:off x="7680960" y="-1371600"/>
-            <a:ext cx="5486400" cy="5486400"/>
-          </a:xfrm>
-          <a:prstGeom prst="arc">
-            <a:avLst/>
-          </a:prstGeom>
-          <a:noFill/>
-          <a:ln w="25400">
-            <a:solidFill>
-              <a:srgbClr val="F59E0B">
-                <a:alpha val="65000"/>
-              </a:srgbClr>
-            </a:solidFill>
-            <a:prstDash val="solid"/>
-          </a:ln>
-        </p:spPr>
-      </p:sp>
-      <p:sp>
-        <p:nvSpPr>
           <p:cNvPr id="4" name="Text 2"/>
           <p:cNvSpPr/>
           <p:nvPr/>
@@ -7976,7 +7742,7 @@
         </p:spPr>
         <p:txBody>
           <a:bodyPr wrap="square" lIns="0" tIns="0" rIns="0" bIns="0" rtlCol="0" anchor="ctr">
-            <a:normAutofit/>
+            <a:normAutofit fontScale="92500" lnSpcReduction="10000"/>
           </a:bodyPr>
           <a:lstStyle/>
           <a:p>
@@ -7992,7 +7758,7 @@
                 <a:ea typeface="Aptos Display" pitchFamily="34" charset="-122"/>
                 <a:cs typeface="Aptos Display" pitchFamily="34" charset="-120"/>
               </a:rPr>
-              <a:t>Final Submission Ready</a:t>
+              <a:t>Final Submission</a:t>
             </a:r>
             <a:endParaRPr lang="en-US" sz="3800" dirty="0"/>
           </a:p>
@@ -8017,7 +7783,7 @@
         </p:spPr>
         <p:txBody>
           <a:bodyPr wrap="square" lIns="0" tIns="0" rIns="0" bIns="0" rtlCol="0" anchor="ctr">
-            <a:normAutofit/>
+            <a:normAutofit fontScale="92500" lnSpcReduction="20000"/>
           </a:bodyPr>
           <a:lstStyle/>
           <a:p>
@@ -8055,7 +7821,7 @@
         </p:spPr>
         <p:txBody>
           <a:bodyPr wrap="square" lIns="0" tIns="0" rIns="0" bIns="0" rtlCol="0" anchor="ctr">
-            <a:normAutofit/>
+            <a:normAutofit fontScale="92500" lnSpcReduction="20000"/>
           </a:bodyPr>
           <a:lstStyle/>
           <a:p>
@@ -8093,7 +7859,7 @@
         </p:spPr>
         <p:txBody>
           <a:bodyPr wrap="square" lIns="0" tIns="0" rIns="0" bIns="0" rtlCol="0" anchor="ctr">
-            <a:normAutofit/>
+            <a:normAutofit fontScale="92500" lnSpcReduction="20000"/>
           </a:bodyPr>
           <a:lstStyle/>
           <a:p>
@@ -8131,7 +7897,7 @@
         </p:spPr>
         <p:txBody>
           <a:bodyPr wrap="square" lIns="0" tIns="0" rIns="0" bIns="0" rtlCol="0" anchor="ctr">
-            <a:normAutofit/>
+            <a:normAutofit fontScale="92500" lnSpcReduction="20000"/>
           </a:bodyPr>
           <a:lstStyle/>
           <a:p>
@@ -8169,7 +7935,7 @@
         </p:spPr>
         <p:txBody>
           <a:bodyPr wrap="square" lIns="0" tIns="0" rIns="0" bIns="0" rtlCol="0" anchor="ctr">
-            <a:normAutofit/>
+            <a:normAutofit fontScale="92500" lnSpcReduction="20000"/>
           </a:bodyPr>
           <a:lstStyle/>
           <a:p>
@@ -8207,7 +7973,7 @@
         </p:spPr>
         <p:txBody>
           <a:bodyPr wrap="square" lIns="0" tIns="0" rIns="0" bIns="0" rtlCol="0" anchor="ctr">
-            <a:normAutofit/>
+            <a:normAutofit fontScale="92500" lnSpcReduction="20000"/>
           </a:bodyPr>
           <a:lstStyle/>
           <a:p>
@@ -8245,7 +8011,7 @@
         </p:spPr>
         <p:txBody>
           <a:bodyPr wrap="square" lIns="0" tIns="0" rIns="0" bIns="0" rtlCol="0" anchor="ctr">
-            <a:normAutofit/>
+            <a:normAutofit fontScale="92500" lnSpcReduction="20000"/>
           </a:bodyPr>
           <a:lstStyle/>
           <a:p>
@@ -8283,7 +8049,7 @@
         </p:spPr>
         <p:txBody>
           <a:bodyPr wrap="square" lIns="0" tIns="0" rIns="0" bIns="0" rtlCol="0" anchor="ctr">
-            <a:normAutofit/>
+            <a:normAutofit fontScale="92500" lnSpcReduction="20000"/>
           </a:bodyPr>
           <a:lstStyle/>
           <a:p>
@@ -8321,7 +8087,7 @@
         </p:spPr>
         <p:txBody>
           <a:bodyPr wrap="square" lIns="0" tIns="0" rIns="0" bIns="0" rtlCol="0" anchor="ctr">
-            <a:normAutofit/>
+            <a:normAutofit fontScale="92500" lnSpcReduction="20000"/>
           </a:bodyPr>
           <a:lstStyle/>
           <a:p>
@@ -8359,7 +8125,7 @@
         </p:spPr>
         <p:txBody>
           <a:bodyPr wrap="square" lIns="0" tIns="0" rIns="0" bIns="0" rtlCol="0" anchor="ctr">
-            <a:normAutofit/>
+            <a:normAutofit fontScale="92500" lnSpcReduction="20000"/>
           </a:bodyPr>
           <a:lstStyle/>
           <a:p>
@@ -8397,7 +8163,7 @@
         </p:spPr>
         <p:txBody>
           <a:bodyPr wrap="square" lIns="0" tIns="0" rIns="0" bIns="0" rtlCol="0" anchor="ctr">
-            <a:normAutofit/>
+            <a:normAutofit fontScale="92500" lnSpcReduction="20000"/>
           </a:bodyPr>
           <a:lstStyle/>
           <a:p>
@@ -8435,7 +8201,7 @@
         </p:spPr>
         <p:txBody>
           <a:bodyPr wrap="square" lIns="0" tIns="0" rIns="0" bIns="0" rtlCol="0" anchor="ctr">
-            <a:normAutofit/>
+            <a:normAutofit fontScale="92500" lnSpcReduction="20000"/>
           </a:bodyPr>
           <a:lstStyle/>
           <a:p>
@@ -8473,7 +8239,7 @@
         </p:spPr>
         <p:txBody>
           <a:bodyPr wrap="square" lIns="0" tIns="0" rIns="0" bIns="0" rtlCol="0" anchor="ctr">
-            <a:normAutofit/>
+            <a:normAutofit fontScale="92500" lnSpcReduction="20000"/>
           </a:bodyPr>
           <a:lstStyle/>
           <a:p>
@@ -8511,20 +8277,25 @@
         </p:spPr>
         <p:txBody>
           <a:bodyPr wrap="square" lIns="0" tIns="0" rIns="0" bIns="0" rtlCol="0" anchor="ctr">
-            <a:normAutofit/>
-          </a:bodyPr>
-          <a:lstStyle/>
-          <a:p>
-            <a:pPr marL="0" indent="0">
-              <a:buNone/>
-            </a:pPr>
+            <a:normAutofit fontScale="85000" lnSpcReduction="20000"/>
+          </a:bodyPr>
+          <a:lstStyle/>
+          <a:p>
             <a:r>
               <a:rPr lang="en-US" sz="2400" b="1" dirty="0">
                 <a:solidFill>
                   <a:srgbClr val="F59E0B"/>
                 </a:solidFill>
               </a:rPr>
-              <a:t>Thank You</a:t>
+              <a:t>Thank You </a:t>
+            </a:r>
+            <a:r>
+              <a:rPr lang="en-US" sz="2400" b="1" dirty="0" err="1">
+                <a:solidFill>
+                  <a:srgbClr val="F59E0B"/>
+                </a:solidFill>
+              </a:rPr>
+              <a:t>Dr.Firas</a:t>
             </a:r>
             <a:endParaRPr lang="en-US" sz="2400" dirty="0"/>
           </a:p>
@@ -8562,7 +8333,15 @@
                   <a:srgbClr val="E5E7EB"/>
                 </a:solidFill>
               </a:rPr>
-              <a:t>Baraa Masri • Hamed Bizreh • Yahya Ziyoud</a:t>
+              <a:t>Baraa Masri • Hamed Bizreh • Yahya </a:t>
+            </a:r>
+            <a:r>
+              <a:rPr lang="en-US" sz="950" dirty="0" err="1">
+                <a:solidFill>
+                  <a:srgbClr val="E5E7EB"/>
+                </a:solidFill>
+              </a:rPr>
+              <a:t>Zyoud</a:t>
             </a:r>
             <a:endParaRPr lang="en-US" sz="950" dirty="0"/>
           </a:p>
@@ -8641,83 +8420,6 @@
       </p:grpSpPr>
       <p:sp>
         <p:nvSpPr>
-          <p:cNvPr id="2" name="Shape 0"/>
-          <p:cNvSpPr/>
-          <p:nvPr/>
-        </p:nvSpPr>
-        <p:spPr>
-          <a:xfrm>
-            <a:off x="0" y="0"/>
-            <a:ext cx="12191695" cy="6858000"/>
-          </a:xfrm>
-          <a:prstGeom prst="rect">
-            <a:avLst/>
-          </a:prstGeom>
-          <a:solidFill>
-            <a:srgbClr val="FBFAF8"/>
-          </a:solidFill>
-          <a:ln w="12700">
-            <a:solidFill>
-              <a:srgbClr val="FBFAF8">
-                <a:alpha val="0"/>
-              </a:srgbClr>
-            </a:solidFill>
-            <a:prstDash val="solid"/>
-          </a:ln>
-        </p:spPr>
-      </p:sp>
-      <p:sp>
-        <p:nvSpPr>
-          <p:cNvPr id="3" name="Shape 1"/>
-          <p:cNvSpPr/>
-          <p:nvPr/>
-        </p:nvSpPr>
-        <p:spPr>
-          <a:xfrm>
-            <a:off x="8869680" y="-1051560"/>
-            <a:ext cx="4297680" cy="4297680"/>
-          </a:xfrm>
-          <a:prstGeom prst="arc">
-            <a:avLst/>
-          </a:prstGeom>
-          <a:noFill/>
-          <a:ln w="20320">
-            <a:solidFill>
-              <a:srgbClr val="FCD9A1">
-                <a:alpha val="75000"/>
-              </a:srgbClr>
-            </a:solidFill>
-            <a:prstDash val="solid"/>
-          </a:ln>
-        </p:spPr>
-      </p:sp>
-      <p:sp>
-        <p:nvSpPr>
-          <p:cNvPr id="4" name="Shape 2"/>
-          <p:cNvSpPr/>
-          <p:nvPr/>
-        </p:nvSpPr>
-        <p:spPr>
-          <a:xfrm>
-            <a:off x="-1097280" y="4800600"/>
-            <a:ext cx="2926080" cy="2926080"/>
-          </a:xfrm>
-          <a:prstGeom prst="arc">
-            <a:avLst/>
-          </a:prstGeom>
-          <a:noFill/>
-          <a:ln w="15240">
-            <a:solidFill>
-              <a:srgbClr val="FCD9A1">
-                <a:alpha val="55000"/>
-              </a:srgbClr>
-            </a:solidFill>
-            <a:prstDash val="solid"/>
-          </a:ln>
-        </p:spPr>
-      </p:sp>
-      <p:sp>
-        <p:nvSpPr>
           <p:cNvPr id="5" name="Text 3"/>
           <p:cNvSpPr/>
           <p:nvPr/>
@@ -8735,7 +8437,7 @@
         </p:spPr>
         <p:txBody>
           <a:bodyPr wrap="square" lIns="0" tIns="0" rIns="0" bIns="0" rtlCol="0" anchor="ctr">
-            <a:normAutofit/>
+            <a:normAutofit lnSpcReduction="10000"/>
           </a:bodyPr>
           <a:lstStyle/>
           <a:p>
@@ -8875,7 +8577,7 @@
         </p:spPr>
         <p:txBody>
           <a:bodyPr wrap="square" lIns="0" tIns="0" rIns="0" bIns="0" rtlCol="0" anchor="ctr">
-            <a:normAutofit/>
+            <a:normAutofit fontScale="85000" lnSpcReduction="20000"/>
           </a:bodyPr>
           <a:lstStyle/>
           <a:p>
@@ -8921,7 +8623,7 @@
               <a:buNone/>
             </a:pPr>
             <a:r>
-              <a:rPr lang="en-US" sz="1050" dirty="0">
+              <a:rPr lang="en-US" sz="1200" dirty="0">
                 <a:solidFill>
                   <a:srgbClr val="475569"/>
                 </a:solidFill>
@@ -8931,7 +8633,7 @@
 • Authentication: JWT-based login and protected admin endpoints
 • Process evidence: SRS, UML/ERD, QA report, Jira sprints, GitHub collaboration</a:t>
             </a:r>
-            <a:endParaRPr lang="en-US" sz="1050" dirty="0"/>
+            <a:endParaRPr lang="en-US" sz="1200" dirty="0"/>
           </a:p>
         </p:txBody>
       </p:sp>
@@ -8981,7 +8683,7 @@
         </p:spPr>
         <p:txBody>
           <a:bodyPr wrap="square" lIns="0" tIns="0" rIns="0" bIns="0" rtlCol="0" anchor="ctr">
-            <a:normAutofit/>
+            <a:normAutofit lnSpcReduction="10000"/>
           </a:bodyPr>
           <a:lstStyle/>
           <a:p>
@@ -9084,7 +8786,7 @@
         </p:spPr>
         <p:txBody>
           <a:bodyPr wrap="square" lIns="0" tIns="0" rIns="0" bIns="0" rtlCol="0" anchor="ctr">
-            <a:normAutofit/>
+            <a:normAutofit lnSpcReduction="10000"/>
           </a:bodyPr>
           <a:lstStyle/>
           <a:p>
@@ -9187,7 +8889,7 @@
         </p:spPr>
         <p:txBody>
           <a:bodyPr wrap="square" lIns="0" tIns="0" rIns="0" bIns="0" rtlCol="0" anchor="ctr">
-            <a:normAutofit/>
+            <a:normAutofit lnSpcReduction="10000"/>
           </a:bodyPr>
           <a:lstStyle/>
           <a:p>
@@ -9200,7 +8902,7 @@
                   <a:srgbClr val="2563EB"/>
                 </a:solidFill>
               </a:rPr>
-              <a:t>46</a:t>
+              <a:t>50</a:t>
             </a:r>
             <a:endParaRPr lang="en-US" sz="1800" dirty="0"/>
           </a:p>
@@ -9290,7 +8992,7 @@
         </p:spPr>
         <p:txBody>
           <a:bodyPr wrap="square" lIns="0" tIns="0" rIns="0" bIns="0" rtlCol="0" anchor="ctr">
-            <a:normAutofit/>
+            <a:normAutofit lnSpcReduction="10000"/>
           </a:bodyPr>
           <a:lstStyle/>
           <a:p>
@@ -9492,8 +9194,8 @@
         </p:blipFill>
         <p:spPr>
           <a:xfrm>
-            <a:off x="7479792" y="1591056"/>
-            <a:ext cx="3739896" cy="3831336"/>
+            <a:off x="7406640" y="1499616"/>
+            <a:ext cx="3877056" cy="4133088"/>
           </a:xfrm>
           <a:prstGeom prst="rect">
             <a:avLst/>
@@ -9611,83 +9313,6 @@
       </p:grpSpPr>
       <p:sp>
         <p:nvSpPr>
-          <p:cNvPr id="2" name="Shape 0"/>
-          <p:cNvSpPr/>
-          <p:nvPr/>
-        </p:nvSpPr>
-        <p:spPr>
-          <a:xfrm>
-            <a:off x="0" y="0"/>
-            <a:ext cx="12191695" cy="6858000"/>
-          </a:xfrm>
-          <a:prstGeom prst="rect">
-            <a:avLst/>
-          </a:prstGeom>
-          <a:solidFill>
-            <a:srgbClr val="FBFAF8"/>
-          </a:solidFill>
-          <a:ln w="12700">
-            <a:solidFill>
-              <a:srgbClr val="FBFAF8">
-                <a:alpha val="0"/>
-              </a:srgbClr>
-            </a:solidFill>
-            <a:prstDash val="solid"/>
-          </a:ln>
-        </p:spPr>
-      </p:sp>
-      <p:sp>
-        <p:nvSpPr>
-          <p:cNvPr id="3" name="Shape 1"/>
-          <p:cNvSpPr/>
-          <p:nvPr/>
-        </p:nvSpPr>
-        <p:spPr>
-          <a:xfrm>
-            <a:off x="8869680" y="-1051560"/>
-            <a:ext cx="4297680" cy="4297680"/>
-          </a:xfrm>
-          <a:prstGeom prst="arc">
-            <a:avLst/>
-          </a:prstGeom>
-          <a:noFill/>
-          <a:ln w="20320">
-            <a:solidFill>
-              <a:srgbClr val="FCD9A1">
-                <a:alpha val="75000"/>
-              </a:srgbClr>
-            </a:solidFill>
-            <a:prstDash val="solid"/>
-          </a:ln>
-        </p:spPr>
-      </p:sp>
-      <p:sp>
-        <p:nvSpPr>
-          <p:cNvPr id="4" name="Shape 2"/>
-          <p:cNvSpPr/>
-          <p:nvPr/>
-        </p:nvSpPr>
-        <p:spPr>
-          <a:xfrm>
-            <a:off x="-1097280" y="4800600"/>
-            <a:ext cx="2926080" cy="2926080"/>
-          </a:xfrm>
-          <a:prstGeom prst="arc">
-            <a:avLst/>
-          </a:prstGeom>
-          <a:noFill/>
-          <a:ln w="15240">
-            <a:solidFill>
-              <a:srgbClr val="FCD9A1">
-                <a:alpha val="55000"/>
-              </a:srgbClr>
-            </a:solidFill>
-            <a:prstDash val="solid"/>
-          </a:ln>
-        </p:spPr>
-      </p:sp>
-      <p:sp>
-        <p:nvSpPr>
           <p:cNvPr id="5" name="Text 3"/>
           <p:cNvSpPr/>
           <p:nvPr/>
@@ -9705,7 +9330,7 @@
         </p:spPr>
         <p:txBody>
           <a:bodyPr wrap="square" lIns="0" tIns="0" rIns="0" bIns="0" rtlCol="0" anchor="ctr">
-            <a:normAutofit/>
+            <a:normAutofit lnSpcReduction="10000"/>
           </a:bodyPr>
           <a:lstStyle/>
           <a:p>
@@ -10235,7 +9860,7 @@
         </p:spPr>
         <p:txBody>
           <a:bodyPr wrap="square" lIns="0" tIns="0" rIns="0" bIns="0" rtlCol="0" anchor="ctr">
-            <a:normAutofit/>
+            <a:normAutofit lnSpcReduction="10000"/>
           </a:bodyPr>
           <a:lstStyle/>
           <a:p>
@@ -10379,7 +10004,7 @@
         </p:spPr>
         <p:txBody>
           <a:bodyPr wrap="square" lIns="0" tIns="0" rIns="0" bIns="0" rtlCol="0" anchor="ctr">
-            <a:normAutofit/>
+            <a:normAutofit lnSpcReduction="10000"/>
           </a:bodyPr>
           <a:lstStyle/>
           <a:p>
@@ -10471,83 +10096,6 @@
       </p:grpSpPr>
       <p:sp>
         <p:nvSpPr>
-          <p:cNvPr id="2" name="Shape 0"/>
-          <p:cNvSpPr/>
-          <p:nvPr/>
-        </p:nvSpPr>
-        <p:spPr>
-          <a:xfrm>
-            <a:off x="0" y="0"/>
-            <a:ext cx="12191695" cy="6858000"/>
-          </a:xfrm>
-          <a:prstGeom prst="rect">
-            <a:avLst/>
-          </a:prstGeom>
-          <a:solidFill>
-            <a:srgbClr val="FBFAF8"/>
-          </a:solidFill>
-          <a:ln w="12700">
-            <a:solidFill>
-              <a:srgbClr val="FBFAF8">
-                <a:alpha val="0"/>
-              </a:srgbClr>
-            </a:solidFill>
-            <a:prstDash val="solid"/>
-          </a:ln>
-        </p:spPr>
-      </p:sp>
-      <p:sp>
-        <p:nvSpPr>
-          <p:cNvPr id="3" name="Shape 1"/>
-          <p:cNvSpPr/>
-          <p:nvPr/>
-        </p:nvSpPr>
-        <p:spPr>
-          <a:xfrm>
-            <a:off x="8869680" y="-1051560"/>
-            <a:ext cx="4297680" cy="4297680"/>
-          </a:xfrm>
-          <a:prstGeom prst="arc">
-            <a:avLst/>
-          </a:prstGeom>
-          <a:noFill/>
-          <a:ln w="20320">
-            <a:solidFill>
-              <a:srgbClr val="FCD9A1">
-                <a:alpha val="75000"/>
-              </a:srgbClr>
-            </a:solidFill>
-            <a:prstDash val="solid"/>
-          </a:ln>
-        </p:spPr>
-      </p:sp>
-      <p:sp>
-        <p:nvSpPr>
-          <p:cNvPr id="4" name="Shape 2"/>
-          <p:cNvSpPr/>
-          <p:nvPr/>
-        </p:nvSpPr>
-        <p:spPr>
-          <a:xfrm>
-            <a:off x="-1097280" y="4800600"/>
-            <a:ext cx="2926080" cy="2926080"/>
-          </a:xfrm>
-          <a:prstGeom prst="arc">
-            <a:avLst/>
-          </a:prstGeom>
-          <a:noFill/>
-          <a:ln w="15240">
-            <a:solidFill>
-              <a:srgbClr val="FCD9A1">
-                <a:alpha val="55000"/>
-              </a:srgbClr>
-            </a:solidFill>
-            <a:prstDash val="solid"/>
-          </a:ln>
-        </p:spPr>
-      </p:sp>
-      <p:sp>
-        <p:nvSpPr>
           <p:cNvPr id="5" name="Text 3"/>
           <p:cNvSpPr/>
           <p:nvPr/>
@@ -10565,7 +10113,7 @@
         </p:spPr>
         <p:txBody>
           <a:bodyPr wrap="square" lIns="0" tIns="0" rIns="0" bIns="0" rtlCol="0" anchor="ctr">
-            <a:normAutofit/>
+            <a:normAutofit lnSpcReduction="10000"/>
           </a:bodyPr>
           <a:lstStyle/>
           <a:p>
@@ -10732,7 +10280,7 @@
         </p:spPr>
         <p:txBody>
           <a:bodyPr wrap="square" lIns="0" tIns="0" rIns="0" bIns="0" rtlCol="0" anchor="ctr">
-            <a:normAutofit/>
+            <a:normAutofit fontScale="92500" lnSpcReduction="10000"/>
           </a:bodyPr>
           <a:lstStyle/>
           <a:p>
@@ -10873,7 +10421,7 @@
         </p:spPr>
         <p:txBody>
           <a:bodyPr wrap="square" lIns="0" tIns="0" rIns="0" bIns="0" rtlCol="0" anchor="ctr">
-            <a:normAutofit/>
+            <a:normAutofit fontScale="92500" lnSpcReduction="10000"/>
           </a:bodyPr>
           <a:lstStyle/>
           <a:p>
@@ -11014,7 +10562,7 @@
         </p:spPr>
         <p:txBody>
           <a:bodyPr wrap="square" lIns="0" tIns="0" rIns="0" bIns="0" rtlCol="0" anchor="ctr">
-            <a:normAutofit/>
+            <a:normAutofit fontScale="92500" lnSpcReduction="10000"/>
           </a:bodyPr>
           <a:lstStyle/>
           <a:p>
@@ -11155,7 +10703,7 @@
         </p:spPr>
         <p:txBody>
           <a:bodyPr wrap="square" lIns="0" tIns="0" rIns="0" bIns="0" rtlCol="0" anchor="ctr">
-            <a:normAutofit/>
+            <a:normAutofit fontScale="92500" lnSpcReduction="10000"/>
           </a:bodyPr>
           <a:lstStyle/>
           <a:p>
@@ -11296,7 +10844,7 @@
         </p:spPr>
         <p:txBody>
           <a:bodyPr wrap="square" lIns="0" tIns="0" rIns="0" bIns="0" rtlCol="0" anchor="ctr">
-            <a:normAutofit/>
+            <a:normAutofit fontScale="92500" lnSpcReduction="10000"/>
           </a:bodyPr>
           <a:lstStyle/>
           <a:p>
@@ -11437,7 +10985,7 @@
         </p:spPr>
         <p:txBody>
           <a:bodyPr wrap="square" lIns="0" tIns="0" rIns="0" bIns="0" rtlCol="0" anchor="ctr">
-            <a:normAutofit/>
+            <a:normAutofit fontScale="92500" lnSpcReduction="10000"/>
           </a:bodyPr>
           <a:lstStyle/>
           <a:p>
@@ -11578,7 +11126,7 @@
         </p:spPr>
         <p:txBody>
           <a:bodyPr wrap="square" lIns="0" tIns="0" rIns="0" bIns="0" rtlCol="0" anchor="ctr">
-            <a:normAutofit/>
+            <a:normAutofit fontScale="92500" lnSpcReduction="10000"/>
           </a:bodyPr>
           <a:lstStyle/>
           <a:p>
@@ -11719,7 +11267,7 @@
         </p:spPr>
         <p:txBody>
           <a:bodyPr wrap="square" lIns="0" tIns="0" rIns="0" bIns="0" rtlCol="0" anchor="ctr">
-            <a:normAutofit/>
+            <a:normAutofit fontScale="92500" lnSpcReduction="10000"/>
           </a:bodyPr>
           <a:lstStyle/>
           <a:p>
@@ -11860,7 +11408,7 @@
         </p:spPr>
         <p:txBody>
           <a:bodyPr wrap="square" lIns="0" tIns="0" rIns="0" bIns="0" rtlCol="0" anchor="ctr">
-            <a:normAutofit/>
+            <a:normAutofit lnSpcReduction="10000"/>
           </a:bodyPr>
           <a:lstStyle/>
           <a:p>
@@ -11898,7 +11446,7 @@
         </p:spPr>
         <p:txBody>
           <a:bodyPr wrap="square" lIns="0" tIns="0" rIns="0" bIns="0" rtlCol="0" anchor="ctr">
-            <a:normAutofit/>
+            <a:normAutofit lnSpcReduction="10000"/>
           </a:bodyPr>
           <a:lstStyle/>
           <a:p>
@@ -11990,83 +11538,6 @@
       </p:grpSpPr>
       <p:sp>
         <p:nvSpPr>
-          <p:cNvPr id="2" name="Shape 0"/>
-          <p:cNvSpPr/>
-          <p:nvPr/>
-        </p:nvSpPr>
-        <p:spPr>
-          <a:xfrm>
-            <a:off x="0" y="0"/>
-            <a:ext cx="12191695" cy="6858000"/>
-          </a:xfrm>
-          <a:prstGeom prst="rect">
-            <a:avLst/>
-          </a:prstGeom>
-          <a:solidFill>
-            <a:srgbClr val="FBFAF8"/>
-          </a:solidFill>
-          <a:ln w="12700">
-            <a:solidFill>
-              <a:srgbClr val="FBFAF8">
-                <a:alpha val="0"/>
-              </a:srgbClr>
-            </a:solidFill>
-            <a:prstDash val="solid"/>
-          </a:ln>
-        </p:spPr>
-      </p:sp>
-      <p:sp>
-        <p:nvSpPr>
-          <p:cNvPr id="3" name="Shape 1"/>
-          <p:cNvSpPr/>
-          <p:nvPr/>
-        </p:nvSpPr>
-        <p:spPr>
-          <a:xfrm>
-            <a:off x="8869680" y="-1051560"/>
-            <a:ext cx="4297680" cy="4297680"/>
-          </a:xfrm>
-          <a:prstGeom prst="arc">
-            <a:avLst/>
-          </a:prstGeom>
-          <a:noFill/>
-          <a:ln w="20320">
-            <a:solidFill>
-              <a:srgbClr val="FCD9A1">
-                <a:alpha val="75000"/>
-              </a:srgbClr>
-            </a:solidFill>
-            <a:prstDash val="solid"/>
-          </a:ln>
-        </p:spPr>
-      </p:sp>
-      <p:sp>
-        <p:nvSpPr>
-          <p:cNvPr id="4" name="Shape 2"/>
-          <p:cNvSpPr/>
-          <p:nvPr/>
-        </p:nvSpPr>
-        <p:spPr>
-          <a:xfrm>
-            <a:off x="-1097280" y="4800600"/>
-            <a:ext cx="2926080" cy="2926080"/>
-          </a:xfrm>
-          <a:prstGeom prst="arc">
-            <a:avLst/>
-          </a:prstGeom>
-          <a:noFill/>
-          <a:ln w="15240">
-            <a:solidFill>
-              <a:srgbClr val="FCD9A1">
-                <a:alpha val="55000"/>
-              </a:srgbClr>
-            </a:solidFill>
-            <a:prstDash val="solid"/>
-          </a:ln>
-        </p:spPr>
-      </p:sp>
-      <p:sp>
-        <p:nvSpPr>
           <p:cNvPr id="5" name="Text 3"/>
           <p:cNvSpPr/>
           <p:nvPr/>
@@ -12084,7 +11555,7 @@
         </p:spPr>
         <p:txBody>
           <a:bodyPr wrap="square" lIns="0" tIns="0" rIns="0" bIns="0" rtlCol="0" anchor="ctr">
-            <a:normAutofit/>
+            <a:normAutofit lnSpcReduction="10000"/>
           </a:bodyPr>
           <a:lstStyle/>
           <a:p>
@@ -12251,7 +11722,7 @@
         </p:spPr>
         <p:txBody>
           <a:bodyPr wrap="square" lIns="0" tIns="0" rIns="0" bIns="0" rtlCol="0" anchor="ctr">
-            <a:normAutofit/>
+            <a:normAutofit lnSpcReduction="10000"/>
           </a:bodyPr>
           <a:lstStyle/>
           <a:p>
@@ -12392,7 +11863,7 @@
         </p:spPr>
         <p:txBody>
           <a:bodyPr wrap="square" lIns="0" tIns="0" rIns="0" bIns="0" rtlCol="0" anchor="ctr">
-            <a:normAutofit/>
+            <a:normAutofit lnSpcReduction="10000"/>
           </a:bodyPr>
           <a:lstStyle/>
           <a:p>
@@ -12533,7 +12004,7 @@
         </p:spPr>
         <p:txBody>
           <a:bodyPr wrap="square" lIns="0" tIns="0" rIns="0" bIns="0" rtlCol="0" anchor="ctr">
-            <a:normAutofit/>
+            <a:normAutofit lnSpcReduction="10000"/>
           </a:bodyPr>
           <a:lstStyle/>
           <a:p>
@@ -12674,7 +12145,7 @@
         </p:spPr>
         <p:txBody>
           <a:bodyPr wrap="square" lIns="0" tIns="0" rIns="0" bIns="0" rtlCol="0" anchor="ctr">
-            <a:normAutofit/>
+            <a:normAutofit lnSpcReduction="10000"/>
           </a:bodyPr>
           <a:lstStyle/>
           <a:p>
@@ -12702,7 +12173,7 @@
         <p:spPr>
           <a:xfrm>
             <a:off x="6949440" y="2148840"/>
-            <a:ext cx="3520440" cy="1371600"/>
+            <a:ext cx="4023360" cy="1371600"/>
           </a:xfrm>
           <a:prstGeom prst="rect">
             <a:avLst/>
@@ -12720,7 +12191,7 @@
               <a:buNone/>
             </a:pPr>
             <a:r>
-              <a:rPr lang="en-US" sz="1000" dirty="0">
+              <a:rPr lang="en-US" sz="1200" dirty="0">
                 <a:solidFill>
                   <a:srgbClr val="475569"/>
                 </a:solidFill>
@@ -12731,7 +12202,7 @@
 • Admin endpoints protected by JWT and role checks
 • Cart remains client-side until checkout</a:t>
             </a:r>
-            <a:endParaRPr lang="en-US" sz="1000" dirty="0"/>
+            <a:endParaRPr lang="en-US" sz="1200" dirty="0"/>
           </a:p>
         </p:txBody>
       </p:sp>
@@ -12808,101 +12279,24 @@
       </p:grpSpPr>
       <p:sp>
         <p:nvSpPr>
-          <p:cNvPr id="2" name="Shape 0"/>
-          <p:cNvSpPr/>
-          <p:nvPr/>
-        </p:nvSpPr>
-        <p:spPr>
-          <a:xfrm>
-            <a:off x="0" y="0"/>
-            <a:ext cx="12191695" cy="6858000"/>
-          </a:xfrm>
-          <a:prstGeom prst="rect">
-            <a:avLst/>
-          </a:prstGeom>
-          <a:solidFill>
-            <a:srgbClr val="FBFAF8"/>
-          </a:solidFill>
-          <a:ln w="12700">
-            <a:solidFill>
-              <a:srgbClr val="FBFAF8">
-                <a:alpha val="0"/>
-              </a:srgbClr>
-            </a:solidFill>
-            <a:prstDash val="solid"/>
-          </a:ln>
-        </p:spPr>
-      </p:sp>
-      <p:sp>
-        <p:nvSpPr>
-          <p:cNvPr id="3" name="Shape 1"/>
-          <p:cNvSpPr/>
-          <p:nvPr/>
-        </p:nvSpPr>
-        <p:spPr>
-          <a:xfrm>
-            <a:off x="8869680" y="-1051560"/>
-            <a:ext cx="4297680" cy="4297680"/>
-          </a:xfrm>
-          <a:prstGeom prst="arc">
-            <a:avLst/>
-          </a:prstGeom>
-          <a:noFill/>
-          <a:ln w="20320">
-            <a:solidFill>
-              <a:srgbClr val="FCD9A1">
-                <a:alpha val="75000"/>
-              </a:srgbClr>
-            </a:solidFill>
-            <a:prstDash val="solid"/>
-          </a:ln>
-        </p:spPr>
-      </p:sp>
-      <p:sp>
-        <p:nvSpPr>
-          <p:cNvPr id="4" name="Shape 2"/>
-          <p:cNvSpPr/>
-          <p:nvPr/>
-        </p:nvSpPr>
-        <p:spPr>
-          <a:xfrm>
-            <a:off x="-1097280" y="4800600"/>
-            <a:ext cx="2926080" cy="2926080"/>
-          </a:xfrm>
-          <a:prstGeom prst="arc">
-            <a:avLst/>
-          </a:prstGeom>
-          <a:noFill/>
-          <a:ln w="15240">
-            <a:solidFill>
-              <a:srgbClr val="FCD9A1">
-                <a:alpha val="55000"/>
-              </a:srgbClr>
-            </a:solidFill>
-            <a:prstDash val="solid"/>
-          </a:ln>
-        </p:spPr>
-      </p:sp>
-      <p:sp>
-        <p:nvSpPr>
           <p:cNvPr id="5" name="Text 3"/>
           <p:cNvSpPr/>
           <p:nvPr/>
         </p:nvSpPr>
         <p:spPr>
           <a:xfrm>
-            <a:off x="530352" y="301752"/>
-            <a:ext cx="7863840" cy="347472"/>
-          </a:xfrm>
-          <a:prstGeom prst="rect">
-            <a:avLst/>
-          </a:prstGeom>
-          <a:noFill/>
-          <a:ln/>
-        </p:spPr>
-        <p:txBody>
-          <a:bodyPr wrap="square" lIns="0" tIns="0" rIns="0" bIns="0" rtlCol="0" anchor="ctr">
-            <a:normAutofit/>
+            <a:off x="4327855" y="2792839"/>
+            <a:ext cx="1998300" cy="347472"/>
+          </a:xfrm>
+          <a:prstGeom prst="rect">
+            <a:avLst/>
+          </a:prstGeom>
+          <a:noFill/>
+          <a:ln/>
+        </p:spPr>
+        <p:txBody>
+          <a:bodyPr wrap="square" lIns="0" tIns="0" rIns="0" bIns="0" rtlCol="0" anchor="ctr">
+            <a:normAutofit lnSpcReduction="10000"/>
           </a:bodyPr>
           <a:lstStyle/>
           <a:p>
@@ -12918,7 +12312,7 @@
                 <a:ea typeface="Aptos Display" pitchFamily="34" charset="-122"/>
                 <a:cs typeface="Aptos Display" pitchFamily="34" charset="-120"/>
               </a:rPr>
-              <a:t>Storefront Experience</a:t>
+              <a:t>Web Site Demo</a:t>
             </a:r>
             <a:endParaRPr lang="en-US" sz="2300" dirty="0"/>
           </a:p>
@@ -13025,424 +12419,13 @@
       </p:sp>
       <p:sp>
         <p:nvSpPr>
-          <p:cNvPr id="9" name="Shape 7"/>
-          <p:cNvSpPr/>
-          <p:nvPr/>
-        </p:nvSpPr>
-        <p:spPr>
-          <a:xfrm>
-            <a:off x="640080" y="1225296"/>
-            <a:ext cx="5120640" cy="4526280"/>
-          </a:xfrm>
-          <a:prstGeom prst="roundRect">
-            <a:avLst>
-              <a:gd name="adj" fmla="val 2020"/>
-            </a:avLst>
-          </a:prstGeom>
-          <a:solidFill>
-            <a:srgbClr val="FFFFFF"/>
-          </a:solidFill>
-          <a:ln w="12700">
-            <a:solidFill>
-              <a:srgbClr val="E3E0D8"/>
-            </a:solidFill>
-            <a:prstDash val="solid"/>
-          </a:ln>
-        </p:spPr>
-      </p:sp>
-      <p:sp>
-        <p:nvSpPr>
-          <p:cNvPr id="10" name="Shape 8"/>
-          <p:cNvSpPr/>
-          <p:nvPr/>
-        </p:nvSpPr>
-        <p:spPr>
-          <a:xfrm>
-            <a:off x="640080" y="1225296"/>
-            <a:ext cx="5120640" cy="274320"/>
-          </a:xfrm>
-          <a:prstGeom prst="rect">
-            <a:avLst/>
-          </a:prstGeom>
-          <a:solidFill>
-            <a:srgbClr val="F3F0EA"/>
-          </a:solidFill>
-          <a:ln w="12700">
-            <a:solidFill>
-              <a:srgbClr val="F3F0EA">
-                <a:alpha val="0"/>
-              </a:srgbClr>
-            </a:solidFill>
-            <a:prstDash val="solid"/>
-          </a:ln>
-        </p:spPr>
-      </p:sp>
-      <p:sp>
-        <p:nvSpPr>
-          <p:cNvPr id="11" name="Shape 9"/>
-          <p:cNvSpPr/>
-          <p:nvPr/>
-        </p:nvSpPr>
-        <p:spPr>
-          <a:xfrm>
-            <a:off x="749808" y="1316736"/>
-            <a:ext cx="73152" cy="73152"/>
-          </a:xfrm>
-          <a:prstGeom prst="ellipse">
-            <a:avLst/>
-          </a:prstGeom>
-          <a:solidFill>
-            <a:srgbClr val="EF4444"/>
-          </a:solidFill>
-          <a:ln w="12700">
-            <a:solidFill>
-              <a:srgbClr val="EF4444"/>
-            </a:solidFill>
-            <a:prstDash val="solid"/>
-          </a:ln>
-        </p:spPr>
-      </p:sp>
-      <p:sp>
-        <p:nvSpPr>
-          <p:cNvPr id="12" name="Shape 10"/>
-          <p:cNvSpPr/>
-          <p:nvPr/>
-        </p:nvSpPr>
-        <p:spPr>
-          <a:xfrm>
-            <a:off x="877824" y="1316736"/>
-            <a:ext cx="73152" cy="73152"/>
-          </a:xfrm>
-          <a:prstGeom prst="ellipse">
-            <a:avLst/>
-          </a:prstGeom>
-          <a:solidFill>
-            <a:srgbClr val="F59E0B"/>
-          </a:solidFill>
-          <a:ln w="12700">
-            <a:solidFill>
-              <a:srgbClr val="F59E0B"/>
-            </a:solidFill>
-            <a:prstDash val="solid"/>
-          </a:ln>
-        </p:spPr>
-      </p:sp>
-      <p:sp>
-        <p:nvSpPr>
-          <p:cNvPr id="13" name="Shape 11"/>
-          <p:cNvSpPr/>
-          <p:nvPr/>
-        </p:nvSpPr>
-        <p:spPr>
-          <a:xfrm>
-            <a:off x="1005840" y="1316736"/>
-            <a:ext cx="73152" cy="73152"/>
-          </a:xfrm>
-          <a:prstGeom prst="ellipse">
-            <a:avLst/>
-          </a:prstGeom>
-          <a:solidFill>
-            <a:srgbClr val="22C55E"/>
-          </a:solidFill>
-          <a:ln w="12700">
-            <a:solidFill>
-              <a:srgbClr val="22C55E"/>
-            </a:solidFill>
-            <a:prstDash val="solid"/>
-          </a:ln>
-        </p:spPr>
-      </p:sp>
-      <p:pic>
-        <p:nvPicPr>
-          <p:cNvPr id="14" name="Image 0" descr="/mnt/data/image(599).png"/>
-          <p:cNvPicPr>
-            <a:picLocks noChangeAspect="1"/>
-          </p:cNvPicPr>
-          <p:nvPr/>
-        </p:nvPicPr>
-        <p:blipFill>
-          <a:blip r:embed="rId3"/>
-          <a:stretch>
-            <a:fillRect/>
-          </a:stretch>
-        </p:blipFill>
-        <p:spPr>
-          <a:xfrm>
-            <a:off x="1051560" y="1563624"/>
-            <a:ext cx="4434840" cy="4114800"/>
-          </a:xfrm>
-          <a:prstGeom prst="rect">
-            <a:avLst/>
-          </a:prstGeom>
-        </p:spPr>
-      </p:pic>
-      <p:sp>
-        <p:nvSpPr>
-          <p:cNvPr id="15" name="Text 12"/>
-          <p:cNvSpPr/>
-          <p:nvPr/>
-        </p:nvSpPr>
-        <p:spPr>
-          <a:xfrm>
-            <a:off x="749808" y="5815584"/>
-            <a:ext cx="4901184" cy="137160"/>
-          </a:xfrm>
-          <a:prstGeom prst="rect">
-            <a:avLst/>
-          </a:prstGeom>
-          <a:noFill/>
-          <a:ln/>
-        </p:spPr>
-        <p:txBody>
-          <a:bodyPr wrap="square" lIns="0" tIns="0" rIns="0" bIns="0" rtlCol="0" anchor="ctr">
-            <a:normAutofit/>
-          </a:bodyPr>
-          <a:lstStyle/>
-          <a:p>
-            <a:pPr marL="0" indent="0" algn="ctr">
-              <a:buNone/>
-            </a:pPr>
-            <a:r>
-              <a:rPr lang="en-US" sz="720" i="1" dirty="0">
-                <a:solidFill>
-                  <a:srgbClr val="64748B"/>
-                </a:solidFill>
-              </a:rPr>
-              <a:t>Homepage / Categories</a:t>
-            </a:r>
-            <a:endParaRPr lang="en-US" sz="720" dirty="0"/>
-          </a:p>
-        </p:txBody>
-      </p:sp>
-      <p:sp>
-        <p:nvSpPr>
-          <p:cNvPr id="16" name="Shape 13"/>
-          <p:cNvSpPr/>
-          <p:nvPr/>
-        </p:nvSpPr>
-        <p:spPr>
-          <a:xfrm>
-            <a:off x="6355080" y="1225296"/>
-            <a:ext cx="5120640" cy="4526280"/>
-          </a:xfrm>
-          <a:prstGeom prst="roundRect">
-            <a:avLst>
-              <a:gd name="adj" fmla="val 2020"/>
-            </a:avLst>
-          </a:prstGeom>
-          <a:solidFill>
-            <a:srgbClr val="FFFFFF"/>
-          </a:solidFill>
-          <a:ln w="12700">
-            <a:solidFill>
-              <a:srgbClr val="E3E0D8"/>
-            </a:solidFill>
-            <a:prstDash val="solid"/>
-          </a:ln>
-        </p:spPr>
-      </p:sp>
-      <p:sp>
-        <p:nvSpPr>
-          <p:cNvPr id="17" name="Shape 14"/>
-          <p:cNvSpPr/>
-          <p:nvPr/>
-        </p:nvSpPr>
-        <p:spPr>
-          <a:xfrm>
-            <a:off x="6355080" y="1225296"/>
-            <a:ext cx="5120640" cy="274320"/>
-          </a:xfrm>
-          <a:prstGeom prst="rect">
-            <a:avLst/>
-          </a:prstGeom>
-          <a:solidFill>
-            <a:srgbClr val="F3F0EA"/>
-          </a:solidFill>
-          <a:ln w="12700">
-            <a:solidFill>
-              <a:srgbClr val="F3F0EA">
-                <a:alpha val="0"/>
-              </a:srgbClr>
-            </a:solidFill>
-            <a:prstDash val="solid"/>
-          </a:ln>
-        </p:spPr>
-      </p:sp>
-      <p:sp>
-        <p:nvSpPr>
-          <p:cNvPr id="18" name="Shape 15"/>
-          <p:cNvSpPr/>
-          <p:nvPr/>
-        </p:nvSpPr>
-        <p:spPr>
-          <a:xfrm>
-            <a:off x="6464808" y="1316736"/>
-            <a:ext cx="73152" cy="73152"/>
-          </a:xfrm>
-          <a:prstGeom prst="ellipse">
-            <a:avLst/>
-          </a:prstGeom>
-          <a:solidFill>
-            <a:srgbClr val="EF4444"/>
-          </a:solidFill>
-          <a:ln w="12700">
-            <a:solidFill>
-              <a:srgbClr val="EF4444"/>
-            </a:solidFill>
-            <a:prstDash val="solid"/>
-          </a:ln>
-        </p:spPr>
-      </p:sp>
-      <p:sp>
-        <p:nvSpPr>
-          <p:cNvPr id="19" name="Shape 16"/>
-          <p:cNvSpPr/>
-          <p:nvPr/>
-        </p:nvSpPr>
-        <p:spPr>
-          <a:xfrm>
-            <a:off x="6592824" y="1316736"/>
-            <a:ext cx="73152" cy="73152"/>
-          </a:xfrm>
-          <a:prstGeom prst="ellipse">
-            <a:avLst/>
-          </a:prstGeom>
-          <a:solidFill>
-            <a:srgbClr val="F59E0B"/>
-          </a:solidFill>
-          <a:ln w="12700">
-            <a:solidFill>
-              <a:srgbClr val="F59E0B"/>
-            </a:solidFill>
-            <a:prstDash val="solid"/>
-          </a:ln>
-        </p:spPr>
-      </p:sp>
-      <p:sp>
-        <p:nvSpPr>
-          <p:cNvPr id="20" name="Shape 17"/>
-          <p:cNvSpPr/>
-          <p:nvPr/>
-        </p:nvSpPr>
-        <p:spPr>
-          <a:xfrm>
-            <a:off x="6720840" y="1316736"/>
-            <a:ext cx="73152" cy="73152"/>
-          </a:xfrm>
-          <a:prstGeom prst="ellipse">
-            <a:avLst/>
-          </a:prstGeom>
-          <a:solidFill>
-            <a:srgbClr val="22C55E"/>
-          </a:solidFill>
-          <a:ln w="12700">
-            <a:solidFill>
-              <a:srgbClr val="22C55E"/>
-            </a:solidFill>
-            <a:prstDash val="solid"/>
-          </a:ln>
-        </p:spPr>
-      </p:sp>
-      <p:pic>
-        <p:nvPicPr>
-          <p:cNvPr id="21" name="Image 1" descr="/mnt/data/image(600).png"/>
-          <p:cNvPicPr>
-            <a:picLocks noChangeAspect="1"/>
-          </p:cNvPicPr>
-          <p:nvPr/>
-        </p:nvPicPr>
-        <p:blipFill>
-          <a:blip r:embed="rId4"/>
-          <a:stretch>
-            <a:fillRect/>
-          </a:stretch>
-        </p:blipFill>
-        <p:spPr>
-          <a:xfrm>
-            <a:off x="6592824" y="1563624"/>
-            <a:ext cx="4690872" cy="4114800"/>
-          </a:xfrm>
-          <a:prstGeom prst="rect">
-            <a:avLst/>
-          </a:prstGeom>
-        </p:spPr>
-      </p:pic>
-      <p:sp>
-        <p:nvSpPr>
-          <p:cNvPr id="22" name="Text 18"/>
-          <p:cNvSpPr/>
-          <p:nvPr/>
-        </p:nvSpPr>
-        <p:spPr>
-          <a:xfrm>
-            <a:off x="6464808" y="5815584"/>
-            <a:ext cx="4901184" cy="137160"/>
-          </a:xfrm>
-          <a:prstGeom prst="rect">
-            <a:avLst/>
-          </a:prstGeom>
-          <a:noFill/>
-          <a:ln/>
-        </p:spPr>
-        <p:txBody>
-          <a:bodyPr wrap="square" lIns="0" tIns="0" rIns="0" bIns="0" rtlCol="0" anchor="ctr">
-            <a:normAutofit/>
-          </a:bodyPr>
-          <a:lstStyle/>
-          <a:p>
-            <a:pPr marL="0" indent="0" algn="ctr">
-              <a:buNone/>
-            </a:pPr>
-            <a:r>
-              <a:rPr lang="en-US" sz="720" i="1" dirty="0">
-                <a:solidFill>
-                  <a:srgbClr val="64748B"/>
-                </a:solidFill>
-              </a:rPr>
-              <a:t>Category page / Product grid</a:t>
-            </a:r>
-            <a:endParaRPr lang="en-US" sz="720" dirty="0"/>
-          </a:p>
-        </p:txBody>
-      </p:sp>
-      <p:sp>
-        <p:nvSpPr>
-          <p:cNvPr id="23" name="Shape 19"/>
-          <p:cNvSpPr/>
-          <p:nvPr/>
-        </p:nvSpPr>
-        <p:spPr>
-          <a:xfrm>
-            <a:off x="822960" y="5897880"/>
-            <a:ext cx="10058400" cy="347472"/>
-          </a:xfrm>
-          <a:prstGeom prst="roundRect">
-            <a:avLst>
-              <a:gd name="adj" fmla="val 31579"/>
-            </a:avLst>
-          </a:prstGeom>
-          <a:solidFill>
-            <a:srgbClr val="0E0E0E"/>
-          </a:solidFill>
-          <a:ln w="12700">
-            <a:solidFill>
-              <a:srgbClr val="0E0E0E">
-                <a:alpha val="0"/>
-              </a:srgbClr>
-            </a:solidFill>
-            <a:prstDash val="solid"/>
-          </a:ln>
-        </p:spPr>
-      </p:sp>
-      <p:sp>
-        <p:nvSpPr>
           <p:cNvPr id="24" name="Text 20"/>
           <p:cNvSpPr/>
           <p:nvPr/>
         </p:nvSpPr>
         <p:spPr>
           <a:xfrm>
-            <a:off x="1051560" y="6016752"/>
+            <a:off x="1051560" y="6053328"/>
             <a:ext cx="9601200" cy="100584"/>
           </a:xfrm>
           <a:prstGeom prst="rect">
@@ -13453,7 +12436,7 @@
         </p:spPr>
         <p:txBody>
           <a:bodyPr wrap="square" lIns="0" tIns="0" rIns="0" bIns="0" rtlCol="0" anchor="ctr">
-            <a:normAutofit/>
+            <a:normAutofit fontScale="85000" lnSpcReduction="10000"/>
           </a:bodyPr>
           <a:lstStyle/>
           <a:p>
@@ -13520,7 +12503,7 @@
 
 <file path=ppt/slides/slide7.xml><?xml version="1.0" encoding="utf-8"?>
 <p:sld xmlns:a="http://schemas.openxmlformats.org/drawingml/2006/main" xmlns:r="http://schemas.openxmlformats.org/officeDocument/2006/relationships" xmlns:p="http://schemas.openxmlformats.org/presentationml/2006/main">
-  <p:cSld name="Slide 7">
+  <p:cSld>
     <p:bg>
       <p:bgPr>
         <a:solidFill>
@@ -13531,7 +12514,13 @@
     </p:bg>
     <p:spTree>
       <p:nvGrpSpPr>
-        <p:cNvPr id="1" name=""/>
+        <p:cNvPr id="1" name="">
+          <a:extLst>
+            <a:ext uri="{FF2B5EF4-FFF2-40B4-BE49-F238E27FC236}">
+              <a16:creationId xmlns:a16="http://schemas.microsoft.com/office/drawing/2014/main" id="{CF2A593E-1A0C-9639-2B94-4FCE44E0C760}"/>
+            </a:ext>
+          </a:extLst>
+        </p:cNvPr>
         <p:cNvGrpSpPr/>
         <p:nvPr/>
       </p:nvGrpSpPr>
@@ -13545,107 +12534,33 @@
       </p:grpSpPr>
       <p:sp>
         <p:nvSpPr>
-          <p:cNvPr id="2" name="Shape 0"/>
-          <p:cNvSpPr/>
-          <p:nvPr/>
-        </p:nvSpPr>
-        <p:spPr>
-          <a:xfrm>
-            <a:off x="0" y="0"/>
-            <a:ext cx="12191695" cy="6858000"/>
-          </a:xfrm>
-          <a:prstGeom prst="rect">
-            <a:avLst/>
-          </a:prstGeom>
-          <a:solidFill>
-            <a:srgbClr val="FBFAF8"/>
-          </a:solidFill>
-          <a:ln w="12700">
-            <a:solidFill>
-              <a:srgbClr val="FBFAF8">
-                <a:alpha val="0"/>
-              </a:srgbClr>
-            </a:solidFill>
-            <a:prstDash val="solid"/>
-          </a:ln>
-        </p:spPr>
-      </p:sp>
-      <p:sp>
-        <p:nvSpPr>
-          <p:cNvPr id="3" name="Shape 1"/>
-          <p:cNvSpPr/>
-          <p:nvPr/>
-        </p:nvSpPr>
-        <p:spPr>
-          <a:xfrm>
-            <a:off x="8869680" y="-1051560"/>
-            <a:ext cx="4297680" cy="4297680"/>
-          </a:xfrm>
-          <a:prstGeom prst="arc">
-            <a:avLst/>
-          </a:prstGeom>
-          <a:noFill/>
-          <a:ln w="20320">
-            <a:solidFill>
-              <a:srgbClr val="FCD9A1">
-                <a:alpha val="75000"/>
-              </a:srgbClr>
-            </a:solidFill>
-            <a:prstDash val="solid"/>
-          </a:ln>
-        </p:spPr>
-      </p:sp>
-      <p:sp>
-        <p:nvSpPr>
-          <p:cNvPr id="4" name="Shape 2"/>
-          <p:cNvSpPr/>
-          <p:nvPr/>
-        </p:nvSpPr>
-        <p:spPr>
-          <a:xfrm>
-            <a:off x="-1097280" y="4800600"/>
-            <a:ext cx="2926080" cy="2926080"/>
-          </a:xfrm>
-          <a:prstGeom prst="arc">
-            <a:avLst/>
-          </a:prstGeom>
-          <a:noFill/>
-          <a:ln w="15240">
-            <a:solidFill>
-              <a:srgbClr val="FCD9A1">
-                <a:alpha val="55000"/>
-              </a:srgbClr>
-            </a:solidFill>
-            <a:prstDash val="solid"/>
-          </a:ln>
-        </p:spPr>
-      </p:sp>
-      <p:sp>
-        <p:nvSpPr>
-          <p:cNvPr id="5" name="Text 3"/>
+          <p:cNvPr id="5" name="Text 3">
+            <a:extLst>
+              <a:ext uri="{FF2B5EF4-FFF2-40B4-BE49-F238E27FC236}">
+                <a16:creationId xmlns:a16="http://schemas.microsoft.com/office/drawing/2014/main" id="{A855830F-4F59-B885-51C4-BF1E1D2278F4}"/>
+              </a:ext>
+            </a:extLst>
+          </p:cNvPr>
           <p:cNvSpPr/>
           <p:nvPr/>
         </p:nvSpPr>
         <p:spPr>
           <a:xfrm>
             <a:off x="530352" y="301752"/>
-            <a:ext cx="7863840" cy="347472"/>
-          </a:xfrm>
-          <a:prstGeom prst="rect">
-            <a:avLst/>
-          </a:prstGeom>
-          <a:noFill/>
-          <a:ln/>
-        </p:spPr>
-        <p:txBody>
-          <a:bodyPr wrap="square" lIns="0" tIns="0" rIns="0" bIns="0" rtlCol="0" anchor="ctr">
-            <a:normAutofit/>
-          </a:bodyPr>
-          <a:lstStyle/>
-          <a:p>
-            <a:pPr marL="0" indent="0">
-              <a:buNone/>
-            </a:pPr>
+            <a:ext cx="7863840" cy="347471"/>
+          </a:xfrm>
+          <a:prstGeom prst="rect">
+            <a:avLst/>
+          </a:prstGeom>
+          <a:noFill/>
+          <a:ln/>
+        </p:spPr>
+        <p:txBody>
+          <a:bodyPr wrap="square" lIns="0" tIns="0" rIns="0" bIns="0" rtlCol="0" anchor="ctr">
+            <a:normAutofit lnSpcReduction="10000"/>
+          </a:bodyPr>
+          <a:lstStyle/>
+          <a:p>
             <a:r>
               <a:rPr lang="en-US" sz="2300" b="1" dirty="0">
                 <a:solidFill>
@@ -13655,7 +12570,7 @@
                 <a:ea typeface="Aptos Display" pitchFamily="34" charset="-122"/>
                 <a:cs typeface="Aptos Display" pitchFamily="34" charset="-120"/>
               </a:rPr>
-              <a:t>Cart &amp; Checkout Flow</a:t>
+              <a:t>System Design Models</a:t>
             </a:r>
             <a:endParaRPr lang="en-US" sz="2300" dirty="0"/>
           </a:p>
@@ -13663,7 +12578,13 @@
       </p:sp>
       <p:sp>
         <p:nvSpPr>
-          <p:cNvPr id="6" name="Text 4"/>
+          <p:cNvPr id="6" name="Text 4">
+            <a:extLst>
+              <a:ext uri="{FF2B5EF4-FFF2-40B4-BE49-F238E27FC236}">
+                <a16:creationId xmlns:a16="http://schemas.microsoft.com/office/drawing/2014/main" id="{CF7BBA60-B45D-8B12-8D34-C276C57E839B}"/>
+              </a:ext>
+            </a:extLst>
+          </p:cNvPr>
           <p:cNvSpPr/>
           <p:nvPr/>
         </p:nvSpPr>
@@ -13684,24 +12605,19 @@
           </a:bodyPr>
           <a:lstStyle/>
           <a:p>
-            <a:pPr marL="0" indent="0">
-              <a:buNone/>
-            </a:pPr>
-            <a:r>
-              <a:rPr lang="en-US" sz="780" b="1" dirty="0">
-                <a:solidFill>
-                  <a:srgbClr val="64748B"/>
-                </a:solidFill>
-              </a:rPr>
-              <a:t>FROM SELECTED ITEMS TO SUBMITTED ORDER</a:t>
-            </a:r>
             <a:endParaRPr lang="en-US" sz="780" dirty="0"/>
           </a:p>
         </p:txBody>
       </p:sp>
       <p:sp>
         <p:nvSpPr>
-          <p:cNvPr id="7" name="Text 5"/>
+          <p:cNvPr id="7" name="Text 5">
+            <a:extLst>
+              <a:ext uri="{FF2B5EF4-FFF2-40B4-BE49-F238E27FC236}">
+                <a16:creationId xmlns:a16="http://schemas.microsoft.com/office/drawing/2014/main" id="{A8617B85-3D58-6B60-4FD2-3090F73CB405}"/>
+              </a:ext>
+            </a:extLst>
+          </p:cNvPr>
           <p:cNvSpPr/>
           <p:nvPr/>
         </p:nvSpPr>
@@ -13731,7 +12647,7 @@
                   <a:srgbClr val="64748B"/>
                 </a:solidFill>
               </a:rPr>
-              <a:t>07</a:t>
+              <a:t>08</a:t>
             </a:r>
             <a:endParaRPr lang="en-US" sz="800" dirty="0"/>
           </a:p>
@@ -13739,7 +12655,13 @@
       </p:sp>
       <p:sp>
         <p:nvSpPr>
-          <p:cNvPr id="8" name="Shape 6"/>
+          <p:cNvPr id="8" name="Shape 6">
+            <a:extLst>
+              <a:ext uri="{FF2B5EF4-FFF2-40B4-BE49-F238E27FC236}">
+                <a16:creationId xmlns:a16="http://schemas.microsoft.com/office/drawing/2014/main" id="{9BC978F9-4992-FF88-1EAB-4EB914CF9C28}"/>
+              </a:ext>
+            </a:extLst>
+          </p:cNvPr>
           <p:cNvSpPr/>
           <p:nvPr/>
         </p:nvSpPr>
@@ -13762,18 +12684,24 @@
       </p:sp>
       <p:sp>
         <p:nvSpPr>
-          <p:cNvPr id="9" name="Shape 7"/>
-          <p:cNvSpPr/>
-          <p:nvPr/>
-        </p:nvSpPr>
-        <p:spPr>
-          <a:xfrm>
-            <a:off x="713232" y="1234440"/>
-            <a:ext cx="4800600" cy="4370832"/>
+          <p:cNvPr id="9" name="Shape 7">
+            <a:extLst>
+              <a:ext uri="{FF2B5EF4-FFF2-40B4-BE49-F238E27FC236}">
+                <a16:creationId xmlns:a16="http://schemas.microsoft.com/office/drawing/2014/main" id="{E96776B3-6B6F-A3C7-9B3C-B18A96B7B14F}"/>
+              </a:ext>
+            </a:extLst>
+          </p:cNvPr>
+          <p:cNvSpPr/>
+          <p:nvPr/>
+        </p:nvSpPr>
+        <p:spPr>
+          <a:xfrm>
+            <a:off x="634482" y="1188721"/>
+            <a:ext cx="11395998" cy="5276088"/>
           </a:xfrm>
           <a:prstGeom prst="roundRect">
             <a:avLst>
-              <a:gd name="adj" fmla="val 2092"/>
+              <a:gd name="adj" fmla="val 2062"/>
             </a:avLst>
           </a:prstGeom>
           <a:solidFill>
@@ -13781,7 +12709,7 @@
           </a:solidFill>
           <a:ln w="12700">
             <a:solidFill>
-              <a:srgbClr val="E3E0D8"/>
+              <a:srgbClr val="E4DED4"/>
             </a:solidFill>
             <a:prstDash val="solid"/>
           </a:ln>
@@ -13789,124 +12717,78 @@
       </p:sp>
       <p:sp>
         <p:nvSpPr>
-          <p:cNvPr id="10" name="Shape 8"/>
-          <p:cNvSpPr/>
-          <p:nvPr/>
-        </p:nvSpPr>
-        <p:spPr>
-          <a:xfrm>
-            <a:off x="713232" y="1234440"/>
-            <a:ext cx="4800600" cy="274320"/>
-          </a:xfrm>
-          <a:prstGeom prst="rect">
-            <a:avLst/>
-          </a:prstGeom>
-          <a:solidFill>
-            <a:srgbClr val="F3F0EA"/>
-          </a:solidFill>
-          <a:ln w="12700">
-            <a:solidFill>
-              <a:srgbClr val="F3F0EA">
-                <a:alpha val="0"/>
-              </a:srgbClr>
-            </a:solidFill>
-            <a:prstDash val="solid"/>
-          </a:ln>
-        </p:spPr>
-      </p:sp>
-      <p:sp>
-        <p:nvSpPr>
-          <p:cNvPr id="11" name="Shape 9"/>
-          <p:cNvSpPr/>
-          <p:nvPr/>
-        </p:nvSpPr>
-        <p:spPr>
-          <a:xfrm>
-            <a:off x="822960" y="1325880"/>
-            <a:ext cx="73152" cy="73152"/>
-          </a:xfrm>
-          <a:prstGeom prst="ellipse">
-            <a:avLst/>
-          </a:prstGeom>
-          <a:solidFill>
-            <a:srgbClr val="EF4444"/>
-          </a:solidFill>
-          <a:ln w="12700">
-            <a:solidFill>
-              <a:srgbClr val="EF4444"/>
-            </a:solidFill>
-            <a:prstDash val="solid"/>
-          </a:ln>
-        </p:spPr>
-      </p:sp>
-      <p:sp>
-        <p:nvSpPr>
-          <p:cNvPr id="12" name="Shape 10"/>
-          <p:cNvSpPr/>
-          <p:nvPr/>
-        </p:nvSpPr>
-        <p:spPr>
-          <a:xfrm>
-            <a:off x="950976" y="1325880"/>
-            <a:ext cx="73152" cy="73152"/>
-          </a:xfrm>
-          <a:prstGeom prst="ellipse">
-            <a:avLst/>
-          </a:prstGeom>
-          <a:solidFill>
-            <a:srgbClr val="F59E0B"/>
-          </a:solidFill>
-          <a:ln w="12700">
-            <a:solidFill>
-              <a:srgbClr val="F59E0B"/>
-            </a:solidFill>
-            <a:prstDash val="solid"/>
-          </a:ln>
-        </p:spPr>
-      </p:sp>
-      <p:sp>
-        <p:nvSpPr>
-          <p:cNvPr id="13" name="Shape 11"/>
-          <p:cNvSpPr/>
-          <p:nvPr/>
-        </p:nvSpPr>
-        <p:spPr>
-          <a:xfrm>
-            <a:off x="1078992" y="1325880"/>
-            <a:ext cx="73152" cy="73152"/>
-          </a:xfrm>
-          <a:prstGeom prst="ellipse">
-            <a:avLst/>
-          </a:prstGeom>
-          <a:solidFill>
-            <a:srgbClr val="22C55E"/>
-          </a:solidFill>
-          <a:ln w="12700">
-            <a:solidFill>
-              <a:srgbClr val="22C55E"/>
-            </a:solidFill>
-            <a:prstDash val="solid"/>
-          </a:ln>
-        </p:spPr>
+          <p:cNvPr id="15" name="Text 11">
+            <a:extLst>
+              <a:ext uri="{FF2B5EF4-FFF2-40B4-BE49-F238E27FC236}">
+                <a16:creationId xmlns:a16="http://schemas.microsoft.com/office/drawing/2014/main" id="{FADAA263-3681-39E5-5AB6-882C5FD0D24C}"/>
+              </a:ext>
+            </a:extLst>
+          </p:cNvPr>
+          <p:cNvSpPr/>
+          <p:nvPr/>
+        </p:nvSpPr>
+        <p:spPr>
+          <a:xfrm>
+            <a:off x="744583" y="6570187"/>
+            <a:ext cx="4389120" cy="137160"/>
+          </a:xfrm>
+          <a:prstGeom prst="rect">
+            <a:avLst/>
+          </a:prstGeom>
+          <a:noFill/>
+          <a:ln/>
+        </p:spPr>
+        <p:txBody>
+          <a:bodyPr wrap="square" lIns="0" tIns="0" rIns="0" bIns="0" rtlCol="0" anchor="ctr">
+            <a:normAutofit/>
+          </a:bodyPr>
+          <a:lstStyle/>
+          <a:p>
+            <a:pPr marL="0" indent="0">
+              <a:buNone/>
+            </a:pPr>
+            <a:r>
+              <a:rPr lang="en-US" sz="660" dirty="0">
+                <a:solidFill>
+                  <a:srgbClr val="9CA3AF"/>
+                </a:solidFill>
+              </a:rPr>
+              <a:t>YallaMarket  •  Software Engineering Final Presentation</a:t>
+            </a:r>
+            <a:endParaRPr lang="en-US" sz="660" dirty="0"/>
+          </a:p>
+        </p:txBody>
       </p:sp>
       <p:pic>
         <p:nvPicPr>
-          <p:cNvPr id="14" name="Image 0" descr="/mnt/data/image(601).png"/>
+          <p:cNvPr id="3" name="Graphic 2">
+            <a:extLst>
+              <a:ext uri="{FF2B5EF4-FFF2-40B4-BE49-F238E27FC236}">
+                <a16:creationId xmlns:a16="http://schemas.microsoft.com/office/drawing/2014/main" id="{32F011FE-601D-4FF5-2BDD-C114D1D9068C}"/>
+              </a:ext>
+            </a:extLst>
+          </p:cNvPr>
           <p:cNvPicPr>
             <a:picLocks noChangeAspect="1"/>
           </p:cNvPicPr>
           <p:nvPr/>
         </p:nvPicPr>
         <p:blipFill>
-          <a:blip r:embed="rId3"/>
+          <a:blip>
+            <a:extLst>
+              <a:ext uri="{96DAC541-7B7A-43D3-8B79-37D633B846F1}">
+                <asvg:svgBlip xmlns:asvg="http://schemas.microsoft.com/office/drawing/2016/SVG/main" r:embed="rId3"/>
+              </a:ext>
+            </a:extLst>
+          </a:blip>
           <a:stretch>
             <a:fillRect/>
           </a:stretch>
         </p:blipFill>
         <p:spPr>
           <a:xfrm>
-            <a:off x="1133856" y="1572768"/>
-            <a:ext cx="3959352" cy="3959352"/>
+            <a:off x="2172174" y="1188721"/>
+            <a:ext cx="7326389" cy="5276088"/>
           </a:xfrm>
           <a:prstGeom prst="rect">
             <a:avLst/>
@@ -13915,14 +12797,20 @@
       </p:pic>
       <p:sp>
         <p:nvSpPr>
-          <p:cNvPr id="15" name="Text 12"/>
-          <p:cNvSpPr/>
-          <p:nvPr/>
-        </p:nvSpPr>
-        <p:spPr>
-          <a:xfrm>
-            <a:off x="822960" y="5669280"/>
-            <a:ext cx="4581144" cy="137160"/>
+          <p:cNvPr id="4" name="Text 4">
+            <a:extLst>
+              <a:ext uri="{FF2B5EF4-FFF2-40B4-BE49-F238E27FC236}">
+                <a16:creationId xmlns:a16="http://schemas.microsoft.com/office/drawing/2014/main" id="{B1ED5884-0F09-024D-6C9E-316097783DF9}"/>
+              </a:ext>
+            </a:extLst>
+          </p:cNvPr>
+          <p:cNvSpPr/>
+          <p:nvPr/>
+        </p:nvSpPr>
+        <p:spPr>
+          <a:xfrm>
+            <a:off x="548640" y="707632"/>
+            <a:ext cx="6766560" cy="261631"/>
           </a:xfrm>
           <a:prstGeom prst="rect">
             <a:avLst/>
@@ -13936,289 +12824,27 @@
           </a:bodyPr>
           <a:lstStyle/>
           <a:p>
-            <a:pPr marL="0" indent="0" algn="ctr">
-              <a:buNone/>
-            </a:pPr>
-            <a:r>
-              <a:rPr lang="en-US" sz="720" i="1" dirty="0">
+            <a:pPr marL="0" indent="0">
+              <a:buNone/>
+            </a:pPr>
+            <a:r>
+              <a:rPr lang="en-US" sz="1000" b="1" dirty="0">
                 <a:solidFill>
                   <a:srgbClr val="64748B"/>
                 </a:solidFill>
               </a:rPr>
-              <a:t>Cart with quantity controls and order summary</a:t>
-            </a:r>
-            <a:endParaRPr lang="en-US" sz="720" dirty="0"/>
-          </a:p>
-        </p:txBody>
-      </p:sp>
-      <p:sp>
-        <p:nvSpPr>
-          <p:cNvPr id="16" name="Shape 13"/>
-          <p:cNvSpPr/>
-          <p:nvPr/>
-        </p:nvSpPr>
-        <p:spPr>
-          <a:xfrm>
-            <a:off x="6172200" y="1234440"/>
-            <a:ext cx="4983480" cy="4370832"/>
-          </a:xfrm>
-          <a:prstGeom prst="roundRect">
-            <a:avLst>
-              <a:gd name="adj" fmla="val 2092"/>
-            </a:avLst>
-          </a:prstGeom>
-          <a:solidFill>
-            <a:srgbClr val="FFFFFF"/>
-          </a:solidFill>
-          <a:ln w="12700">
-            <a:solidFill>
-              <a:srgbClr val="E3E0D8"/>
-            </a:solidFill>
-            <a:prstDash val="solid"/>
-          </a:ln>
-        </p:spPr>
-      </p:sp>
-      <p:sp>
-        <p:nvSpPr>
-          <p:cNvPr id="17" name="Shape 14"/>
-          <p:cNvSpPr/>
-          <p:nvPr/>
-        </p:nvSpPr>
-        <p:spPr>
-          <a:xfrm>
-            <a:off x="6172200" y="1234440"/>
-            <a:ext cx="4983480" cy="274320"/>
-          </a:xfrm>
-          <a:prstGeom prst="rect">
-            <a:avLst/>
-          </a:prstGeom>
-          <a:solidFill>
-            <a:srgbClr val="F3F0EA"/>
-          </a:solidFill>
-          <a:ln w="12700">
-            <a:solidFill>
-              <a:srgbClr val="F3F0EA">
-                <a:alpha val="0"/>
-              </a:srgbClr>
-            </a:solidFill>
-            <a:prstDash val="solid"/>
-          </a:ln>
-        </p:spPr>
-      </p:sp>
-      <p:sp>
-        <p:nvSpPr>
-          <p:cNvPr id="18" name="Shape 15"/>
-          <p:cNvSpPr/>
-          <p:nvPr/>
-        </p:nvSpPr>
-        <p:spPr>
-          <a:xfrm>
-            <a:off x="6281928" y="1325880"/>
-            <a:ext cx="73152" cy="73152"/>
-          </a:xfrm>
-          <a:prstGeom prst="ellipse">
-            <a:avLst/>
-          </a:prstGeom>
-          <a:solidFill>
-            <a:srgbClr val="EF4444"/>
-          </a:solidFill>
-          <a:ln w="12700">
-            <a:solidFill>
-              <a:srgbClr val="EF4444"/>
-            </a:solidFill>
-            <a:prstDash val="solid"/>
-          </a:ln>
-        </p:spPr>
-      </p:sp>
-      <p:sp>
-        <p:nvSpPr>
-          <p:cNvPr id="19" name="Shape 16"/>
-          <p:cNvSpPr/>
-          <p:nvPr/>
-        </p:nvSpPr>
-        <p:spPr>
-          <a:xfrm>
-            <a:off x="6409944" y="1325880"/>
-            <a:ext cx="73152" cy="73152"/>
-          </a:xfrm>
-          <a:prstGeom prst="ellipse">
-            <a:avLst/>
-          </a:prstGeom>
-          <a:solidFill>
-            <a:srgbClr val="F59E0B"/>
-          </a:solidFill>
-          <a:ln w="12700">
-            <a:solidFill>
-              <a:srgbClr val="F59E0B"/>
-            </a:solidFill>
-            <a:prstDash val="solid"/>
-          </a:ln>
-        </p:spPr>
-      </p:sp>
-      <p:sp>
-        <p:nvSpPr>
-          <p:cNvPr id="20" name="Shape 17"/>
-          <p:cNvSpPr/>
-          <p:nvPr/>
-        </p:nvSpPr>
-        <p:spPr>
-          <a:xfrm>
-            <a:off x="6537960" y="1325880"/>
-            <a:ext cx="73152" cy="73152"/>
-          </a:xfrm>
-          <a:prstGeom prst="ellipse">
-            <a:avLst/>
-          </a:prstGeom>
-          <a:solidFill>
-            <a:srgbClr val="22C55E"/>
-          </a:solidFill>
-          <a:ln w="12700">
-            <a:solidFill>
-              <a:srgbClr val="22C55E"/>
-            </a:solidFill>
-            <a:prstDash val="solid"/>
-          </a:ln>
-        </p:spPr>
-      </p:sp>
-      <p:pic>
-        <p:nvPicPr>
-          <p:cNvPr id="21" name="Image 1" descr="/mnt/data/image(602).png"/>
-          <p:cNvPicPr>
-            <a:picLocks noChangeAspect="1"/>
-          </p:cNvPicPr>
-          <p:nvPr/>
-        </p:nvPicPr>
-        <p:blipFill>
-          <a:blip r:embed="rId4"/>
-          <a:stretch>
-            <a:fillRect/>
-          </a:stretch>
-        </p:blipFill>
-        <p:spPr>
-          <a:xfrm>
-            <a:off x="6684264" y="1572768"/>
-            <a:ext cx="3959352" cy="3959352"/>
-          </a:xfrm>
-          <a:prstGeom prst="rect">
-            <a:avLst/>
-          </a:prstGeom>
-        </p:spPr>
-      </p:pic>
-      <p:sp>
-        <p:nvSpPr>
-          <p:cNvPr id="22" name="Text 18"/>
-          <p:cNvSpPr/>
-          <p:nvPr/>
-        </p:nvSpPr>
-        <p:spPr>
-          <a:xfrm>
-            <a:off x="6281928" y="5669280"/>
-            <a:ext cx="4764024" cy="137160"/>
-          </a:xfrm>
-          <a:prstGeom prst="rect">
-            <a:avLst/>
-          </a:prstGeom>
-          <a:noFill/>
-          <a:ln/>
-        </p:spPr>
-        <p:txBody>
-          <a:bodyPr wrap="square" lIns="0" tIns="0" rIns="0" bIns="0" rtlCol="0" anchor="ctr">
-            <a:normAutofit/>
-          </a:bodyPr>
-          <a:lstStyle/>
-          <a:p>
-            <a:pPr marL="0" indent="0" algn="ctr">
-              <a:buNone/>
-            </a:pPr>
-            <a:r>
-              <a:rPr lang="en-US" sz="720" i="1" dirty="0">
-                <a:solidFill>
-                  <a:srgbClr val="64748B"/>
-                </a:solidFill>
-              </a:rPr>
-              <a:t>Checkout form with customer/delivery/payment information</a:t>
-            </a:r>
-            <a:endParaRPr lang="en-US" sz="720" dirty="0"/>
-          </a:p>
-        </p:txBody>
-      </p:sp>
-      <p:sp>
-        <p:nvSpPr>
-          <p:cNvPr id="23" name="Text 19"/>
-          <p:cNvSpPr/>
-          <p:nvPr/>
-        </p:nvSpPr>
-        <p:spPr>
-          <a:xfrm>
-            <a:off x="1005840" y="5897880"/>
-            <a:ext cx="9875520" cy="228600"/>
-          </a:xfrm>
-          <a:prstGeom prst="rect">
-            <a:avLst/>
-          </a:prstGeom>
-          <a:noFill/>
-          <a:ln/>
-        </p:spPr>
-        <p:txBody>
-          <a:bodyPr wrap="square" lIns="0" tIns="0" rIns="0" bIns="0" rtlCol="0" anchor="ctr">
-            <a:normAutofit/>
-          </a:bodyPr>
-          <a:lstStyle/>
-          <a:p>
-            <a:pPr marL="0" indent="0" algn="ctr">
-              <a:buNone/>
-            </a:pPr>
-            <a:r>
-              <a:rPr lang="en-US" sz="1120" b="1" dirty="0">
-                <a:solidFill>
-                  <a:srgbClr val="475569"/>
-                </a:solidFill>
-              </a:rPr>
-              <a:t>Cart persists in localStorage and is transformed into server-side order records after checkout submission.</a:t>
-            </a:r>
-            <a:endParaRPr lang="en-US" sz="1120" dirty="0"/>
-          </a:p>
-        </p:txBody>
-      </p:sp>
-      <p:sp>
-        <p:nvSpPr>
-          <p:cNvPr id="24" name="Text 20"/>
-          <p:cNvSpPr/>
-          <p:nvPr/>
-        </p:nvSpPr>
-        <p:spPr>
-          <a:xfrm>
-            <a:off x="530352" y="6565392"/>
-            <a:ext cx="4389120" cy="137160"/>
-          </a:xfrm>
-          <a:prstGeom prst="rect">
-            <a:avLst/>
-          </a:prstGeom>
-          <a:noFill/>
-          <a:ln/>
-        </p:spPr>
-        <p:txBody>
-          <a:bodyPr wrap="square" lIns="0" tIns="0" rIns="0" bIns="0" rtlCol="0" anchor="ctr">
-            <a:normAutofit/>
-          </a:bodyPr>
-          <a:lstStyle/>
-          <a:p>
-            <a:pPr marL="0" indent="0">
-              <a:buNone/>
-            </a:pPr>
-            <a:r>
-              <a:rPr lang="en-US" sz="660" dirty="0">
-                <a:solidFill>
-                  <a:srgbClr val="9CA3AF"/>
-                </a:solidFill>
-              </a:rPr>
-              <a:t>YallaMarket  •  Software Engineering Final Presentation</a:t>
-            </a:r>
-            <a:endParaRPr lang="en-US" sz="660" dirty="0"/>
+              <a:t>High level Architecture Diagram</a:t>
+            </a:r>
+            <a:endParaRPr lang="en-US" sz="1000" dirty="0"/>
           </a:p>
         </p:txBody>
       </p:sp>
     </p:spTree>
+    <p:extLst>
+      <p:ext uri="{BB962C8B-B14F-4D97-AF65-F5344CB8AC3E}">
+        <p14:creationId xmlns:p14="http://schemas.microsoft.com/office/powerpoint/2010/main" val="4060026400"/>
+      </p:ext>
+    </p:extLst>
   </p:cSld>
   <p:clrMapOvr>
     <a:masterClrMapping/>
@@ -14253,83 +12879,6 @@
       </p:grpSpPr>
       <p:sp>
         <p:nvSpPr>
-          <p:cNvPr id="2" name="Shape 0"/>
-          <p:cNvSpPr/>
-          <p:nvPr/>
-        </p:nvSpPr>
-        <p:spPr>
-          <a:xfrm>
-            <a:off x="0" y="0"/>
-            <a:ext cx="12191695" cy="6858000"/>
-          </a:xfrm>
-          <a:prstGeom prst="rect">
-            <a:avLst/>
-          </a:prstGeom>
-          <a:solidFill>
-            <a:srgbClr val="FBFAF8"/>
-          </a:solidFill>
-          <a:ln w="12700">
-            <a:solidFill>
-              <a:srgbClr val="FBFAF8">
-                <a:alpha val="0"/>
-              </a:srgbClr>
-            </a:solidFill>
-            <a:prstDash val="solid"/>
-          </a:ln>
-        </p:spPr>
-      </p:sp>
-      <p:sp>
-        <p:nvSpPr>
-          <p:cNvPr id="3" name="Shape 1"/>
-          <p:cNvSpPr/>
-          <p:nvPr/>
-        </p:nvSpPr>
-        <p:spPr>
-          <a:xfrm>
-            <a:off x="8869680" y="-1051560"/>
-            <a:ext cx="4297680" cy="4297680"/>
-          </a:xfrm>
-          <a:prstGeom prst="arc">
-            <a:avLst/>
-          </a:prstGeom>
-          <a:noFill/>
-          <a:ln w="20320">
-            <a:solidFill>
-              <a:srgbClr val="FCD9A1">
-                <a:alpha val="75000"/>
-              </a:srgbClr>
-            </a:solidFill>
-            <a:prstDash val="solid"/>
-          </a:ln>
-        </p:spPr>
-      </p:sp>
-      <p:sp>
-        <p:nvSpPr>
-          <p:cNvPr id="4" name="Shape 2"/>
-          <p:cNvSpPr/>
-          <p:nvPr/>
-        </p:nvSpPr>
-        <p:spPr>
-          <a:xfrm>
-            <a:off x="-1097280" y="4800600"/>
-            <a:ext cx="2926080" cy="2926080"/>
-          </a:xfrm>
-          <a:prstGeom prst="arc">
-            <a:avLst/>
-          </a:prstGeom>
-          <a:noFill/>
-          <a:ln w="15240">
-            <a:solidFill>
-              <a:srgbClr val="FCD9A1">
-                <a:alpha val="55000"/>
-              </a:srgbClr>
-            </a:solidFill>
-            <a:prstDash val="solid"/>
-          </a:ln>
-        </p:spPr>
-      </p:sp>
-      <p:sp>
-        <p:nvSpPr>
           <p:cNvPr id="5" name="Text 3"/>
           <p:cNvSpPr/>
           <p:nvPr/>
@@ -14347,7 +12896,7 @@
         </p:spPr>
         <p:txBody>
           <a:bodyPr wrap="square" lIns="0" tIns="0" rIns="0" bIns="0" rtlCol="0" anchor="ctr">
-            <a:normAutofit/>
+            <a:normAutofit lnSpcReduction="10000"/>
           </a:bodyPr>
           <a:lstStyle/>
           <a:p>
@@ -14377,8 +12926,8 @@
         </p:nvSpPr>
         <p:spPr>
           <a:xfrm>
-            <a:off x="548640" y="713232"/>
-            <a:ext cx="6766560" cy="155448"/>
+            <a:off x="548640" y="713231"/>
+            <a:ext cx="6766560" cy="237743"/>
           </a:xfrm>
           <a:prstGeom prst="rect">
             <a:avLst/>
@@ -14396,14 +12945,14 @@
               <a:buNone/>
             </a:pPr>
             <a:r>
-              <a:rPr lang="en-US" sz="780" b="1" dirty="0">
+              <a:rPr lang="en-US" sz="1000" b="1" dirty="0">
                 <a:solidFill>
                   <a:srgbClr val="64748B"/>
                 </a:solidFill>
               </a:rPr>
-              <a:t>USE CASE AND CLASS DIAGRAMS</a:t>
-            </a:r>
-            <a:endParaRPr lang="en-US" sz="780" dirty="0"/>
+              <a:t>USE CASE DIAGRAM</a:t>
+            </a:r>
+            <a:endParaRPr lang="en-US" sz="1000" dirty="0"/>
           </a:p>
         </p:txBody>
       </p:sp>
@@ -14476,8 +13025,8 @@
         </p:nvSpPr>
         <p:spPr>
           <a:xfrm>
-            <a:off x="640080" y="1234440"/>
-            <a:ext cx="5486400" cy="4434840"/>
+            <a:off x="634482" y="1188721"/>
+            <a:ext cx="11395998" cy="5276088"/>
           </a:xfrm>
           <a:prstGeom prst="roundRect">
             <a:avLst>
@@ -14495,9 +13044,53 @@
           </a:ln>
         </p:spPr>
       </p:sp>
+      <p:sp>
+        <p:nvSpPr>
+          <p:cNvPr id="15" name="Text 11"/>
+          <p:cNvSpPr/>
+          <p:nvPr/>
+        </p:nvSpPr>
+        <p:spPr>
+          <a:xfrm>
+            <a:off x="744583" y="6570187"/>
+            <a:ext cx="4389120" cy="137160"/>
+          </a:xfrm>
+          <a:prstGeom prst="rect">
+            <a:avLst/>
+          </a:prstGeom>
+          <a:noFill/>
+          <a:ln/>
+        </p:spPr>
+        <p:txBody>
+          <a:bodyPr wrap="square" lIns="0" tIns="0" rIns="0" bIns="0" rtlCol="0" anchor="ctr">
+            <a:normAutofit/>
+          </a:bodyPr>
+          <a:lstStyle/>
+          <a:p>
+            <a:pPr marL="0" indent="0">
+              <a:buNone/>
+            </a:pPr>
+            <a:r>
+              <a:rPr lang="en-US" sz="660" dirty="0">
+                <a:solidFill>
+                  <a:srgbClr val="9CA3AF"/>
+                </a:solidFill>
+              </a:rPr>
+              <a:t>YallaMarket  •  Software Engineering Final Presentation</a:t>
+            </a:r>
+            <a:endParaRPr lang="en-US" sz="660" dirty="0"/>
+          </a:p>
+        </p:txBody>
+      </p:sp>
       <p:pic>
         <p:nvPicPr>
-          <p:cNvPr id="10" name="Image 0" descr="/mnt/data/YallaMarket_UseCaseDiagram.png"/>
+          <p:cNvPr id="17" name="Picture 16">
+            <a:extLst>
+              <a:ext uri="{FF2B5EF4-FFF2-40B4-BE49-F238E27FC236}">
+                <a16:creationId xmlns:a16="http://schemas.microsoft.com/office/drawing/2014/main" id="{5BA5A213-728E-A688-4233-D8F01A8E6DE2}"/>
+              </a:ext>
+            </a:extLst>
+          </p:cNvPr>
           <p:cNvPicPr>
             <a:picLocks noChangeAspect="1"/>
           </p:cNvPicPr>
@@ -14511,179 +13104,14 @@
         </p:blipFill>
         <p:spPr>
           <a:xfrm>
-            <a:off x="1394460" y="1417320"/>
-            <a:ext cx="3977640" cy="3977640"/>
+            <a:off x="2521282" y="1408177"/>
+            <a:ext cx="7506343" cy="4818887"/>
           </a:xfrm>
           <a:prstGeom prst="rect">
             <a:avLst/>
           </a:prstGeom>
         </p:spPr>
       </p:pic>
-      <p:sp>
-        <p:nvSpPr>
-          <p:cNvPr id="11" name="Text 8"/>
-          <p:cNvSpPr/>
-          <p:nvPr/>
-        </p:nvSpPr>
-        <p:spPr>
-          <a:xfrm>
-            <a:off x="822960" y="5504688"/>
-            <a:ext cx="5120640" cy="128016"/>
-          </a:xfrm>
-          <a:prstGeom prst="rect">
-            <a:avLst/>
-          </a:prstGeom>
-          <a:noFill/>
-          <a:ln/>
-        </p:spPr>
-        <p:txBody>
-          <a:bodyPr wrap="square" lIns="0" tIns="0" rIns="0" bIns="0" rtlCol="0" anchor="ctr">
-            <a:normAutofit/>
-          </a:bodyPr>
-          <a:lstStyle/>
-          <a:p>
-            <a:pPr marL="0" indent="0" algn="ctr">
-              <a:buNone/>
-            </a:pPr>
-            <a:r>
-              <a:rPr lang="en-US" sz="780" i="1" dirty="0">
-                <a:solidFill>
-                  <a:srgbClr val="64748B"/>
-                </a:solidFill>
-              </a:rPr>
-              <a:t>Use Case Diagram</a:t>
-            </a:r>
-            <a:endParaRPr lang="en-US" sz="780" dirty="0"/>
-          </a:p>
-        </p:txBody>
-      </p:sp>
-      <p:sp>
-        <p:nvSpPr>
-          <p:cNvPr id="12" name="Shape 9"/>
-          <p:cNvSpPr/>
-          <p:nvPr/>
-        </p:nvSpPr>
-        <p:spPr>
-          <a:xfrm>
-            <a:off x="6355080" y="1234440"/>
-            <a:ext cx="5166360" cy="4434840"/>
-          </a:xfrm>
-          <a:prstGeom prst="roundRect">
-            <a:avLst>
-              <a:gd name="adj" fmla="val 2062"/>
-            </a:avLst>
-          </a:prstGeom>
-          <a:solidFill>
-            <a:srgbClr val="FFFFFF"/>
-          </a:solidFill>
-          <a:ln w="12700">
-            <a:solidFill>
-              <a:srgbClr val="E4DED4"/>
-            </a:solidFill>
-            <a:prstDash val="solid"/>
-          </a:ln>
-        </p:spPr>
-      </p:sp>
-      <p:pic>
-        <p:nvPicPr>
-          <p:cNvPr id="13" name="Image 1" descr="/mnt/data/YallaMarket_Class_Diagram.drawio(2).png"/>
-          <p:cNvPicPr>
-            <a:picLocks noChangeAspect="1"/>
-          </p:cNvPicPr>
-          <p:nvPr/>
-        </p:nvPicPr>
-        <p:blipFill>
-          <a:blip r:embed="rId4"/>
-          <a:stretch>
-            <a:fillRect/>
-          </a:stretch>
-        </p:blipFill>
-        <p:spPr>
-          <a:xfrm>
-            <a:off x="6949440" y="1417320"/>
-            <a:ext cx="3977640" cy="3977640"/>
-          </a:xfrm>
-          <a:prstGeom prst="rect">
-            <a:avLst/>
-          </a:prstGeom>
-        </p:spPr>
-      </p:pic>
-      <p:sp>
-        <p:nvSpPr>
-          <p:cNvPr id="14" name="Text 10"/>
-          <p:cNvSpPr/>
-          <p:nvPr/>
-        </p:nvSpPr>
-        <p:spPr>
-          <a:xfrm>
-            <a:off x="6537960" y="5504688"/>
-            <a:ext cx="4800600" cy="128016"/>
-          </a:xfrm>
-          <a:prstGeom prst="rect">
-            <a:avLst/>
-          </a:prstGeom>
-          <a:noFill/>
-          <a:ln/>
-        </p:spPr>
-        <p:txBody>
-          <a:bodyPr wrap="square" lIns="0" tIns="0" rIns="0" bIns="0" rtlCol="0" anchor="ctr">
-            <a:normAutofit/>
-          </a:bodyPr>
-          <a:lstStyle/>
-          <a:p>
-            <a:pPr marL="0" indent="0" algn="ctr">
-              <a:buNone/>
-            </a:pPr>
-            <a:r>
-              <a:rPr lang="en-US" sz="780" i="1" dirty="0">
-                <a:solidFill>
-                  <a:srgbClr val="64748B"/>
-                </a:solidFill>
-              </a:rPr>
-              <a:t>Class Diagram</a:t>
-            </a:r>
-            <a:endParaRPr lang="en-US" sz="780" dirty="0"/>
-          </a:p>
-        </p:txBody>
-      </p:sp>
-      <p:sp>
-        <p:nvSpPr>
-          <p:cNvPr id="15" name="Text 11"/>
-          <p:cNvSpPr/>
-          <p:nvPr/>
-        </p:nvSpPr>
-        <p:spPr>
-          <a:xfrm>
-            <a:off x="530352" y="6565392"/>
-            <a:ext cx="4389120" cy="137160"/>
-          </a:xfrm>
-          <a:prstGeom prst="rect">
-            <a:avLst/>
-          </a:prstGeom>
-          <a:noFill/>
-          <a:ln/>
-        </p:spPr>
-        <p:txBody>
-          <a:bodyPr wrap="square" lIns="0" tIns="0" rIns="0" bIns="0" rtlCol="0" anchor="ctr">
-            <a:normAutofit/>
-          </a:bodyPr>
-          <a:lstStyle/>
-          <a:p>
-            <a:pPr marL="0" indent="0">
-              <a:buNone/>
-            </a:pPr>
-            <a:r>
-              <a:rPr lang="en-US" sz="660" dirty="0">
-                <a:solidFill>
-                  <a:srgbClr val="9CA3AF"/>
-                </a:solidFill>
-              </a:rPr>
-              <a:t>YallaMarket  •  Software Engineering Final Presentation</a:t>
-            </a:r>
-            <a:endParaRPr lang="en-US" sz="660" dirty="0"/>
-          </a:p>
-        </p:txBody>
-      </p:sp>
     </p:spTree>
   </p:cSld>
   <p:clrMapOvr>
@@ -14719,83 +13147,6 @@
       </p:grpSpPr>
       <p:sp>
         <p:nvSpPr>
-          <p:cNvPr id="2" name="Shape 0"/>
-          <p:cNvSpPr/>
-          <p:nvPr/>
-        </p:nvSpPr>
-        <p:spPr>
-          <a:xfrm>
-            <a:off x="0" y="0"/>
-            <a:ext cx="12191695" cy="6858000"/>
-          </a:xfrm>
-          <a:prstGeom prst="rect">
-            <a:avLst/>
-          </a:prstGeom>
-          <a:solidFill>
-            <a:srgbClr val="FBFAF8"/>
-          </a:solidFill>
-          <a:ln w="12700">
-            <a:solidFill>
-              <a:srgbClr val="FBFAF8">
-                <a:alpha val="0"/>
-              </a:srgbClr>
-            </a:solidFill>
-            <a:prstDash val="solid"/>
-          </a:ln>
-        </p:spPr>
-      </p:sp>
-      <p:sp>
-        <p:nvSpPr>
-          <p:cNvPr id="3" name="Shape 1"/>
-          <p:cNvSpPr/>
-          <p:nvPr/>
-        </p:nvSpPr>
-        <p:spPr>
-          <a:xfrm>
-            <a:off x="8869680" y="-1051560"/>
-            <a:ext cx="4297680" cy="4297680"/>
-          </a:xfrm>
-          <a:prstGeom prst="arc">
-            <a:avLst/>
-          </a:prstGeom>
-          <a:noFill/>
-          <a:ln w="20320">
-            <a:solidFill>
-              <a:srgbClr val="FCD9A1">
-                <a:alpha val="75000"/>
-              </a:srgbClr>
-            </a:solidFill>
-            <a:prstDash val="solid"/>
-          </a:ln>
-        </p:spPr>
-      </p:sp>
-      <p:sp>
-        <p:nvSpPr>
-          <p:cNvPr id="4" name="Shape 2"/>
-          <p:cNvSpPr/>
-          <p:nvPr/>
-        </p:nvSpPr>
-        <p:spPr>
-          <a:xfrm>
-            <a:off x="-1097280" y="4800600"/>
-            <a:ext cx="2926080" cy="2926080"/>
-          </a:xfrm>
-          <a:prstGeom prst="arc">
-            <a:avLst/>
-          </a:prstGeom>
-          <a:noFill/>
-          <a:ln w="15240">
-            <a:solidFill>
-              <a:srgbClr val="FCD9A1">
-                <a:alpha val="55000"/>
-              </a:srgbClr>
-            </a:solidFill>
-            <a:prstDash val="solid"/>
-          </a:ln>
-        </p:spPr>
-      </p:sp>
-      <p:sp>
-        <p:nvSpPr>
           <p:cNvPr id="5" name="Text 3"/>
           <p:cNvSpPr/>
           <p:nvPr/>
@@ -14813,7 +13164,7 @@
         </p:spPr>
         <p:txBody>
           <a:bodyPr wrap="square" lIns="0" tIns="0" rIns="0" bIns="0" rtlCol="0" anchor="ctr">
-            <a:normAutofit/>
+            <a:normAutofit lnSpcReduction="10000"/>
           </a:bodyPr>
           <a:lstStyle/>
           <a:p>
@@ -14844,7 +13195,7 @@
         <p:spPr>
           <a:xfrm>
             <a:off x="548640" y="713232"/>
-            <a:ext cx="6766560" cy="155448"/>
+            <a:ext cx="6766560" cy="256032"/>
           </a:xfrm>
           <a:prstGeom prst="rect">
             <a:avLst/>
@@ -14862,14 +13213,14 @@
               <a:buNone/>
             </a:pPr>
             <a:r>
-              <a:rPr lang="en-US" sz="780" b="1" dirty="0">
+              <a:rPr lang="en-US" sz="1000" b="1" dirty="0">
                 <a:solidFill>
                   <a:srgbClr val="64748B"/>
                 </a:solidFill>
               </a:rPr>
               <a:t>ERD AND PERSISTENCE STRATEGY</a:t>
             </a:r>
-            <a:endParaRPr lang="en-US" sz="780" dirty="0"/>
+            <a:endParaRPr lang="en-US" sz="1000" dirty="0"/>
           </a:p>
         </p:txBody>
       </p:sp>
@@ -14943,7 +13294,7 @@
         <p:spPr>
           <a:xfrm>
             <a:off x="594360" y="1207008"/>
-            <a:ext cx="6995160" cy="4572000"/>
+            <a:ext cx="7799832" cy="4572000"/>
           </a:xfrm>
           <a:prstGeom prst="roundRect">
             <a:avLst>
@@ -14961,30 +13312,6 @@
           </a:ln>
         </p:spPr>
       </p:sp>
-      <p:pic>
-        <p:nvPicPr>
-          <p:cNvPr id="10" name="Image 0" descr="/mnt/data/YallaMarket_ERD_Diagram.drawio.png"/>
-          <p:cNvPicPr>
-            <a:picLocks noChangeAspect="1"/>
-          </p:cNvPicPr>
-          <p:nvPr/>
-        </p:nvPicPr>
-        <p:blipFill>
-          <a:blip r:embed="rId3"/>
-          <a:stretch>
-            <a:fillRect/>
-          </a:stretch>
-        </p:blipFill>
-        <p:spPr>
-          <a:xfrm>
-            <a:off x="1502229" y="1417320"/>
-            <a:ext cx="5038529" cy="4160520"/>
-          </a:xfrm>
-          <a:prstGeom prst="rect">
-            <a:avLst/>
-          </a:prstGeom>
-        </p:spPr>
-      </p:pic>
       <p:sp>
         <p:nvSpPr>
           <p:cNvPr id="11" name="Shape 8"/>
@@ -14993,8 +13320,8 @@
         </p:nvSpPr>
         <p:spPr>
           <a:xfrm>
-            <a:off x="7909560" y="1371600"/>
-            <a:ext cx="3520440" cy="3977640"/>
+            <a:off x="8595360" y="1371600"/>
+            <a:ext cx="3035808" cy="3977640"/>
           </a:xfrm>
           <a:prstGeom prst="roundRect">
             <a:avLst>
@@ -15020,7 +13347,7 @@
         </p:nvSpPr>
         <p:spPr>
           <a:xfrm>
-            <a:off x="8183880" y="1691640"/>
+            <a:off x="8705088" y="1691640"/>
             <a:ext cx="2148840" cy="228600"/>
           </a:xfrm>
           <a:prstGeom prst="rect">
@@ -15031,7 +13358,7 @@
         </p:spPr>
         <p:txBody>
           <a:bodyPr wrap="square" lIns="0" tIns="0" rIns="0" bIns="0" rtlCol="0" anchor="ctr">
-            <a:normAutofit/>
+            <a:normAutofit fontScale="92500" lnSpcReduction="10000"/>
           </a:bodyPr>
           <a:lstStyle/>
           <a:p>
@@ -15058,7 +13385,7 @@
         </p:nvSpPr>
         <p:spPr>
           <a:xfrm>
-            <a:off x="8183880" y="2157984"/>
+            <a:off x="8705088" y="2157984"/>
             <a:ext cx="2788920" cy="1143000"/>
           </a:xfrm>
           <a:prstGeom prst="rect">
@@ -15099,7 +13426,7 @@
         </p:nvSpPr>
         <p:spPr>
           <a:xfrm>
-            <a:off x="8183880" y="3986784"/>
+            <a:off x="8705088" y="3986784"/>
             <a:ext cx="1463040" cy="164592"/>
           </a:xfrm>
           <a:prstGeom prst="rect">
@@ -15137,7 +13464,7 @@
         </p:nvSpPr>
         <p:spPr>
           <a:xfrm>
-            <a:off x="8183880" y="4315968"/>
+            <a:off x="8705088" y="4315968"/>
             <a:ext cx="2788920" cy="384048"/>
           </a:xfrm>
           <a:prstGeom prst="rect">
@@ -15205,6 +13532,36 @@
           </a:p>
         </p:txBody>
       </p:sp>
+      <p:pic>
+        <p:nvPicPr>
+          <p:cNvPr id="18" name="Picture 17">
+            <a:extLst>
+              <a:ext uri="{FF2B5EF4-FFF2-40B4-BE49-F238E27FC236}">
+                <a16:creationId xmlns:a16="http://schemas.microsoft.com/office/drawing/2014/main" id="{29F185E7-EB1D-88B9-78FD-8E1D5B7D99D1}"/>
+              </a:ext>
+            </a:extLst>
+          </p:cNvPr>
+          <p:cNvPicPr>
+            <a:picLocks noChangeAspect="1"/>
+          </p:cNvPicPr>
+          <p:nvPr/>
+        </p:nvPicPr>
+        <p:blipFill>
+          <a:blip r:embed="rId3"/>
+          <a:stretch>
+            <a:fillRect/>
+          </a:stretch>
+        </p:blipFill>
+        <p:spPr>
+          <a:xfrm>
+            <a:off x="762000" y="1481763"/>
+            <a:ext cx="7444740" cy="3638441"/>
+          </a:xfrm>
+          <a:prstGeom prst="rect">
+            <a:avLst/>
+          </a:prstGeom>
+        </p:spPr>
+      </p:pic>
     </p:spTree>
   </p:cSld>
   <p:clrMapOvr>
